--- a/lecons/USA/Population Geography/22_USA_POP_L18_Theories_of_Population_and_Resources_Malthus_and_Boserup.pptx
+++ b/lecons/USA/Population Geography/22_USA_POP_L18_Theories_of_Population_and_Resources_Malthus_and_Boserup.pptx
@@ -59,9 +59,20 @@
     <p:sldId id="307" r:id="rId53"/>
     <p:sldId id="308" r:id="rId54"/>
     <p:sldId id="309" r:id="rId55"/>
+    <p:sldId id="310" r:id="rId56"/>
+    <p:sldId id="311" r:id="rId57"/>
+    <p:sldId id="312" r:id="rId58"/>
+    <p:sldId id="313" r:id="rId59"/>
+    <p:sldId id="314" r:id="rId60"/>
+    <p:sldId id="315" r:id="rId61"/>
+    <p:sldId id="316" r:id="rId62"/>
+    <p:sldId id="317" r:id="rId63"/>
+    <p:sldId id="318" r:id="rId64"/>
+    <p:sldId id="319" r:id="rId65"/>
+    <p:sldId id="320" r:id="rId66"/>
   </p:sldIdLst>
   <p:notesMasterIdLst>
-    <p:notesMasterId r:id="rId56"/>
+    <p:notesMasterId r:id="rId67"/>
   </p:notesMasterIdLst>
   <p:sldSz cx="12192000" cy="6858000"/>
   <p:notesSz cx="6858000" cy="12192000"/>
@@ -643,7 +654,7 @@
           <a:p>
             <a:r>
               <a:rPr lang="en-US" dirty="0"/>
-              <a:t>Question 1: What is the problem in the situation? Think for a moment, then raise your hand to answer.</a:t>
+              <a:t>Take your time to copy this part; we will continue together.</a:t>
             </a:r>
             <a:endParaRPr lang="en-US" dirty="0"/>
           </a:p>
@@ -731,7 +742,7 @@
           <a:p>
             <a:r>
               <a:rPr lang="en-US" dirty="0"/>
-              <a:t>Good. They disagree on whether population growth is good or bad.</a:t>
+              <a:t>Take your time to copy this part; we will continue together.</a:t>
             </a:r>
             <a:endParaRPr lang="en-US" dirty="0"/>
           </a:p>
@@ -819,7 +830,7 @@
           <a:p>
             <a:r>
               <a:rPr lang="en-US" dirty="0"/>
-              <a:t>Question 2: Whose idea is the economist's? Think for a moment, then raise your hand to answer.</a:t>
+              <a:t>Listen carefully to this situation from real life. In a village near Lagdo, which has grown from 50 to more than 200 families, two elders debate. Mallam Bello says: "The land of each family is getting smaller and the soil is tired; soon there will be hunger and conflict!" Madame Fanta, head of the women's farming cooperative, answers: "More people means more hands and more minds; this pressure will push our children to irrigate from the lake and use better seeds!" A young man listening asks: "Who is right, and are these only the opinions of two elders?" Think about it, because I am going to ask you some questions.</a:t>
             </a:r>
             <a:endParaRPr lang="en-US" dirty="0"/>
           </a:p>
@@ -907,7 +918,7 @@
           <a:p>
             <a:r>
               <a:rPr lang="en-US" dirty="0"/>
-              <a:t>Good. Malthus's pessimistic theory.</a:t>
+              <a:t>Question 1: What is the problem in the situation? Think for a moment, then raise your hand to answer.</a:t>
             </a:r>
             <a:endParaRPr lang="en-US" dirty="0"/>
           </a:p>
@@ -995,7 +1006,7 @@
           <a:p>
             <a:r>
               <a:rPr lang="en-US" dirty="0"/>
-              <a:t>Question 3: Whose idea is the farmer's? Think for a moment, then raise your hand to answer.</a:t>
+              <a:t>Good. The young man does not know the theories on population growth and resources.</a:t>
             </a:r>
             <a:endParaRPr lang="en-US" dirty="0"/>
           </a:p>
@@ -1083,7 +1094,7 @@
           <a:p>
             <a:r>
               <a:rPr lang="en-US" dirty="0"/>
-              <a:t>Good. Boserup's optimistic theory.</a:t>
+              <a:t>Question 2: What is the view of Mallam Bello? Think for a moment, then raise your hand to answer.</a:t>
             </a:r>
             <a:endParaRPr lang="en-US" dirty="0"/>
           </a:p>
@@ -1171,7 +1182,7 @@
           <a:p>
             <a:r>
               <a:rPr lang="en-US" dirty="0"/>
-              <a:t>From this situation, the action we are working towards in this lesson is the following: evaluate theories of population and resources and apply them to Cameroon.</a:t>
+              <a:t>Good. A pessimistic view: population will grow faster than food.</a:t>
             </a:r>
             <a:endParaRPr lang="en-US" dirty="0"/>
           </a:p>
@@ -1259,7 +1270,7 @@
           <a:p>
             <a:r>
               <a:rPr lang="en-US" dirty="0"/>
-              <a:t>Why is this lesson important for you? This lesson helps us to debate whether population growth is a problem or a driver of progress.</a:t>
+              <a:t>Question 3: What is the view of Madame Fanta? Think for a moment, then raise your hand to answer.</a:t>
             </a:r>
             <a:endParaRPr lang="en-US" dirty="0"/>
           </a:p>
@@ -1347,7 +1358,7 @@
           <a:p>
             <a:r>
               <a:rPr lang="en-US" dirty="0"/>
-              <a:t>Activity 1. Look carefully at this diagram: malthus: population outgrows food. Observe every detail before I ask the question.</a:t>
+              <a:t>Good. An optimistic view: population pressure will lead to new farming methods.</a:t>
             </a:r>
             <a:endParaRPr lang="en-US" dirty="0"/>
           </a:p>
@@ -1435,7 +1446,7 @@
           <a:p>
             <a:r>
               <a:rPr lang="en-US" dirty="0"/>
-              <a:t>Here is the question for Activity 1: According to Malthus, how do population and food grow? Take one minute to think and write your answer in your rough notebook.</a:t>
+              <a:t>From this situation, the action we are working towards in this lesson is the following: combine the control of population growth with innovation in farming to ensure food security.</a:t>
             </a:r>
             <a:endParaRPr lang="en-US" dirty="0"/>
           </a:p>
@@ -1611,7 +1622,7 @@
           <a:p>
             <a:r>
               <a:rPr lang="en-US" dirty="0"/>
-              <a:t>Let us check the answer together. Population grows geometrically (1, 2, 4, 8); food grows arithmetically (1, 2, 3, 4).</a:t>
+              <a:t>Why is this lesson important for you? This lesson helps us to judge the future of population and food in Cameroon and the world with scientific theories.</a:t>
             </a:r>
             <a:endParaRPr lang="en-US" dirty="0"/>
           </a:p>
@@ -1699,7 +1710,7 @@
           <a:p>
             <a:r>
               <a:rPr lang="en-US" dirty="0"/>
-              <a:t>Activity 2. Look carefully at this picture: drought and failed crops. Observe every detail before I ask the question.</a:t>
+              <a:t>Activity 1. Look carefully at this picture: malthus and Boserup compared. Observe every detail before I ask the question.</a:t>
             </a:r>
             <a:endParaRPr lang="en-US" dirty="0"/>
           </a:p>
@@ -1787,7 +1798,7 @@
           <a:p>
             <a:r>
               <a:rPr lang="en-US" dirty="0"/>
-              <a:t>Here is the question for Activity 2: What are Malthus's positive checks? Take one minute to think and write your answer in your rough notebook.</a:t>
+              <a:t>Here is the question for Activity 1: Which theorist has an optimistic view? Take one minute to think and write your answer in your rough notebook.</a:t>
             </a:r>
             <a:endParaRPr lang="en-US" dirty="0"/>
           </a:p>
@@ -1875,7 +1886,7 @@
           <a:p>
             <a:r>
               <a:rPr lang="en-US" dirty="0"/>
-              <a:t>Let us check the answer together. Famine, war and disease that raise deaths.</a:t>
+              <a:t>Let us check the answer together. Ester Boserup.</a:t>
             </a:r>
             <a:endParaRPr lang="en-US" dirty="0"/>
           </a:p>
@@ -1963,7 +1974,7 @@
           <a:p>
             <a:r>
               <a:rPr lang="en-US" dirty="0"/>
-              <a:t>Activity 3. Look carefully at this diagram: boserup: pressure leads to new methods. Observe every detail before I ask the question.</a:t>
+              <a:t>Activity 2. Look carefully at this diagram: population and food according to Malthus. Observe every detail before I ask the question.</a:t>
             </a:r>
             <a:endParaRPr lang="en-US" dirty="0"/>
           </a:p>
@@ -2051,7 +2062,7 @@
           <a:p>
             <a:r>
               <a:rPr lang="en-US" dirty="0"/>
-              <a:t>Here is the question for Activity 3: According to Boserup, what does population pressure cause? Take one minute to think and write your answer in your rough notebook.</a:t>
+              <a:t>Here is the question for Activity 2: How does food production grow according to Malthus? Take one minute to think and write your answer in your rough notebook.</a:t>
             </a:r>
             <a:endParaRPr lang="en-US" dirty="0"/>
           </a:p>
@@ -2139,7 +2150,7 @@
           <a:p>
             <a:r>
               <a:rPr lang="en-US" dirty="0"/>
-              <a:t>Let us check the answer together. Farmers invent new methods to produce more food.</a:t>
+              <a:t>Let us check the answer together. Arithmetically (1, 2, 3, 4…).</a:t>
             </a:r>
             <a:endParaRPr lang="en-US" dirty="0"/>
           </a:p>
@@ -2227,7 +2238,7 @@
           <a:p>
             <a:r>
               <a:rPr lang="en-US" dirty="0"/>
-              <a:t>Activity 4. Look carefully at this picture: terraces on steep slopes. Observe every detail before I ask the question.</a:t>
+              <a:t>Activity 3. Look carefully at this picture: drought and hunger. Observe every detail before I ask the question.</a:t>
             </a:r>
             <a:endParaRPr lang="en-US" dirty="0"/>
           </a:p>
@@ -2315,7 +2326,7 @@
           <a:p>
             <a:r>
               <a:rPr lang="en-US" dirty="0"/>
-              <a:t>Here is the question for Activity 4: How do terraces support Boserup's theory? Take one minute to think and write your answer in your rough notebook.</a:t>
+              <a:t>Here is the question for Activity 3: Name one "positive check" of Malthus. Take one minute to think and write your answer in your rough notebook.</a:t>
             </a:r>
             <a:endParaRPr lang="en-US" dirty="0"/>
           </a:p>
@@ -2403,7 +2414,7 @@
           <a:p>
             <a:r>
               <a:rPr lang="en-US" dirty="0"/>
-              <a:t>Let us check the answer together. Pressure on land led farmers to farm slopes intensively.</a:t>
+              <a:t>Let us check the answer together. Famine, war or disease.</a:t>
             </a:r>
             <a:endParaRPr lang="en-US" dirty="0"/>
           </a:p>
@@ -2491,7 +2502,7 @@
           <a:p>
             <a:r>
               <a:rPr lang="en-US" dirty="0"/>
-              <a:t>Our topic is Population Growth and Resources, and the sub-topic is Theories of Population Growth and Resources. The key notions we shall use today are: malthus, geometric growth, arithmetic growth, positive checks, preventive checks, Boserup, agricultural intensification. At the end, you should be able to do this: learners are able to compare the theories of Malthus and Boserup and apply them today.</a:t>
+              <a:t>Our topic is Population Growth and Resources, and the sub-topic is Theories of Population Growth and Resources. The key notions we shall use today are: pessimistic view, optimistic view, geometric growth, arithmetic growth, checks, agricultural intensification, innovation. At the end, you should be able to do this: learners are able to explain, compare and criticise the theories of Malthus and Boserup and apply them to North Cameroon.</a:t>
             </a:r>
             <a:endParaRPr lang="en-US" dirty="0"/>
           </a:p>
@@ -2579,7 +2590,7 @@
           <a:p>
             <a:r>
               <a:rPr lang="en-US" dirty="0"/>
-              <a:t>Activity 5. Look carefully at this picture: high-yield rice fields. Observe every detail before I ask the question.</a:t>
+              <a:t>Activity 4. Look carefully at this diagram: from forest fallow to multi-cropping. Observe every detail before I ask the question.</a:t>
             </a:r>
             <a:endParaRPr lang="en-US" dirty="0"/>
           </a:p>
@@ -2667,7 +2678,7 @@
           <a:p>
             <a:r>
               <a:rPr lang="en-US" dirty="0"/>
-              <a:t>Here is the question for Activity 5: How does the Green Revolution challenge Malthus? Take one minute to think and write your answer in your rough notebook.</a:t>
+              <a:t>Here is the question for Activity 4: What happens to farming when population pressure grows, according to Boserup? Take one minute to think and write your answer in your rough notebook.</a:t>
             </a:r>
             <a:endParaRPr lang="en-US" dirty="0"/>
           </a:p>
@@ -2755,7 +2766,7 @@
           <a:p>
             <a:r>
               <a:rPr lang="en-US" dirty="0"/>
-              <a:t>Let us check the answer together. New seeds and irrigation raised food faster than population.</a:t>
+              <a:t>Let us check the answer together. It is intensified: fallows are shortened and new methods are used.</a:t>
             </a:r>
             <a:endParaRPr lang="en-US" dirty="0"/>
           </a:p>
@@ -2843,7 +2854,7 @@
           <a:p>
             <a:r>
               <a:rPr lang="en-US" dirty="0"/>
-              <a:t>Now we are going to copy the board summary. Write the title and the headings neatly in your notebooks. I will give you enough time for each slide, so do not rush.</a:t>
+              <a:t>Activity 5. Look carefully at this picture: the Lagdo dam. Observe every detail before I ask the question.</a:t>
             </a:r>
             <a:endParaRPr lang="en-US" dirty="0"/>
           </a:p>
@@ -2931,7 +2942,7 @@
           <a:p>
             <a:r>
               <a:rPr lang="en-US" dirty="0"/>
-              <a:t>Let us copy General Views on Population and Resources. There are two main views. On this slide we have Pessimistic view. Write each point on a new line, with the key term first, and explain it in your own words when we revise. When you finish, we go to the next slide.</a:t>
+              <a:t>Here is the question for Activity 5: How does the Lagdo dam illustrate Boserup's theory? Take one minute to think and write your answer in your rough notebook.</a:t>
             </a:r>
             <a:endParaRPr lang="en-US" dirty="0"/>
           </a:p>
@@ -3019,7 +3030,7 @@
           <a:p>
             <a:r>
               <a:rPr lang="en-US" dirty="0"/>
-              <a:t>We continue with General Views on Population and Resources. On this slide we have Optimistic view. Write each point on a new line, with the key term first, and explain it in your own words when we revise.</a:t>
+              <a:t>Let us check the answer together. Irrigation from the lake allows more food for a growing population.</a:t>
             </a:r>
             <a:endParaRPr lang="en-US" dirty="0"/>
           </a:p>
@@ -3107,7 +3118,7 @@
           <a:p>
             <a:r>
               <a:rPr lang="en-US" dirty="0"/>
-              <a:t>Let us copy Malthus's Theory (1798). Thomas Malthus stated that. On this slide we have Main idea. Write each point on a new line, with the key term first, and explain it in your own words when we revise. When you finish, we go to the next slide.</a:t>
+              <a:t>Now we are going to copy the board summary. Write the title and the headings neatly in your notebooks. I will give you enough time for each slide, so do not rush.</a:t>
             </a:r>
             <a:endParaRPr lang="en-US" dirty="0"/>
           </a:p>
@@ -3195,7 +3206,7 @@
           <a:p>
             <a:r>
               <a:rPr lang="en-US" dirty="0"/>
-              <a:t>We continue with Malthus's Theory (1798). On this slide we have Checks and Strengths and weaknesses. Write each point on a new line, with the key term first, and explain it in your own words when we revise.</a:t>
+              <a:t>Let us copy the definitions. The key terms of this lesson are defined as follows. On this slide we have Pessimistic view. Write each point on a new line, with the key term first, and explain it in your own words when we revise. When you finish, we go to the next slide.</a:t>
             </a:r>
             <a:endParaRPr lang="en-US" dirty="0"/>
           </a:p>
@@ -3283,7 +3294,7 @@
           <a:p>
             <a:r>
               <a:rPr lang="en-US" dirty="0"/>
-              <a:t>Now draw this illustration in your notebook: malthus's theory. Give it a title and label it clearly.</a:t>
+              <a:t>We continue with the definitions. On this slide we have Optimistic view and Checks. Write each point on a new line, with the key term first, and explain it in your own words when we revise. When you finish, we go to the next slide.</a:t>
             </a:r>
             <a:endParaRPr lang="en-US" dirty="0"/>
           </a:p>
@@ -3371,7 +3382,7 @@
           <a:p>
             <a:r>
               <a:rPr lang="en-US" dirty="0"/>
-              <a:t>Let us copy Boserup's Theory (1965). Ester Boserup stated that. On this slide we have Main idea. Write each point on a new line, with the key term first, and explain it in your own words when we revise. When you finish, we go to the next slide.</a:t>
+              <a:t>We continue with the definitions. On this slide we have Agricultural intensification. Write each point on a new line, with the key term first, and explain it in your own words when we revise.</a:t>
             </a:r>
             <a:endParaRPr lang="en-US" dirty="0"/>
           </a:p>
@@ -3459,7 +3470,7 @@
           <a:p>
             <a:r>
               <a:rPr lang="en-US" dirty="0"/>
-              <a:t>Before we start the new lesson, let us correct the homework I gave you at the end of Lesson 17: Overpopulation, Underpopulation and Optimum Population. The question was: Is Cameroon over-, under- or optimally populated? Write a paragraph with evidence. Take out your exercise books.</a:t>
+              <a:t>Before we start the new lesson, let us correct the homework I gave you at the end of Lesson 17: Overpopulation, Underpopulation and Optimum Population. The question was: Give the date of Malthus's essay on population. Take out your exercise books.</a:t>
             </a:r>
             <a:endParaRPr lang="en-US" dirty="0"/>
           </a:p>
@@ -3547,7 +3558,7 @@
           <a:p>
             <a:r>
               <a:rPr lang="en-US" dirty="0"/>
-              <a:t>We continue with Boserup's Theory (1965). On this slide we have Examples. Write each point on a new line, with the key term first, and explain it in your own words when we revise. When you finish, we go to the next slide.</a:t>
+              <a:t>Let us copy The Malthusian Theory (Pessimistic View). The theory of Malthus is presented as follows. Copy the point on The essay on the left, then draw the diagram on the right: population and food. Give it a title and label it clearly.</a:t>
             </a:r>
             <a:endParaRPr lang="en-US" dirty="0"/>
           </a:p>
@@ -3635,7 +3646,7 @@
           <a:p>
             <a:r>
               <a:rPr lang="en-US" dirty="0"/>
-              <a:t>We continue with Boserup's Theory (1965). On this slide we have Strengths and weaknesses. Write each point on a new line, with the key term first, and explain it in your own words when we revise.</a:t>
+              <a:t>We continue with The Malthusian Theory (Pessimistic View). On this slide we have Main idea. Write each point on a new line, with the key term first, and explain it in your own words when we revise.</a:t>
             </a:r>
             <a:endParaRPr lang="en-US" dirty="0"/>
           </a:p>
@@ -3723,7 +3734,7 @@
           <a:p>
             <a:r>
               <a:rPr lang="en-US" dirty="0"/>
-              <a:t>Now draw this illustration in your notebook: boserup's theory. Give it a title and label it clearly.</a:t>
+              <a:t>Copy the point on Checks on the left, then draw the diagram on the right: drought and hunger. Give it a title and label it clearly.</a:t>
             </a:r>
             <a:endParaRPr lang="en-US" dirty="0"/>
           </a:p>
@@ -3811,7 +3822,7 @@
           <a:p>
             <a:r>
               <a:rPr lang="en-US" dirty="0"/>
-              <a:t>Now let us check what you have understood. Question 1: Compare the views of Malthus and Boserup. Answer in your exercise book.</a:t>
+              <a:t>We continue with The Malthusian Theory (Pessimistic View). On this slide we have Strengths. Write each point on a new line, with the key term first, and explain it in your own words when we revise. When you finish, we go to the next slide.</a:t>
             </a:r>
             <a:endParaRPr lang="en-US" dirty="0"/>
           </a:p>
@@ -3899,7 +3910,7 @@
           <a:p>
             <a:r>
               <a:rPr lang="en-US" dirty="0"/>
-              <a:t>The expected answer is: malthus: population outgrows food and causes crises. Boserup: pressure leads to new methods and more food. If you got it right, well done.</a:t>
+              <a:t>We continue with The Malthusian Theory (Pessimistic View). On this slide we have Weaknesses. Write each point on a new line, with the key term first, and explain it in your own words when we revise.</a:t>
             </a:r>
             <a:endParaRPr lang="en-US" dirty="0"/>
           </a:p>
@@ -3987,7 +3998,7 @@
           <a:p>
             <a:r>
               <a:rPr lang="en-US" dirty="0"/>
-              <a:t>Now let us check what you have understood. Question 2: Give one weakness of Malthus's theory. Answer in your exercise book.</a:t>
+              <a:t>Let us copy Boserup's Theory (Optimistic View). The theory of Boserup is presented as follows. Copy the point on The book on the left, then draw the diagram on the right: agricultural intensification. Give it a title and label it clearly.</a:t>
             </a:r>
             <a:endParaRPr lang="en-US" dirty="0"/>
           </a:p>
@@ -4075,7 +4086,7 @@
           <a:p>
             <a:r>
               <a:rPr lang="en-US" dirty="0"/>
-              <a:t>The expected answer is: he did not foresee technology and trade that increased food. If you got it right, well done.</a:t>
+              <a:t>We continue with Boserup's Theory (Optimistic View). On this slide we have Main idea. Write each point on a new line, with the key term first, and explain it in your own words when we revise.</a:t>
             </a:r>
             <a:endParaRPr lang="en-US" dirty="0"/>
           </a:p>
@@ -4163,7 +4174,7 @@
           <a:p>
             <a:r>
               <a:rPr lang="en-US" dirty="0"/>
-              <a:t>For those who need more practice, fill in the blanks in your exercise book. The answers are: number 1, arithmetically; number 2, positive; number 3, innovation (intensification).</a:t>
+              <a:t>Copy the point on Example on the left, then draw the diagram on the right: the Lagdo dam. Give it a title and label it clearly.</a:t>
             </a:r>
             <a:endParaRPr lang="en-US" dirty="0"/>
           </a:p>
@@ -4251,7 +4262,7 @@
           <a:p>
             <a:r>
               <a:rPr lang="en-US" dirty="0"/>
-              <a:t>For your homework: Write a debate: "Population growth is a problem for Cameroon." Give two arguments for and two against. We shall correct it at the beginning of our next lesson.</a:t>
+              <a:t>We continue with Boserup's Theory (Optimistic View). On this slide we have Strengths. Write each point on a new line, with the key term first, and explain it in your own words when we revise. When you finish, we go to the next slide.</a:t>
             </a:r>
             <a:endParaRPr lang="en-US" dirty="0"/>
           </a:p>
@@ -4339,7 +4350,7 @@
           <a:p>
             <a:r>
               <a:rPr lang="en-US" dirty="0"/>
-              <a:t>Our next lesson will be on Further Study 1: Population Change in Cameroon. Thank you for your attention, and see you next time.</a:t>
+              <a:t>We continue with Boserup's Theory (Optimistic View). On this slide we have Weaknesses. Write each point on a new line, with the key term first, and explain it in your own words when we revise. When you finish, we go to the next slide.</a:t>
             </a:r>
             <a:endParaRPr lang="en-US" dirty="0"/>
           </a:p>
@@ -4427,7 +4438,7 @@
           <a:p>
             <a:r>
               <a:rPr lang="en-US" dirty="0"/>
-              <a:t>Here is a good answer. Cameroon as a whole is closer to underpopulation (rich resources, 59 people/km²), but some areas such as the Mandara Mountains and the Western Highlands show signs of overpopulation (land shortage, erosion, migration). Compare it with your own answer and correct your work in red.</a:t>
+              <a:t>Here is a good answer. Thomas Malthus published "An Essay on the Principle of Population" in 1798. Compare it with your own answer and correct your work in red.</a:t>
             </a:r>
             <a:endParaRPr lang="en-US" dirty="0"/>
           </a:p>
@@ -4515,7 +4526,7 @@
           <a:p>
             <a:r>
               <a:rPr lang="en-US" dirty="0"/>
-              <a:t>Let us play the bilingual game. I say a word in English, and you give me the French word. Then we do the reverse.</a:t>
+              <a:t>We continue with Boserup's Theory (Optimistic View). Copy this carefully.</a:t>
             </a:r>
             <a:endParaRPr lang="en-US" dirty="0"/>
           </a:p>
@@ -4603,7 +4614,7 @@
           <a:p>
             <a:r>
               <a:rPr lang="en-US" dirty="0"/>
-              <a:t>I record this information in the official logbook of the class after the lesson.</a:t>
+              <a:t>Let us copy Comparison and Application Today. The two theories compare and apply as follows. Copy the point on Population growth on the left, then draw the diagram on the right: malthus and Boserup compared. Give it a title and label it clearly.</a:t>
             </a:r>
             <a:endParaRPr lang="en-US" dirty="0"/>
           </a:p>
@@ -4691,7 +4702,7 @@
           <a:p>
             <a:r>
               <a:rPr lang="en-US" dirty="0"/>
-              <a:t>I complete the second page of the logbook: the matter taught, the evaluation, the homework and the attendance.</a:t>
+              <a:t>We continue with Comparison and Application Today. On this slide we have Development and Developing countries. Write each point on a new line, with the key term first, and explain it in your own words when we revise. When you finish, we go to the next slide.</a:t>
             </a:r>
             <a:endParaRPr lang="en-US" dirty="0"/>
           </a:p>
@@ -4779,7 +4790,7 @@
           <a:p>
             <a:r>
               <a:rPr lang="en-US" dirty="0"/>
-              <a:t>This slide is for me, the teacher: it gives the timing of the lesson and what to do if the projector is not available.</a:t>
+              <a:t>We continue with Comparison and Application Today. On this slide we have Developed countries and Balance. Write each point on a new line, with the key term first, and explain it in your own words when we revise.</a:t>
             </a:r>
             <a:endParaRPr lang="en-US" dirty="0"/>
           </a:p>
@@ -4867,7 +4878,7 @@
           <a:p>
             <a:r>
               <a:rPr lang="en-US" dirty="0"/>
-              <a:t>These are the references and picture credits used to prepare this lesson.</a:t>
+              <a:t>Now let us check what you have understood. Question 1: State the main difference between Malthus and Boserup. Answer in your exercise book.</a:t>
             </a:r>
             <a:endParaRPr lang="en-US" dirty="0"/>
           </a:p>
@@ -4891,6 +4902,446 @@
             <a:fld id="{F7021451-1387-4CA6-816F-3879F97B5CBC}" type="slidenum">
               <a:rPr lang="en-US"/>
               <a:t>54</a:t>
+            </a:fld>
+            <a:endParaRPr lang="en-US"/>
+          </a:p>
+        </p:txBody>
+      </p:sp>
+    </p:spTree>
+    <p:extLst>
+      <p:ext uri="{BB962C8B-B14F-4D97-AF65-F5344CB8AC3E}">
+        <p14:creationId xmlns:p14="http://schemas.microsoft.com/office/powerpoint/2010/main" val="1024086991"/>
+      </p:ext>
+    </p:extLst>
+  </p:cSld>
+  <p:clrMapOvr>
+    <a:masterClrMapping/>
+  </p:clrMapOvr>
+</p:notes>
+</file>
+
+<file path=ppt/notesSlides/notesSlide55.xml><?xml version="1.0" encoding="utf-8"?>
+<p:notes xmlns:a="http://schemas.openxmlformats.org/drawingml/2006/main" xmlns:r="http://schemas.openxmlformats.org/officeDocument/2006/relationships" xmlns:p="http://schemas.openxmlformats.org/presentationml/2006/main">
+  <p:cSld>
+    <p:spTree>
+      <p:nvGrpSpPr>
+        <p:cNvPr id="1" name=""/>
+        <p:cNvGrpSpPr/>
+        <p:nvPr/>
+      </p:nvGrpSpPr>
+      <p:grpSpPr>
+        <a:xfrm>
+          <a:off x="0" y="0"/>
+          <a:ext cx="0" cy="0"/>
+          <a:chOff x="0" y="0"/>
+          <a:chExt cx="0" cy="0"/>
+        </a:xfrm>
+      </p:grpSpPr>
+      <p:sp>
+        <p:nvSpPr>
+          <p:cNvPr id="2" name="Slide Image Placeholder 1"/>
+          <p:cNvSpPr>
+            <a:spLocks noGrp="1" noRot="1" noChangeAspect="1"/>
+          </p:cNvSpPr>
+          <p:nvPr>
+            <p:ph type="sldImg"/>
+          </p:nvPr>
+        </p:nvSpPr>
+        <p:spPr/>
+      </p:sp>
+      <p:sp>
+        <p:nvSpPr>
+          <p:cNvPr id="3" name="Notes Placeholder 2"/>
+          <p:cNvSpPr>
+            <a:spLocks noGrp="1"/>
+          </p:cNvSpPr>
+          <p:nvPr>
+            <p:ph type="body" idx="1"/>
+          </p:nvPr>
+        </p:nvSpPr>
+        <p:spPr/>
+        <p:txBody>
+          <a:bodyPr/>
+          <a:lstStyle/>
+          <a:p>
+            <a:r>
+              <a:rPr lang="en-US" dirty="0"/>
+              <a:t>The expected answer is: malthus thinks population growth leads to famine; Boserup thinks it leads to agricultural innovation. If you got it right, well done.</a:t>
+            </a:r>
+            <a:endParaRPr lang="en-US" dirty="0"/>
+          </a:p>
+        </p:txBody>
+      </p:sp>
+      <p:sp>
+        <p:nvSpPr>
+          <p:cNvPr id="4" name="Slide Number Placeholder 3"/>
+          <p:cNvSpPr>
+            <a:spLocks noGrp="1"/>
+          </p:cNvSpPr>
+          <p:nvPr>
+            <p:ph type="sldNum" sz="quarter" idx="10"/>
+          </p:nvPr>
+        </p:nvSpPr>
+        <p:spPr/>
+        <p:txBody>
+          <a:bodyPr/>
+          <a:lstStyle/>
+          <a:p>
+            <a:fld id="{F7021451-1387-4CA6-816F-3879F97B5CBC}" type="slidenum">
+              <a:rPr lang="en-US"/>
+              <a:t>55</a:t>
+            </a:fld>
+            <a:endParaRPr lang="en-US"/>
+          </a:p>
+        </p:txBody>
+      </p:sp>
+    </p:spTree>
+    <p:extLst>
+      <p:ext uri="{BB962C8B-B14F-4D97-AF65-F5344CB8AC3E}">
+        <p14:creationId xmlns:p14="http://schemas.microsoft.com/office/powerpoint/2010/main" val="1024086991"/>
+      </p:ext>
+    </p:extLst>
+  </p:cSld>
+  <p:clrMapOvr>
+    <a:masterClrMapping/>
+  </p:clrMapOvr>
+</p:notes>
+</file>
+
+<file path=ppt/notesSlides/notesSlide56.xml><?xml version="1.0" encoding="utf-8"?>
+<p:notes xmlns:a="http://schemas.openxmlformats.org/drawingml/2006/main" xmlns:r="http://schemas.openxmlformats.org/officeDocument/2006/relationships" xmlns:p="http://schemas.openxmlformats.org/presentationml/2006/main">
+  <p:cSld>
+    <p:spTree>
+      <p:nvGrpSpPr>
+        <p:cNvPr id="1" name=""/>
+        <p:cNvGrpSpPr/>
+        <p:nvPr/>
+      </p:nvGrpSpPr>
+      <p:grpSpPr>
+        <a:xfrm>
+          <a:off x="0" y="0"/>
+          <a:ext cx="0" cy="0"/>
+          <a:chOff x="0" y="0"/>
+          <a:chExt cx="0" cy="0"/>
+        </a:xfrm>
+      </p:grpSpPr>
+      <p:sp>
+        <p:nvSpPr>
+          <p:cNvPr id="2" name="Slide Image Placeholder 1"/>
+          <p:cNvSpPr>
+            <a:spLocks noGrp="1" noRot="1" noChangeAspect="1"/>
+          </p:cNvSpPr>
+          <p:nvPr>
+            <p:ph type="sldImg"/>
+          </p:nvPr>
+        </p:nvSpPr>
+        <p:spPr/>
+      </p:sp>
+      <p:sp>
+        <p:nvSpPr>
+          <p:cNvPr id="3" name="Notes Placeholder 2"/>
+          <p:cNvSpPr>
+            <a:spLocks noGrp="1"/>
+          </p:cNvSpPr>
+          <p:nvPr>
+            <p:ph type="body" idx="1"/>
+          </p:nvPr>
+        </p:nvSpPr>
+        <p:spPr/>
+        <p:txBody>
+          <a:bodyPr/>
+          <a:lstStyle/>
+          <a:p>
+            <a:r>
+              <a:rPr lang="en-US" dirty="0"/>
+              <a:t>Now let us check what you have understood. Question 2: Give one weakness of each theory. Answer in your exercise book.</a:t>
+            </a:r>
+            <a:endParaRPr lang="en-US" dirty="0"/>
+          </a:p>
+        </p:txBody>
+      </p:sp>
+      <p:sp>
+        <p:nvSpPr>
+          <p:cNvPr id="4" name="Slide Number Placeholder 3"/>
+          <p:cNvSpPr>
+            <a:spLocks noGrp="1"/>
+          </p:cNvSpPr>
+          <p:nvPr>
+            <p:ph type="sldNum" sz="quarter" idx="10"/>
+          </p:nvPr>
+        </p:nvSpPr>
+        <p:spPr/>
+        <p:txBody>
+          <a:bodyPr/>
+          <a:lstStyle/>
+          <a:p>
+            <a:fld id="{F7021451-1387-4CA6-816F-3879F97B5CBC}" type="slidenum">
+              <a:rPr lang="en-US"/>
+              <a:t>56</a:t>
+            </a:fld>
+            <a:endParaRPr lang="en-US"/>
+          </a:p>
+        </p:txBody>
+      </p:sp>
+    </p:spTree>
+    <p:extLst>
+      <p:ext uri="{BB962C8B-B14F-4D97-AF65-F5344CB8AC3E}">
+        <p14:creationId xmlns:p14="http://schemas.microsoft.com/office/powerpoint/2010/main" val="1024086991"/>
+      </p:ext>
+    </p:extLst>
+  </p:cSld>
+  <p:clrMapOvr>
+    <a:masterClrMapping/>
+  </p:clrMapOvr>
+</p:notes>
+</file>
+
+<file path=ppt/notesSlides/notesSlide57.xml><?xml version="1.0" encoding="utf-8"?>
+<p:notes xmlns:a="http://schemas.openxmlformats.org/drawingml/2006/main" xmlns:r="http://schemas.openxmlformats.org/officeDocument/2006/relationships" xmlns:p="http://schemas.openxmlformats.org/presentationml/2006/main">
+  <p:cSld>
+    <p:spTree>
+      <p:nvGrpSpPr>
+        <p:cNvPr id="1" name=""/>
+        <p:cNvGrpSpPr/>
+        <p:nvPr/>
+      </p:nvGrpSpPr>
+      <p:grpSpPr>
+        <a:xfrm>
+          <a:off x="0" y="0"/>
+          <a:ext cx="0" cy="0"/>
+          <a:chOff x="0" y="0"/>
+          <a:chExt cx="0" cy="0"/>
+        </a:xfrm>
+      </p:grpSpPr>
+      <p:sp>
+        <p:nvSpPr>
+          <p:cNvPr id="2" name="Slide Image Placeholder 1"/>
+          <p:cNvSpPr>
+            <a:spLocks noGrp="1" noRot="1" noChangeAspect="1"/>
+          </p:cNvSpPr>
+          <p:nvPr>
+            <p:ph type="sldImg"/>
+          </p:nvPr>
+        </p:nvSpPr>
+        <p:spPr/>
+      </p:sp>
+      <p:sp>
+        <p:nvSpPr>
+          <p:cNvPr id="3" name="Notes Placeholder 2"/>
+          <p:cNvSpPr>
+            <a:spLocks noGrp="1"/>
+          </p:cNvSpPr>
+          <p:nvPr>
+            <p:ph type="body" idx="1"/>
+          </p:nvPr>
+        </p:nvSpPr>
+        <p:spPr/>
+        <p:txBody>
+          <a:bodyPr/>
+          <a:lstStyle/>
+          <a:p>
+            <a:r>
+              <a:rPr lang="en-US" dirty="0"/>
+              <a:t>The expected answer is: malthus underestimated technology; Boserup is too optimistic and ignores environmental limits. If you got it right, well done.</a:t>
+            </a:r>
+            <a:endParaRPr lang="en-US" dirty="0"/>
+          </a:p>
+        </p:txBody>
+      </p:sp>
+      <p:sp>
+        <p:nvSpPr>
+          <p:cNvPr id="4" name="Slide Number Placeholder 3"/>
+          <p:cNvSpPr>
+            <a:spLocks noGrp="1"/>
+          </p:cNvSpPr>
+          <p:nvPr>
+            <p:ph type="sldNum" sz="quarter" idx="10"/>
+          </p:nvPr>
+        </p:nvSpPr>
+        <p:spPr/>
+        <p:txBody>
+          <a:bodyPr/>
+          <a:lstStyle/>
+          <a:p>
+            <a:fld id="{F7021451-1387-4CA6-816F-3879F97B5CBC}" type="slidenum">
+              <a:rPr lang="en-US"/>
+              <a:t>57</a:t>
+            </a:fld>
+            <a:endParaRPr lang="en-US"/>
+          </a:p>
+        </p:txBody>
+      </p:sp>
+    </p:spTree>
+    <p:extLst>
+      <p:ext uri="{BB962C8B-B14F-4D97-AF65-F5344CB8AC3E}">
+        <p14:creationId xmlns:p14="http://schemas.microsoft.com/office/powerpoint/2010/main" val="1024086991"/>
+      </p:ext>
+    </p:extLst>
+  </p:cSld>
+  <p:clrMapOvr>
+    <a:masterClrMapping/>
+  </p:clrMapOvr>
+</p:notes>
+</file>
+
+<file path=ppt/notesSlides/notesSlide58.xml><?xml version="1.0" encoding="utf-8"?>
+<p:notes xmlns:a="http://schemas.openxmlformats.org/drawingml/2006/main" xmlns:r="http://schemas.openxmlformats.org/officeDocument/2006/relationships" xmlns:p="http://schemas.openxmlformats.org/presentationml/2006/main">
+  <p:cSld>
+    <p:spTree>
+      <p:nvGrpSpPr>
+        <p:cNvPr id="1" name=""/>
+        <p:cNvGrpSpPr/>
+        <p:nvPr/>
+      </p:nvGrpSpPr>
+      <p:grpSpPr>
+        <a:xfrm>
+          <a:off x="0" y="0"/>
+          <a:ext cx="0" cy="0"/>
+          <a:chOff x="0" y="0"/>
+          <a:chExt cx="0" cy="0"/>
+        </a:xfrm>
+      </p:grpSpPr>
+      <p:sp>
+        <p:nvSpPr>
+          <p:cNvPr id="2" name="Slide Image Placeholder 1"/>
+          <p:cNvSpPr>
+            <a:spLocks noGrp="1" noRot="1" noChangeAspect="1"/>
+          </p:cNvSpPr>
+          <p:nvPr>
+            <p:ph type="sldImg"/>
+          </p:nvPr>
+        </p:nvSpPr>
+        <p:spPr/>
+      </p:sp>
+      <p:sp>
+        <p:nvSpPr>
+          <p:cNvPr id="3" name="Notes Placeholder 2"/>
+          <p:cNvSpPr>
+            <a:spLocks noGrp="1"/>
+          </p:cNvSpPr>
+          <p:nvPr>
+            <p:ph type="body" idx="1"/>
+          </p:nvPr>
+        </p:nvSpPr>
+        <p:spPr/>
+        <p:txBody>
+          <a:bodyPr/>
+          <a:lstStyle/>
+          <a:p>
+            <a:r>
+              <a:rPr lang="en-US" dirty="0"/>
+              <a:t>For those who need more practice, fill in the blanks in your exercise book. The answers are: number 1, 1798; number 2, arithmetically; number 3, optimistic.</a:t>
+            </a:r>
+            <a:endParaRPr lang="en-US" dirty="0"/>
+          </a:p>
+        </p:txBody>
+      </p:sp>
+      <p:sp>
+        <p:nvSpPr>
+          <p:cNvPr id="4" name="Slide Number Placeholder 3"/>
+          <p:cNvSpPr>
+            <a:spLocks noGrp="1"/>
+          </p:cNvSpPr>
+          <p:nvPr>
+            <p:ph type="sldNum" sz="quarter" idx="10"/>
+          </p:nvPr>
+        </p:nvSpPr>
+        <p:spPr/>
+        <p:txBody>
+          <a:bodyPr/>
+          <a:lstStyle/>
+          <a:p>
+            <a:fld id="{F7021451-1387-4CA6-816F-3879F97B5CBC}" type="slidenum">
+              <a:rPr lang="en-US"/>
+              <a:t>58</a:t>
+            </a:fld>
+            <a:endParaRPr lang="en-US"/>
+          </a:p>
+        </p:txBody>
+      </p:sp>
+    </p:spTree>
+    <p:extLst>
+      <p:ext uri="{BB962C8B-B14F-4D97-AF65-F5344CB8AC3E}">
+        <p14:creationId xmlns:p14="http://schemas.microsoft.com/office/powerpoint/2010/main" val="1024086991"/>
+      </p:ext>
+    </p:extLst>
+  </p:cSld>
+  <p:clrMapOvr>
+    <a:masterClrMapping/>
+  </p:clrMapOvr>
+</p:notes>
+</file>
+
+<file path=ppt/notesSlides/notesSlide59.xml><?xml version="1.0" encoding="utf-8"?>
+<p:notes xmlns:a="http://schemas.openxmlformats.org/drawingml/2006/main" xmlns:r="http://schemas.openxmlformats.org/officeDocument/2006/relationships" xmlns:p="http://schemas.openxmlformats.org/presentationml/2006/main">
+  <p:cSld>
+    <p:spTree>
+      <p:nvGrpSpPr>
+        <p:cNvPr id="1" name=""/>
+        <p:cNvGrpSpPr/>
+        <p:nvPr/>
+      </p:nvGrpSpPr>
+      <p:grpSpPr>
+        <a:xfrm>
+          <a:off x="0" y="0"/>
+          <a:ext cx="0" cy="0"/>
+          <a:chOff x="0" y="0"/>
+          <a:chExt cx="0" cy="0"/>
+        </a:xfrm>
+      </p:grpSpPr>
+      <p:sp>
+        <p:nvSpPr>
+          <p:cNvPr id="2" name="Slide Image Placeholder 1"/>
+          <p:cNvSpPr>
+            <a:spLocks noGrp="1" noRot="1" noChangeAspect="1"/>
+          </p:cNvSpPr>
+          <p:nvPr>
+            <p:ph type="sldImg"/>
+          </p:nvPr>
+        </p:nvSpPr>
+        <p:spPr/>
+      </p:sp>
+      <p:sp>
+        <p:nvSpPr>
+          <p:cNvPr id="3" name="Notes Placeholder 2"/>
+          <p:cNvSpPr>
+            <a:spLocks noGrp="1"/>
+          </p:cNvSpPr>
+          <p:nvPr>
+            <p:ph type="body" idx="1"/>
+          </p:nvPr>
+        </p:nvSpPr>
+        <p:spPr/>
+        <p:txBody>
+          <a:bodyPr/>
+          <a:lstStyle/>
+          <a:p>
+            <a:r>
+              <a:rPr lang="en-US" dirty="0"/>
+              <a:t>For your homework: State the population of Cameroon at the 2005 census. We shall correct it at the beginning of our next lesson.</a:t>
+            </a:r>
+            <a:endParaRPr lang="en-US" dirty="0"/>
+          </a:p>
+        </p:txBody>
+      </p:sp>
+      <p:sp>
+        <p:nvSpPr>
+          <p:cNvPr id="4" name="Slide Number Placeholder 3"/>
+          <p:cNvSpPr>
+            <a:spLocks noGrp="1"/>
+          </p:cNvSpPr>
+          <p:nvPr>
+            <p:ph type="sldNum" sz="quarter" idx="10"/>
+          </p:nvPr>
+        </p:nvSpPr>
+        <p:spPr/>
+        <p:txBody>
+          <a:bodyPr/>
+          <a:lstStyle/>
+          <a:p>
+            <a:fld id="{F7021451-1387-4CA6-816F-3879F97B5CBC}" type="slidenum">
+              <a:rPr lang="en-US"/>
+              <a:t>59</a:t>
             </a:fld>
             <a:endParaRPr lang="en-US"/>
           </a:p>
@@ -4997,6 +5448,534 @@
 </p:notes>
 </file>
 
+<file path=ppt/notesSlides/notesSlide60.xml><?xml version="1.0" encoding="utf-8"?>
+<p:notes xmlns:a="http://schemas.openxmlformats.org/drawingml/2006/main" xmlns:r="http://schemas.openxmlformats.org/officeDocument/2006/relationships" xmlns:p="http://schemas.openxmlformats.org/presentationml/2006/main">
+  <p:cSld>
+    <p:spTree>
+      <p:nvGrpSpPr>
+        <p:cNvPr id="1" name=""/>
+        <p:cNvGrpSpPr/>
+        <p:nvPr/>
+      </p:nvGrpSpPr>
+      <p:grpSpPr>
+        <a:xfrm>
+          <a:off x="0" y="0"/>
+          <a:ext cx="0" cy="0"/>
+          <a:chOff x="0" y="0"/>
+          <a:chExt cx="0" cy="0"/>
+        </a:xfrm>
+      </p:grpSpPr>
+      <p:sp>
+        <p:nvSpPr>
+          <p:cNvPr id="2" name="Slide Image Placeholder 1"/>
+          <p:cNvSpPr>
+            <a:spLocks noGrp="1" noRot="1" noChangeAspect="1"/>
+          </p:cNvSpPr>
+          <p:nvPr>
+            <p:ph type="sldImg"/>
+          </p:nvPr>
+        </p:nvSpPr>
+        <p:spPr/>
+      </p:sp>
+      <p:sp>
+        <p:nvSpPr>
+          <p:cNvPr id="3" name="Notes Placeholder 2"/>
+          <p:cNvSpPr>
+            <a:spLocks noGrp="1"/>
+          </p:cNvSpPr>
+          <p:nvPr>
+            <p:ph type="body" idx="1"/>
+          </p:nvPr>
+        </p:nvSpPr>
+        <p:spPr/>
+        <p:txBody>
+          <a:bodyPr/>
+          <a:lstStyle/>
+          <a:p>
+            <a:r>
+              <a:rPr lang="en-US" dirty="0"/>
+              <a:t>Our next lesson will be on Further Study 1: Population Change in Cameroon. Thank you for your attention, and see you next time.</a:t>
+            </a:r>
+            <a:endParaRPr lang="en-US" dirty="0"/>
+          </a:p>
+        </p:txBody>
+      </p:sp>
+      <p:sp>
+        <p:nvSpPr>
+          <p:cNvPr id="4" name="Slide Number Placeholder 3"/>
+          <p:cNvSpPr>
+            <a:spLocks noGrp="1"/>
+          </p:cNvSpPr>
+          <p:nvPr>
+            <p:ph type="sldNum" sz="quarter" idx="10"/>
+          </p:nvPr>
+        </p:nvSpPr>
+        <p:spPr/>
+        <p:txBody>
+          <a:bodyPr/>
+          <a:lstStyle/>
+          <a:p>
+            <a:fld id="{F7021451-1387-4CA6-816F-3879F97B5CBC}" type="slidenum">
+              <a:rPr lang="en-US"/>
+              <a:t>60</a:t>
+            </a:fld>
+            <a:endParaRPr lang="en-US"/>
+          </a:p>
+        </p:txBody>
+      </p:sp>
+    </p:spTree>
+    <p:extLst>
+      <p:ext uri="{BB962C8B-B14F-4D97-AF65-F5344CB8AC3E}">
+        <p14:creationId xmlns:p14="http://schemas.microsoft.com/office/powerpoint/2010/main" val="1024086991"/>
+      </p:ext>
+    </p:extLst>
+  </p:cSld>
+  <p:clrMapOvr>
+    <a:masterClrMapping/>
+  </p:clrMapOvr>
+</p:notes>
+</file>
+
+<file path=ppt/notesSlides/notesSlide61.xml><?xml version="1.0" encoding="utf-8"?>
+<p:notes xmlns:a="http://schemas.openxmlformats.org/drawingml/2006/main" xmlns:r="http://schemas.openxmlformats.org/officeDocument/2006/relationships" xmlns:p="http://schemas.openxmlformats.org/presentationml/2006/main">
+  <p:cSld>
+    <p:spTree>
+      <p:nvGrpSpPr>
+        <p:cNvPr id="1" name=""/>
+        <p:cNvGrpSpPr/>
+        <p:nvPr/>
+      </p:nvGrpSpPr>
+      <p:grpSpPr>
+        <a:xfrm>
+          <a:off x="0" y="0"/>
+          <a:ext cx="0" cy="0"/>
+          <a:chOff x="0" y="0"/>
+          <a:chExt cx="0" cy="0"/>
+        </a:xfrm>
+      </p:grpSpPr>
+      <p:sp>
+        <p:nvSpPr>
+          <p:cNvPr id="2" name="Slide Image Placeholder 1"/>
+          <p:cNvSpPr>
+            <a:spLocks noGrp="1" noRot="1" noChangeAspect="1"/>
+          </p:cNvSpPr>
+          <p:nvPr>
+            <p:ph type="sldImg"/>
+          </p:nvPr>
+        </p:nvSpPr>
+        <p:spPr/>
+      </p:sp>
+      <p:sp>
+        <p:nvSpPr>
+          <p:cNvPr id="3" name="Notes Placeholder 2"/>
+          <p:cNvSpPr>
+            <a:spLocks noGrp="1"/>
+          </p:cNvSpPr>
+          <p:nvPr>
+            <p:ph type="body" idx="1"/>
+          </p:nvPr>
+        </p:nvSpPr>
+        <p:spPr/>
+        <p:txBody>
+          <a:bodyPr/>
+          <a:lstStyle/>
+          <a:p>
+            <a:r>
+              <a:rPr lang="en-US" dirty="0"/>
+              <a:t>Let us play the bilingual game. I say a word in English, and you give me the French word. Then we do the reverse.</a:t>
+            </a:r>
+            <a:endParaRPr lang="en-US" dirty="0"/>
+          </a:p>
+        </p:txBody>
+      </p:sp>
+      <p:sp>
+        <p:nvSpPr>
+          <p:cNvPr id="4" name="Slide Number Placeholder 3"/>
+          <p:cNvSpPr>
+            <a:spLocks noGrp="1"/>
+          </p:cNvSpPr>
+          <p:nvPr>
+            <p:ph type="sldNum" sz="quarter" idx="10"/>
+          </p:nvPr>
+        </p:nvSpPr>
+        <p:spPr/>
+        <p:txBody>
+          <a:bodyPr/>
+          <a:lstStyle/>
+          <a:p>
+            <a:fld id="{F7021451-1387-4CA6-816F-3879F97B5CBC}" type="slidenum">
+              <a:rPr lang="en-US"/>
+              <a:t>61</a:t>
+            </a:fld>
+            <a:endParaRPr lang="en-US"/>
+          </a:p>
+        </p:txBody>
+      </p:sp>
+    </p:spTree>
+    <p:extLst>
+      <p:ext uri="{BB962C8B-B14F-4D97-AF65-F5344CB8AC3E}">
+        <p14:creationId xmlns:p14="http://schemas.microsoft.com/office/powerpoint/2010/main" val="1024086991"/>
+      </p:ext>
+    </p:extLst>
+  </p:cSld>
+  <p:clrMapOvr>
+    <a:masterClrMapping/>
+  </p:clrMapOvr>
+</p:notes>
+</file>
+
+<file path=ppt/notesSlides/notesSlide62.xml><?xml version="1.0" encoding="utf-8"?>
+<p:notes xmlns:a="http://schemas.openxmlformats.org/drawingml/2006/main" xmlns:r="http://schemas.openxmlformats.org/officeDocument/2006/relationships" xmlns:p="http://schemas.openxmlformats.org/presentationml/2006/main">
+  <p:cSld>
+    <p:spTree>
+      <p:nvGrpSpPr>
+        <p:cNvPr id="1" name=""/>
+        <p:cNvGrpSpPr/>
+        <p:nvPr/>
+      </p:nvGrpSpPr>
+      <p:grpSpPr>
+        <a:xfrm>
+          <a:off x="0" y="0"/>
+          <a:ext cx="0" cy="0"/>
+          <a:chOff x="0" y="0"/>
+          <a:chExt cx="0" cy="0"/>
+        </a:xfrm>
+      </p:grpSpPr>
+      <p:sp>
+        <p:nvSpPr>
+          <p:cNvPr id="2" name="Slide Image Placeholder 1"/>
+          <p:cNvSpPr>
+            <a:spLocks noGrp="1" noRot="1" noChangeAspect="1"/>
+          </p:cNvSpPr>
+          <p:nvPr>
+            <p:ph type="sldImg"/>
+          </p:nvPr>
+        </p:nvSpPr>
+        <p:spPr/>
+      </p:sp>
+      <p:sp>
+        <p:nvSpPr>
+          <p:cNvPr id="3" name="Notes Placeholder 2"/>
+          <p:cNvSpPr>
+            <a:spLocks noGrp="1"/>
+          </p:cNvSpPr>
+          <p:nvPr>
+            <p:ph type="body" idx="1"/>
+          </p:nvPr>
+        </p:nvSpPr>
+        <p:spPr/>
+        <p:txBody>
+          <a:bodyPr/>
+          <a:lstStyle/>
+          <a:p>
+            <a:r>
+              <a:rPr lang="en-US" dirty="0"/>
+              <a:t>I record this information in the official logbook of the class after the lesson.</a:t>
+            </a:r>
+            <a:endParaRPr lang="en-US" dirty="0"/>
+          </a:p>
+        </p:txBody>
+      </p:sp>
+      <p:sp>
+        <p:nvSpPr>
+          <p:cNvPr id="4" name="Slide Number Placeholder 3"/>
+          <p:cNvSpPr>
+            <a:spLocks noGrp="1"/>
+          </p:cNvSpPr>
+          <p:nvPr>
+            <p:ph type="sldNum" sz="quarter" idx="10"/>
+          </p:nvPr>
+        </p:nvSpPr>
+        <p:spPr/>
+        <p:txBody>
+          <a:bodyPr/>
+          <a:lstStyle/>
+          <a:p>
+            <a:fld id="{F7021451-1387-4CA6-816F-3879F97B5CBC}" type="slidenum">
+              <a:rPr lang="en-US"/>
+              <a:t>62</a:t>
+            </a:fld>
+            <a:endParaRPr lang="en-US"/>
+          </a:p>
+        </p:txBody>
+      </p:sp>
+    </p:spTree>
+    <p:extLst>
+      <p:ext uri="{BB962C8B-B14F-4D97-AF65-F5344CB8AC3E}">
+        <p14:creationId xmlns:p14="http://schemas.microsoft.com/office/powerpoint/2010/main" val="1024086991"/>
+      </p:ext>
+    </p:extLst>
+  </p:cSld>
+  <p:clrMapOvr>
+    <a:masterClrMapping/>
+  </p:clrMapOvr>
+</p:notes>
+</file>
+
+<file path=ppt/notesSlides/notesSlide63.xml><?xml version="1.0" encoding="utf-8"?>
+<p:notes xmlns:a="http://schemas.openxmlformats.org/drawingml/2006/main" xmlns:r="http://schemas.openxmlformats.org/officeDocument/2006/relationships" xmlns:p="http://schemas.openxmlformats.org/presentationml/2006/main">
+  <p:cSld>
+    <p:spTree>
+      <p:nvGrpSpPr>
+        <p:cNvPr id="1" name=""/>
+        <p:cNvGrpSpPr/>
+        <p:nvPr/>
+      </p:nvGrpSpPr>
+      <p:grpSpPr>
+        <a:xfrm>
+          <a:off x="0" y="0"/>
+          <a:ext cx="0" cy="0"/>
+          <a:chOff x="0" y="0"/>
+          <a:chExt cx="0" cy="0"/>
+        </a:xfrm>
+      </p:grpSpPr>
+      <p:sp>
+        <p:nvSpPr>
+          <p:cNvPr id="2" name="Slide Image Placeholder 1"/>
+          <p:cNvSpPr>
+            <a:spLocks noGrp="1" noRot="1" noChangeAspect="1"/>
+          </p:cNvSpPr>
+          <p:nvPr>
+            <p:ph type="sldImg"/>
+          </p:nvPr>
+        </p:nvSpPr>
+        <p:spPr/>
+      </p:sp>
+      <p:sp>
+        <p:nvSpPr>
+          <p:cNvPr id="3" name="Notes Placeholder 2"/>
+          <p:cNvSpPr>
+            <a:spLocks noGrp="1"/>
+          </p:cNvSpPr>
+          <p:nvPr>
+            <p:ph type="body" idx="1"/>
+          </p:nvPr>
+        </p:nvSpPr>
+        <p:spPr/>
+        <p:txBody>
+          <a:bodyPr/>
+          <a:lstStyle/>
+          <a:p>
+            <a:r>
+              <a:rPr lang="en-US" dirty="0"/>
+              <a:t>I complete the second page of the logbook: the matter taught, the evaluation, the homework and the attendance.</a:t>
+            </a:r>
+            <a:endParaRPr lang="en-US" dirty="0"/>
+          </a:p>
+        </p:txBody>
+      </p:sp>
+      <p:sp>
+        <p:nvSpPr>
+          <p:cNvPr id="4" name="Slide Number Placeholder 3"/>
+          <p:cNvSpPr>
+            <a:spLocks noGrp="1"/>
+          </p:cNvSpPr>
+          <p:nvPr>
+            <p:ph type="sldNum" sz="quarter" idx="10"/>
+          </p:nvPr>
+        </p:nvSpPr>
+        <p:spPr/>
+        <p:txBody>
+          <a:bodyPr/>
+          <a:lstStyle/>
+          <a:p>
+            <a:fld id="{F7021451-1387-4CA6-816F-3879F97B5CBC}" type="slidenum">
+              <a:rPr lang="en-US"/>
+              <a:t>63</a:t>
+            </a:fld>
+            <a:endParaRPr lang="en-US"/>
+          </a:p>
+        </p:txBody>
+      </p:sp>
+    </p:spTree>
+    <p:extLst>
+      <p:ext uri="{BB962C8B-B14F-4D97-AF65-F5344CB8AC3E}">
+        <p14:creationId xmlns:p14="http://schemas.microsoft.com/office/powerpoint/2010/main" val="1024086991"/>
+      </p:ext>
+    </p:extLst>
+  </p:cSld>
+  <p:clrMapOvr>
+    <a:masterClrMapping/>
+  </p:clrMapOvr>
+</p:notes>
+</file>
+
+<file path=ppt/notesSlides/notesSlide64.xml><?xml version="1.0" encoding="utf-8"?>
+<p:notes xmlns:a="http://schemas.openxmlformats.org/drawingml/2006/main" xmlns:r="http://schemas.openxmlformats.org/officeDocument/2006/relationships" xmlns:p="http://schemas.openxmlformats.org/presentationml/2006/main">
+  <p:cSld>
+    <p:spTree>
+      <p:nvGrpSpPr>
+        <p:cNvPr id="1" name=""/>
+        <p:cNvGrpSpPr/>
+        <p:nvPr/>
+      </p:nvGrpSpPr>
+      <p:grpSpPr>
+        <a:xfrm>
+          <a:off x="0" y="0"/>
+          <a:ext cx="0" cy="0"/>
+          <a:chOff x="0" y="0"/>
+          <a:chExt cx="0" cy="0"/>
+        </a:xfrm>
+      </p:grpSpPr>
+      <p:sp>
+        <p:nvSpPr>
+          <p:cNvPr id="2" name="Slide Image Placeholder 1"/>
+          <p:cNvSpPr>
+            <a:spLocks noGrp="1" noRot="1" noChangeAspect="1"/>
+          </p:cNvSpPr>
+          <p:nvPr>
+            <p:ph type="sldImg"/>
+          </p:nvPr>
+        </p:nvSpPr>
+        <p:spPr/>
+      </p:sp>
+      <p:sp>
+        <p:nvSpPr>
+          <p:cNvPr id="3" name="Notes Placeholder 2"/>
+          <p:cNvSpPr>
+            <a:spLocks noGrp="1"/>
+          </p:cNvSpPr>
+          <p:nvPr>
+            <p:ph type="body" idx="1"/>
+          </p:nvPr>
+        </p:nvSpPr>
+        <p:spPr/>
+        <p:txBody>
+          <a:bodyPr/>
+          <a:lstStyle/>
+          <a:p>
+            <a:r>
+              <a:rPr lang="en-US" dirty="0"/>
+              <a:t>This slide is for me, the teacher: it gives the timing of the lesson and what to do if the projector is not available.</a:t>
+            </a:r>
+            <a:endParaRPr lang="en-US" dirty="0"/>
+          </a:p>
+        </p:txBody>
+      </p:sp>
+      <p:sp>
+        <p:nvSpPr>
+          <p:cNvPr id="4" name="Slide Number Placeholder 3"/>
+          <p:cNvSpPr>
+            <a:spLocks noGrp="1"/>
+          </p:cNvSpPr>
+          <p:nvPr>
+            <p:ph type="sldNum" sz="quarter" idx="10"/>
+          </p:nvPr>
+        </p:nvSpPr>
+        <p:spPr/>
+        <p:txBody>
+          <a:bodyPr/>
+          <a:lstStyle/>
+          <a:p>
+            <a:fld id="{F7021451-1387-4CA6-816F-3879F97B5CBC}" type="slidenum">
+              <a:rPr lang="en-US"/>
+              <a:t>64</a:t>
+            </a:fld>
+            <a:endParaRPr lang="en-US"/>
+          </a:p>
+        </p:txBody>
+      </p:sp>
+    </p:spTree>
+    <p:extLst>
+      <p:ext uri="{BB962C8B-B14F-4D97-AF65-F5344CB8AC3E}">
+        <p14:creationId xmlns:p14="http://schemas.microsoft.com/office/powerpoint/2010/main" val="1024086991"/>
+      </p:ext>
+    </p:extLst>
+  </p:cSld>
+  <p:clrMapOvr>
+    <a:masterClrMapping/>
+  </p:clrMapOvr>
+</p:notes>
+</file>
+
+<file path=ppt/notesSlides/notesSlide65.xml><?xml version="1.0" encoding="utf-8"?>
+<p:notes xmlns:a="http://schemas.openxmlformats.org/drawingml/2006/main" xmlns:r="http://schemas.openxmlformats.org/officeDocument/2006/relationships" xmlns:p="http://schemas.openxmlformats.org/presentationml/2006/main">
+  <p:cSld>
+    <p:spTree>
+      <p:nvGrpSpPr>
+        <p:cNvPr id="1" name=""/>
+        <p:cNvGrpSpPr/>
+        <p:nvPr/>
+      </p:nvGrpSpPr>
+      <p:grpSpPr>
+        <a:xfrm>
+          <a:off x="0" y="0"/>
+          <a:ext cx="0" cy="0"/>
+          <a:chOff x="0" y="0"/>
+          <a:chExt cx="0" cy="0"/>
+        </a:xfrm>
+      </p:grpSpPr>
+      <p:sp>
+        <p:nvSpPr>
+          <p:cNvPr id="2" name="Slide Image Placeholder 1"/>
+          <p:cNvSpPr>
+            <a:spLocks noGrp="1" noRot="1" noChangeAspect="1"/>
+          </p:cNvSpPr>
+          <p:nvPr>
+            <p:ph type="sldImg"/>
+          </p:nvPr>
+        </p:nvSpPr>
+        <p:spPr/>
+      </p:sp>
+      <p:sp>
+        <p:nvSpPr>
+          <p:cNvPr id="3" name="Notes Placeholder 2"/>
+          <p:cNvSpPr>
+            <a:spLocks noGrp="1"/>
+          </p:cNvSpPr>
+          <p:nvPr>
+            <p:ph type="body" idx="1"/>
+          </p:nvPr>
+        </p:nvSpPr>
+        <p:spPr/>
+        <p:txBody>
+          <a:bodyPr/>
+          <a:lstStyle/>
+          <a:p>
+            <a:r>
+              <a:rPr lang="en-US" dirty="0"/>
+              <a:t>These are the references and picture credits used to prepare this lesson.</a:t>
+            </a:r>
+            <a:endParaRPr lang="en-US" dirty="0"/>
+          </a:p>
+        </p:txBody>
+      </p:sp>
+      <p:sp>
+        <p:nvSpPr>
+          <p:cNvPr id="4" name="Slide Number Placeholder 3"/>
+          <p:cNvSpPr>
+            <a:spLocks noGrp="1"/>
+          </p:cNvSpPr>
+          <p:nvPr>
+            <p:ph type="sldNum" sz="quarter" idx="10"/>
+          </p:nvPr>
+        </p:nvSpPr>
+        <p:spPr/>
+        <p:txBody>
+          <a:bodyPr/>
+          <a:lstStyle/>
+          <a:p>
+            <a:fld id="{F7021451-1387-4CA6-816F-3879F97B5CBC}" type="slidenum">
+              <a:rPr lang="en-US"/>
+              <a:t>65</a:t>
+            </a:fld>
+            <a:endParaRPr lang="en-US"/>
+          </a:p>
+        </p:txBody>
+      </p:sp>
+    </p:spTree>
+    <p:extLst>
+      <p:ext uri="{BB962C8B-B14F-4D97-AF65-F5344CB8AC3E}">
+        <p14:creationId xmlns:p14="http://schemas.microsoft.com/office/powerpoint/2010/main" val="1024086991"/>
+      </p:ext>
+    </p:extLst>
+  </p:cSld>
+  <p:clrMapOvr>
+    <a:masterClrMapping/>
+  </p:clrMapOvr>
+</p:notes>
+</file>
+
 <file path=ppt/notesSlides/notesSlide7.xml><?xml version="1.0" encoding="utf-8"?>
 <p:notes xmlns:a="http://schemas.openxmlformats.org/drawingml/2006/main" xmlns:r="http://schemas.openxmlformats.org/officeDocument/2006/relationships" xmlns:p="http://schemas.openxmlformats.org/presentationml/2006/main">
   <p:cSld>
@@ -5043,7 +6022,7 @@
           <a:p>
             <a:r>
               <a:rPr lang="en-US" dirty="0"/>
-              <a:t>By the end of this lesson, you should be able to do three things. Number 1: explain Malthus's theory. Number 2: explain Boserup's theory. Number 3: evaluate both theories with examples.</a:t>
+              <a:t>Take your time to copy this part; we will continue together.</a:t>
             </a:r>
             <a:endParaRPr lang="en-US" dirty="0"/>
           </a:p>
@@ -5131,7 +6110,7 @@
           <a:p>
             <a:r>
               <a:rPr lang="en-US" dirty="0"/>
-              <a:t>Let us first remember what you already know. Population can overshoot carrying capacity. Technology can raise food production. Keep this in mind, because we shall build on it today.</a:t>
+              <a:t>By the end of this lesson, you should be able to do five things. Number 1: distinguish the pessimistic and optimistic views. Number 2: explain Malthus's theory and appraise it. Number 3: explain Boserup's theory and appraise it. Number 4: compare the two theories. Number 5: apply them to present-day issues.</a:t>
             </a:r>
             <a:endParaRPr lang="en-US" dirty="0"/>
           </a:p>
@@ -5219,7 +6198,7 @@
           <a:p>
             <a:r>
               <a:rPr lang="en-US" dirty="0"/>
-              <a:t>Listen carefully to this situation from real life. An economist says that population growth will lead to famine. A farmer in the Mandara Mountains says that when land became scarce, his ancestors built terraces and produced more food. Think about it, because I am going to ask you some questions.</a:t>
+              <a:t>Let us first remember what you already know. Overpopulation lowers living standards. Technology raises carrying capacity. The world population passed 8 billion in 2022. Keep this in mind, because we shall build on it today.</a:t>
             </a:r>
             <a:endParaRPr lang="en-US" dirty="0"/>
           </a:p>
@@ -6599,7 +7578,7 @@
         <p:spPr>
           <a:xfrm>
             <a:off x="0" y="658368"/>
-            <a:ext cx="5120640" cy="5833872"/>
+            <a:ext cx="3840480" cy="5833872"/>
           </a:xfrm>
           <a:prstGeom prst="rect">
             <a:avLst/>
@@ -6614,8 +7593,8 @@
         </p:nvSpPr>
         <p:spPr>
           <a:xfrm>
-            <a:off x="5349240" y="1005840"/>
-            <a:ext cx="6522415" cy="731520"/>
+            <a:off x="4069080" y="1005840"/>
+            <a:ext cx="7802575" cy="731520"/>
           </a:xfrm>
           <a:prstGeom prst="rect">
             <a:avLst/>
@@ -6641,7 +7620,7 @@
                 <a:ea typeface="Times New Roman" pitchFamily="34" charset="-122"/>
                 <a:cs typeface="Times New Roman" pitchFamily="34" charset="-120"/>
               </a:rPr>
-              <a:t>Situation: Question 1</a:t>
+              <a:t>Situation in Real Life</a:t>
             </a:r>
             <a:endParaRPr lang="en-US" sz="3600" dirty="0"/>
           </a:p>
@@ -6655,8 +7634,8 @@
         </p:nvSpPr>
         <p:spPr>
           <a:xfrm>
-            <a:off x="5349240" y="1783080"/>
-            <a:ext cx="6522415" cy="4663440"/>
+            <a:off x="4069080" y="1783080"/>
+            <a:ext cx="7802575" cy="4663440"/>
           </a:xfrm>
           <a:prstGeom prst="rect">
             <a:avLst/>
@@ -6683,7 +7662,27 @@
                 <a:ea typeface="Times New Roman" pitchFamily="34" charset="-122"/>
                 <a:cs typeface="Times New Roman" pitchFamily="34" charset="-120"/>
               </a:rPr>
-              <a:t>What is the problem in the situation?</a:t>
+              <a:t>In a village near Lagdo, which has grown from 50 to more than 200 families, two elders debate.</a:t>
+            </a:r>
+            <a:endParaRPr lang="en-US" sz="4000" dirty="0"/>
+          </a:p>
+          <a:p>
+            <a:pPr algn="l" indent="0" marL="0">
+              <a:spcAft>
+                <a:spcPts val="800"/>
+              </a:spcAft>
+              <a:buNone/>
+            </a:pPr>
+            <a:r>
+              <a:rPr lang="en-US" sz="4000" dirty="0">
+                <a:solidFill>
+                  <a:srgbClr val="111111"/>
+                </a:solidFill>
+                <a:latin typeface="Times New Roman" pitchFamily="34" charset="0"/>
+                <a:ea typeface="Times New Roman" pitchFamily="34" charset="-122"/>
+                <a:cs typeface="Times New Roman" pitchFamily="34" charset="-120"/>
+              </a:rPr>
+              <a:t>Mallam Bello says: "The land of each family is getting smaller and the soil is tired; soon there will be hunger and conflict!"</a:t>
             </a:r>
             <a:endParaRPr lang="en-US" sz="4000" dirty="0"/>
           </a:p>
@@ -6818,7 +7817,7 @@
         <p:spPr>
           <a:xfrm>
             <a:off x="0" y="658368"/>
-            <a:ext cx="5120640" cy="5833872"/>
+            <a:ext cx="3840480" cy="5833872"/>
           </a:xfrm>
           <a:prstGeom prst="rect">
             <a:avLst/>
@@ -6833,8 +7832,8 @@
         </p:nvSpPr>
         <p:spPr>
           <a:xfrm>
-            <a:off x="5349240" y="1005840"/>
-            <a:ext cx="6522415" cy="731520"/>
+            <a:off x="4069080" y="1005840"/>
+            <a:ext cx="7802575" cy="731520"/>
           </a:xfrm>
           <a:prstGeom prst="rect">
             <a:avLst/>
@@ -6860,7 +7859,7 @@
                 <a:ea typeface="Times New Roman" pitchFamily="34" charset="-122"/>
                 <a:cs typeface="Times New Roman" pitchFamily="34" charset="-120"/>
               </a:rPr>
-              <a:t>Answer</a:t>
+              <a:t>Situation in Real Life (continued)</a:t>
             </a:r>
             <a:endParaRPr lang="en-US" sz="3600" dirty="0"/>
           </a:p>
@@ -6874,8 +7873,8 @@
         </p:nvSpPr>
         <p:spPr>
           <a:xfrm>
-            <a:off x="5349240" y="1783080"/>
-            <a:ext cx="6522415" cy="4663440"/>
+            <a:off x="4069080" y="1783080"/>
+            <a:ext cx="7802575" cy="4663440"/>
           </a:xfrm>
           <a:prstGeom prst="rect">
             <a:avLst/>
@@ -6902,7 +7901,7 @@
                 <a:ea typeface="Times New Roman" pitchFamily="34" charset="-122"/>
                 <a:cs typeface="Times New Roman" pitchFamily="34" charset="-120"/>
               </a:rPr>
-              <a:t>They disagree on whether population growth is good or bad.</a:t>
+              <a:t>Madame Fanta, head of the women's farming cooperative, answers: "More people means more hands and more minds; this pressure will push our children to irrigate from the lake and use better seeds!"</a:t>
             </a:r>
             <a:endParaRPr lang="en-US" sz="4000" dirty="0"/>
           </a:p>
@@ -7079,7 +8078,7 @@
                 <a:ea typeface="Times New Roman" pitchFamily="34" charset="-122"/>
                 <a:cs typeface="Times New Roman" pitchFamily="34" charset="-120"/>
               </a:rPr>
-              <a:t>Situation: Question 2</a:t>
+              <a:t>Situation in Real Life (continued)</a:t>
             </a:r>
             <a:endParaRPr lang="en-US" sz="3600" dirty="0"/>
           </a:p>
@@ -7121,7 +8120,7 @@
                 <a:ea typeface="Times New Roman" pitchFamily="34" charset="-122"/>
                 <a:cs typeface="Times New Roman" pitchFamily="34" charset="-120"/>
               </a:rPr>
-              <a:t>Whose idea is the economist's?</a:t>
+              <a:t>A young man listening asks: "Who is right, and are these only the opinions of two elders?"</a:t>
             </a:r>
             <a:endParaRPr lang="en-US" sz="4000" dirty="0"/>
           </a:p>
@@ -7298,7 +8297,7 @@
                 <a:ea typeface="Times New Roman" pitchFamily="34" charset="-122"/>
                 <a:cs typeface="Times New Roman" pitchFamily="34" charset="-120"/>
               </a:rPr>
-              <a:t>Answer</a:t>
+              <a:t>Situation: Question 1</a:t>
             </a:r>
             <a:endParaRPr lang="en-US" sz="3600" dirty="0"/>
           </a:p>
@@ -7340,7 +8339,7 @@
                 <a:ea typeface="Times New Roman" pitchFamily="34" charset="-122"/>
                 <a:cs typeface="Times New Roman" pitchFamily="34" charset="-120"/>
               </a:rPr>
-              <a:t>Malthus's pessimistic theory.</a:t>
+              <a:t>What is the problem in the situation?</a:t>
             </a:r>
             <a:endParaRPr lang="en-US" sz="4000" dirty="0"/>
           </a:p>
@@ -7517,7 +8516,7 @@
                 <a:ea typeface="Times New Roman" pitchFamily="34" charset="-122"/>
                 <a:cs typeface="Times New Roman" pitchFamily="34" charset="-120"/>
               </a:rPr>
-              <a:t>Situation: Question 3</a:t>
+              <a:t>Answer</a:t>
             </a:r>
             <a:endParaRPr lang="en-US" sz="3600" dirty="0"/>
           </a:p>
@@ -7559,7 +8558,7 @@
                 <a:ea typeface="Times New Roman" pitchFamily="34" charset="-122"/>
                 <a:cs typeface="Times New Roman" pitchFamily="34" charset="-120"/>
               </a:rPr>
-              <a:t>Whose idea is the farmer's?</a:t>
+              <a:t>The young man does not know the theories on population growth and resources.</a:t>
             </a:r>
             <a:endParaRPr lang="en-US" sz="4000" dirty="0"/>
           </a:p>
@@ -7736,7 +8735,7 @@
                 <a:ea typeface="Times New Roman" pitchFamily="34" charset="-122"/>
                 <a:cs typeface="Times New Roman" pitchFamily="34" charset="-120"/>
               </a:rPr>
-              <a:t>Possible Answer</a:t>
+              <a:t>Situation: Question 2</a:t>
             </a:r>
             <a:endParaRPr lang="en-US" sz="3600" dirty="0"/>
           </a:p>
@@ -7778,7 +8777,7 @@
                 <a:ea typeface="Times New Roman" pitchFamily="34" charset="-122"/>
                 <a:cs typeface="Times New Roman" pitchFamily="34" charset="-120"/>
               </a:rPr>
-              <a:t>Boserup's optimistic theory.</a:t>
+              <a:t>What is the view of Mallam Bello?</a:t>
             </a:r>
             <a:endParaRPr lang="en-US" sz="4000" dirty="0"/>
           </a:p>
@@ -7890,7 +8889,7 @@
                 <a:ea typeface="Calibri" pitchFamily="34" charset="-122"/>
                 <a:cs typeface="Calibri" pitchFamily="34" charset="-120"/>
               </a:rPr>
-              <a:t>ACTION TO TAKE</a:t>
+              <a:t>REAL-LIFE SITUATION</a:t>
             </a:r>
             <a:endParaRPr lang="en-US" sz="1400" dirty="0"/>
           </a:p>
@@ -7955,7 +8954,7 @@
                 <a:ea typeface="Times New Roman" pitchFamily="34" charset="-122"/>
                 <a:cs typeface="Times New Roman" pitchFamily="34" charset="-120"/>
               </a:rPr>
-              <a:t>Action to Take</a:t>
+              <a:t>Answer</a:t>
             </a:r>
             <a:endParaRPr lang="en-US" sz="3600" dirty="0"/>
           </a:p>
@@ -7997,7 +8996,7 @@
                 <a:ea typeface="Times New Roman" pitchFamily="34" charset="-122"/>
                 <a:cs typeface="Times New Roman" pitchFamily="34" charset="-120"/>
               </a:rPr>
-              <a:t>Evaluate theories of population and resources and apply them to Cameroon.</a:t>
+              <a:t>A pessimistic view: population will grow faster than food.</a:t>
             </a:r>
             <a:endParaRPr lang="en-US" sz="4000" dirty="0"/>
           </a:p>
@@ -8109,7 +9108,7 @@
                 <a:ea typeface="Calibri" pitchFamily="34" charset="-122"/>
                 <a:cs typeface="Calibri" pitchFamily="34" charset="-120"/>
               </a:rPr>
-              <a:t>JUSTIFICATION</a:t>
+              <a:t>REAL-LIFE SITUATION</a:t>
             </a:r>
             <a:endParaRPr lang="en-US" sz="1400" dirty="0"/>
           </a:p>
@@ -8174,7 +9173,7 @@
                 <a:ea typeface="Times New Roman" pitchFamily="34" charset="-122"/>
                 <a:cs typeface="Times New Roman" pitchFamily="34" charset="-120"/>
               </a:rPr>
-              <a:t>Justification of the Lesson</a:t>
+              <a:t>Situation: Question 3</a:t>
             </a:r>
             <a:endParaRPr lang="en-US" sz="3600" dirty="0"/>
           </a:p>
@@ -8216,7 +9215,7 @@
                 <a:ea typeface="Times New Roman" pitchFamily="34" charset="-122"/>
                 <a:cs typeface="Times New Roman" pitchFamily="34" charset="-120"/>
               </a:rPr>
-              <a:t>This lesson helps us to debate whether population growth is a problem or a driver of progress.</a:t>
+              <a:t>What is the view of Madame Fanta?</a:t>
             </a:r>
             <a:endParaRPr lang="en-US" sz="4000" dirty="0"/>
           </a:p>
@@ -8328,54 +9327,15 @@
                 <a:ea typeface="Calibri" pitchFamily="34" charset="-122"/>
                 <a:cs typeface="Calibri" pitchFamily="34" charset="-120"/>
               </a:rPr>
-              <a:t>1. MALTHUS'S THEORY</a:t>
+              <a:t>REAL-LIFE SITUATION</a:t>
             </a:r>
             <a:endParaRPr lang="en-US" sz="1400" dirty="0"/>
-          </a:p>
-        </p:txBody>
-      </p:sp>
-      <p:sp>
-        <p:nvSpPr>
-          <p:cNvPr id="3" name="Text 1"/>
-          <p:cNvSpPr/>
-          <p:nvPr/>
-        </p:nvSpPr>
-        <p:spPr>
-          <a:xfrm>
-            <a:off x="457200" y="1005840"/>
-            <a:ext cx="11277295" cy="731520"/>
-          </a:xfrm>
-          <a:prstGeom prst="rect">
-            <a:avLst/>
-          </a:prstGeom>
-          <a:noFill/>
-          <a:ln/>
-        </p:spPr>
-        <p:txBody>
-          <a:bodyPr wrap="square" lIns="0" tIns="0" rIns="0" bIns="0" rtlCol="0" anchor="ctr"/>
-          <a:lstStyle/>
-          <a:p>
-            <a:pPr algn="ctr" indent="0" marL="0">
-              <a:buNone/>
-            </a:pPr>
-            <a:r>
-              <a:rPr lang="en-US" sz="3600" b="1" dirty="0">
-                <a:solidFill>
-                  <a:srgbClr val="990011"/>
-                </a:solidFill>
-                <a:latin typeface="Times New Roman" pitchFamily="34" charset="0"/>
-                <a:ea typeface="Times New Roman" pitchFamily="34" charset="-122"/>
-                <a:cs typeface="Times New Roman" pitchFamily="34" charset="-120"/>
-              </a:rPr>
-              <a:t>Activity 1</a:t>
-            </a:r>
-            <a:endParaRPr lang="en-US" sz="3600" dirty="0"/>
           </a:p>
         </p:txBody>
       </p:sp>
       <p:pic>
         <p:nvPicPr>
-          <p:cNvPr id="4" name="Image 0" descr="/home/claude/f4/img/v2/malthus_big.png">    </p:cNvPr>
+          <p:cNvPr id="3" name="Image 0" descr="/home/claude/f4/img/minesec_sheet.png">    </p:cNvPr>
           <p:cNvPicPr>
             <a:picLocks noChangeAspect="1"/>
           </p:cNvPicPr>
@@ -8389,8 +9349,8 @@
         </p:blipFill>
         <p:spPr>
           <a:xfrm>
-            <a:off x="1215564" y="1783080"/>
-            <a:ext cx="9760567" cy="4270248"/>
+            <a:off x="0" y="658368"/>
+            <a:ext cx="5120640" cy="5833872"/>
           </a:xfrm>
           <a:prstGeom prst="rect">
             <a:avLst/>
@@ -8399,14 +9359,14 @@
       </p:pic>
       <p:sp>
         <p:nvSpPr>
-          <p:cNvPr id="5" name="Text 2"/>
+          <p:cNvPr id="4" name="Text 1"/>
           <p:cNvSpPr/>
           <p:nvPr/>
         </p:nvSpPr>
         <p:spPr>
           <a:xfrm>
-            <a:off x="457200" y="6089904"/>
-            <a:ext cx="11277295" cy="347472"/>
+            <a:off x="5349240" y="1005840"/>
+            <a:ext cx="6522415" cy="731520"/>
           </a:xfrm>
           <a:prstGeom prst="rect">
             <a:avLst/>
@@ -8415,24 +9375,68 @@
           <a:ln/>
         </p:spPr>
         <p:txBody>
-          <a:bodyPr wrap="square" lIns="0" tIns="0" rIns="0" bIns="0" rtlCol="0" anchor="ctr"/>
+          <a:bodyPr wrap="square" lIns="0" tIns="0" rIns="0" bIns="0" rtlCol="0" anchor="ctr">
+            <a:normAutofit/>
+          </a:bodyPr>
           <a:lstStyle/>
           <a:p>
             <a:pPr algn="ctr" indent="0" marL="0">
               <a:buNone/>
             </a:pPr>
             <a:r>
-              <a:rPr lang="en-US" sz="1800" i="1" dirty="0">
-                <a:solidFill>
-                  <a:srgbClr val="555555"/>
+              <a:rPr lang="en-US" sz="3600" b="1" dirty="0">
+                <a:solidFill>
+                  <a:srgbClr val="990011"/>
                 </a:solidFill>
                 <a:latin typeface="Times New Roman" pitchFamily="34" charset="0"/>
                 <a:ea typeface="Times New Roman" pitchFamily="34" charset="-122"/>
                 <a:cs typeface="Times New Roman" pitchFamily="34" charset="-120"/>
               </a:rPr>
-              <a:t>Malthus: population outgrows food.</a:t>
-            </a:r>
-            <a:endParaRPr lang="en-US" sz="1800" dirty="0"/>
+              <a:t>Possible Answer</a:t>
+            </a:r>
+            <a:endParaRPr lang="en-US" sz="3600" dirty="0"/>
+          </a:p>
+        </p:txBody>
+      </p:sp>
+      <p:sp>
+        <p:nvSpPr>
+          <p:cNvPr id="5" name="Text 2"/>
+          <p:cNvSpPr/>
+          <p:nvPr/>
+        </p:nvSpPr>
+        <p:spPr>
+          <a:xfrm>
+            <a:off x="5349240" y="1783080"/>
+            <a:ext cx="6522415" cy="4663440"/>
+          </a:xfrm>
+          <a:prstGeom prst="rect">
+            <a:avLst/>
+          </a:prstGeom>
+          <a:noFill/>
+          <a:ln/>
+        </p:spPr>
+        <p:txBody>
+          <a:bodyPr wrap="square" lIns="0" tIns="0" rIns="0" bIns="0" rtlCol="0" anchor="t"/>
+          <a:lstStyle/>
+          <a:p>
+            <a:pPr algn="l" indent="0" marL="0">
+              <a:spcAft>
+                <a:spcPts val="800"/>
+              </a:spcAft>
+              <a:buNone/>
+            </a:pPr>
+            <a:r>
+              <a:rPr lang="en-US" sz="4000" dirty="0">
+                <a:solidFill>
+                  <a:srgbClr val="111111"/>
+                </a:solidFill>
+                <a:latin typeface="Times New Roman" pitchFamily="34" charset="0"/>
+                <a:ea typeface="Times New Roman" pitchFamily="34" charset="-122"/>
+                <a:cs typeface="Times New Roman" pitchFamily="34" charset="-120"/>
+              </a:rPr>
+              <a:t>An optimistic view: population pressure will lead to new farming methods.</a:t>
+            </a:r>
+            <a:endParaRPr lang="en-US" sz="4000" dirty="0"/>
           </a:p>
         </p:txBody>
       </p:sp>
@@ -8542,7 +9546,7 @@
                 <a:ea typeface="Calibri" pitchFamily="34" charset="-122"/>
                 <a:cs typeface="Calibri" pitchFamily="34" charset="-120"/>
               </a:rPr>
-              <a:t>1. MALTHUS'S THEORY</a:t>
+              <a:t>ACTION TO TAKE</a:t>
             </a:r>
             <a:endParaRPr lang="en-US" sz="1400" dirty="0"/>
           </a:p>
@@ -8607,7 +9611,7 @@
                 <a:ea typeface="Times New Roman" pitchFamily="34" charset="-122"/>
                 <a:cs typeface="Times New Roman" pitchFamily="34" charset="-120"/>
               </a:rPr>
-              <a:t>Activity 1: Question</a:t>
+              <a:t>Action to Take</a:t>
             </a:r>
             <a:endParaRPr lang="en-US" sz="3600" dirty="0"/>
           </a:p>
@@ -8649,7 +9653,7 @@
                 <a:ea typeface="Times New Roman" pitchFamily="34" charset="-122"/>
                 <a:cs typeface="Times New Roman" pitchFamily="34" charset="-120"/>
               </a:rPr>
-              <a:t>According to Malthus, how do population and food grow?</a:t>
+              <a:t>Combine the control of population growth with innovation in farming to ensure food security.</a:t>
             </a:r>
             <a:endParaRPr lang="en-US" sz="4000" dirty="0"/>
           </a:p>
@@ -9356,7 +10360,7 @@
                 <a:ea typeface="Calibri" pitchFamily="34" charset="-122"/>
                 <a:cs typeface="Calibri" pitchFamily="34" charset="-120"/>
               </a:rPr>
-              <a:t>1. MALTHUS'S THEORY</a:t>
+              <a:t>JUSTIFICATION</a:t>
             </a:r>
             <a:endParaRPr lang="en-US" sz="1400" dirty="0"/>
           </a:p>
@@ -9421,7 +10425,7 @@
                 <a:ea typeface="Times New Roman" pitchFamily="34" charset="-122"/>
                 <a:cs typeface="Times New Roman" pitchFamily="34" charset="-120"/>
               </a:rPr>
-              <a:t>Activity 1: Answer</a:t>
+              <a:t>Justification of the Lesson</a:t>
             </a:r>
             <a:endParaRPr lang="en-US" sz="3600" dirty="0"/>
           </a:p>
@@ -9463,7 +10467,7 @@
                 <a:ea typeface="Times New Roman" pitchFamily="34" charset="-122"/>
                 <a:cs typeface="Times New Roman" pitchFamily="34" charset="-120"/>
               </a:rPr>
-              <a:t>Population grows geometrically (1, 2, 4, 8); food grows arithmetically (1, 2, 3, 4).</a:t>
+              <a:t>This lesson helps us to judge the future of population and food in Cameroon and the world with scientific theories.</a:t>
             </a:r>
             <a:endParaRPr lang="en-US" sz="4000" dirty="0"/>
           </a:p>
@@ -9575,7 +10579,7 @@
                 <a:ea typeface="Calibri" pitchFamily="34" charset="-122"/>
                 <a:cs typeface="Calibri" pitchFamily="34" charset="-120"/>
               </a:rPr>
-              <a:t>1. MALTHUS'S THEORY</a:t>
+              <a:t>1. GENERAL VIEWS</a:t>
             </a:r>
             <a:endParaRPr lang="en-US" sz="1400" dirty="0"/>
           </a:p>
@@ -9614,7 +10618,7 @@
                 <a:ea typeface="Times New Roman" pitchFamily="34" charset="-122"/>
                 <a:cs typeface="Times New Roman" pitchFamily="34" charset="-120"/>
               </a:rPr>
-              <a:t>Activity 2</a:t>
+              <a:t>Activity 1</a:t>
             </a:r>
             <a:endParaRPr lang="en-US" sz="3600" dirty="0"/>
           </a:p>
@@ -9622,7 +10626,7 @@
       </p:sp>
       <p:pic>
         <p:nvPicPr>
-          <p:cNvPr id="4" name="Image 0" descr="/home/claude/f4/img/v2/f2t_drought.jpg">    </p:cNvPr>
+          <p:cNvPr id="4" name="Image 0" descr="/home/claude/f4/img/v2/pop2_malthus_boserup.png">    </p:cNvPr>
           <p:cNvPicPr>
             <a:picLocks noChangeAspect="1"/>
           </p:cNvPicPr>
@@ -9636,8 +10640,8 @@
         </p:blipFill>
         <p:spPr>
           <a:xfrm>
-            <a:off x="2246610" y="1783080"/>
-            <a:ext cx="7698475" cy="4270248"/>
+            <a:off x="629930" y="1783080"/>
+            <a:ext cx="10931835" cy="4270248"/>
           </a:xfrm>
           <a:prstGeom prst="rect">
             <a:avLst/>
@@ -9677,7 +10681,7 @@
                 <a:ea typeface="Times New Roman" pitchFamily="34" charset="-122"/>
                 <a:cs typeface="Times New Roman" pitchFamily="34" charset="-120"/>
               </a:rPr>
-              <a:t>Drought and failed crops.</a:t>
+              <a:t>Malthus and Boserup compared.</a:t>
             </a:r>
             <a:endParaRPr lang="en-US" sz="1800" dirty="0"/>
           </a:p>
@@ -9789,7 +10793,7 @@
                 <a:ea typeface="Calibri" pitchFamily="34" charset="-122"/>
                 <a:cs typeface="Calibri" pitchFamily="34" charset="-120"/>
               </a:rPr>
-              <a:t>1. MALTHUS'S THEORY</a:t>
+              <a:t>1. GENERAL VIEWS</a:t>
             </a:r>
             <a:endParaRPr lang="en-US" sz="1400" dirty="0"/>
           </a:p>
@@ -9854,7 +10858,7 @@
                 <a:ea typeface="Times New Roman" pitchFamily="34" charset="-122"/>
                 <a:cs typeface="Times New Roman" pitchFamily="34" charset="-120"/>
               </a:rPr>
-              <a:t>Activity 2: Question</a:t>
+              <a:t>Activity 1: Question</a:t>
             </a:r>
             <a:endParaRPr lang="en-US" sz="3600" dirty="0"/>
           </a:p>
@@ -9896,7 +10900,7 @@
                 <a:ea typeface="Times New Roman" pitchFamily="34" charset="-122"/>
                 <a:cs typeface="Times New Roman" pitchFamily="34" charset="-120"/>
               </a:rPr>
-              <a:t>What are Malthus's positive checks?</a:t>
+              <a:t>Which theorist has an optimistic view?</a:t>
             </a:r>
             <a:endParaRPr lang="en-US" sz="4000" dirty="0"/>
           </a:p>
@@ -10008,7 +11012,7 @@
                 <a:ea typeface="Calibri" pitchFamily="34" charset="-122"/>
                 <a:cs typeface="Calibri" pitchFamily="34" charset="-120"/>
               </a:rPr>
-              <a:t>1. MALTHUS'S THEORY</a:t>
+              <a:t>1. GENERAL VIEWS</a:t>
             </a:r>
             <a:endParaRPr lang="en-US" sz="1400" dirty="0"/>
           </a:p>
@@ -10073,7 +11077,7 @@
                 <a:ea typeface="Times New Roman" pitchFamily="34" charset="-122"/>
                 <a:cs typeface="Times New Roman" pitchFamily="34" charset="-120"/>
               </a:rPr>
-              <a:t>Activity 2: Answer</a:t>
+              <a:t>Activity 1: Answer</a:t>
             </a:r>
             <a:endParaRPr lang="en-US" sz="3600" dirty="0"/>
           </a:p>
@@ -10115,7 +11119,7 @@
                 <a:ea typeface="Times New Roman" pitchFamily="34" charset="-122"/>
                 <a:cs typeface="Times New Roman" pitchFamily="34" charset="-120"/>
               </a:rPr>
-              <a:t>Famine, war and disease that raise deaths.</a:t>
+              <a:t>Ester Boserup.</a:t>
             </a:r>
             <a:endParaRPr lang="en-US" sz="4000" dirty="0"/>
           </a:p>
@@ -10227,7 +11231,7 @@
                 <a:ea typeface="Calibri" pitchFamily="34" charset="-122"/>
                 <a:cs typeface="Calibri" pitchFamily="34" charset="-120"/>
               </a:rPr>
-              <a:t>2. BOSERUP'S THEORY</a:t>
+              <a:t>2. MALTHUS</a:t>
             </a:r>
             <a:endParaRPr lang="en-US" sz="1400" dirty="0"/>
           </a:p>
@@ -10266,7 +11270,7 @@
                 <a:ea typeface="Times New Roman" pitchFamily="34" charset="-122"/>
                 <a:cs typeface="Times New Roman" pitchFamily="34" charset="-120"/>
               </a:rPr>
-              <a:t>Activity 3</a:t>
+              <a:t>Activity 2</a:t>
             </a:r>
             <a:endParaRPr lang="en-US" sz="3600" dirty="0"/>
           </a:p>
@@ -10274,7 +11278,7 @@
       </p:sp>
       <p:pic>
         <p:nvPicPr>
-          <p:cNvPr id="4" name="Image 0" descr="/home/claude/f4/img/v2/boserup_big.png">    </p:cNvPr>
+          <p:cNvPr id="4" name="Image 0" descr="/home/claude/f4/img/v2/malthus_big.png">    </p:cNvPr>
           <p:cNvPicPr>
             <a:picLocks noChangeAspect="1"/>
           </p:cNvPicPr>
@@ -10288,8 +11292,8 @@
         </p:blipFill>
         <p:spPr>
           <a:xfrm>
-            <a:off x="629930" y="1783080"/>
-            <a:ext cx="10931835" cy="4270248"/>
+            <a:off x="1215564" y="1783080"/>
+            <a:ext cx="9760567" cy="4270248"/>
           </a:xfrm>
           <a:prstGeom prst="rect">
             <a:avLst/>
@@ -10329,7 +11333,7 @@
                 <a:ea typeface="Times New Roman" pitchFamily="34" charset="-122"/>
                 <a:cs typeface="Times New Roman" pitchFamily="34" charset="-120"/>
               </a:rPr>
-              <a:t>Boserup: pressure leads to new methods.</a:t>
+              <a:t>Population and food according to Malthus.</a:t>
             </a:r>
             <a:endParaRPr lang="en-US" sz="1800" dirty="0"/>
           </a:p>
@@ -10441,7 +11445,7 @@
                 <a:ea typeface="Calibri" pitchFamily="34" charset="-122"/>
                 <a:cs typeface="Calibri" pitchFamily="34" charset="-120"/>
               </a:rPr>
-              <a:t>2. BOSERUP'S THEORY</a:t>
+              <a:t>2. MALTHUS</a:t>
             </a:r>
             <a:endParaRPr lang="en-US" sz="1400" dirty="0"/>
           </a:p>
@@ -10506,7 +11510,7 @@
                 <a:ea typeface="Times New Roman" pitchFamily="34" charset="-122"/>
                 <a:cs typeface="Times New Roman" pitchFamily="34" charset="-120"/>
               </a:rPr>
-              <a:t>Activity 3: Question</a:t>
+              <a:t>Activity 2: Question</a:t>
             </a:r>
             <a:endParaRPr lang="en-US" sz="3600" dirty="0"/>
           </a:p>
@@ -10548,7 +11552,7 @@
                 <a:ea typeface="Times New Roman" pitchFamily="34" charset="-122"/>
                 <a:cs typeface="Times New Roman" pitchFamily="34" charset="-120"/>
               </a:rPr>
-              <a:t>According to Boserup, what does population pressure cause?</a:t>
+              <a:t>How does food production grow according to Malthus?</a:t>
             </a:r>
             <a:endParaRPr lang="en-US" sz="4000" dirty="0"/>
           </a:p>
@@ -10660,7 +11664,7 @@
                 <a:ea typeface="Calibri" pitchFamily="34" charset="-122"/>
                 <a:cs typeface="Calibri" pitchFamily="34" charset="-120"/>
               </a:rPr>
-              <a:t>2. BOSERUP'S THEORY</a:t>
+              <a:t>2. MALTHUS</a:t>
             </a:r>
             <a:endParaRPr lang="en-US" sz="1400" dirty="0"/>
           </a:p>
@@ -10725,7 +11729,7 @@
                 <a:ea typeface="Times New Roman" pitchFamily="34" charset="-122"/>
                 <a:cs typeface="Times New Roman" pitchFamily="34" charset="-120"/>
               </a:rPr>
-              <a:t>Activity 3: Answer</a:t>
+              <a:t>Activity 2: Answer</a:t>
             </a:r>
             <a:endParaRPr lang="en-US" sz="3600" dirty="0"/>
           </a:p>
@@ -10767,7 +11771,7 @@
                 <a:ea typeface="Times New Roman" pitchFamily="34" charset="-122"/>
                 <a:cs typeface="Times New Roman" pitchFamily="34" charset="-120"/>
               </a:rPr>
-              <a:t>Farmers invent new methods to produce more food.</a:t>
+              <a:t>Arithmetically (1, 2, 3, 4…).</a:t>
             </a:r>
             <a:endParaRPr lang="en-US" sz="4000" dirty="0"/>
           </a:p>
@@ -10879,7 +11883,7 @@
                 <a:ea typeface="Calibri" pitchFamily="34" charset="-122"/>
                 <a:cs typeface="Calibri" pitchFamily="34" charset="-120"/>
               </a:rPr>
-              <a:t>2. BOSERUP'S THEORY</a:t>
+              <a:t>2. MALTHUS</a:t>
             </a:r>
             <a:endParaRPr lang="en-US" sz="1400" dirty="0"/>
           </a:p>
@@ -10918,7 +11922,7 @@
                 <a:ea typeface="Times New Roman" pitchFamily="34" charset="-122"/>
                 <a:cs typeface="Times New Roman" pitchFamily="34" charset="-120"/>
               </a:rPr>
-              <a:t>Activity 4</a:t>
+              <a:t>Activity 3</a:t>
             </a:r>
             <a:endParaRPr lang="en-US" sz="3600" dirty="0"/>
           </a:p>
@@ -10926,7 +11930,7 @@
       </p:sp>
       <p:pic>
         <p:nvPicPr>
-          <p:cNvPr id="4" name="Image 0" descr="/home/claude/f4/img/v2/f4_terraces.jpg">    </p:cNvPr>
+          <p:cNvPr id="4" name="Image 0" descr="/home/claude/f4/img/v2/f2t_drought.jpg">    </p:cNvPr>
           <p:cNvPicPr>
             <a:picLocks noChangeAspect="1"/>
           </p:cNvPicPr>
@@ -10981,7 +11985,7 @@
                 <a:ea typeface="Times New Roman" pitchFamily="34" charset="-122"/>
                 <a:cs typeface="Times New Roman" pitchFamily="34" charset="-120"/>
               </a:rPr>
-              <a:t>Terraces on steep slopes.</a:t>
+              <a:t>Drought and hunger.</a:t>
             </a:r>
             <a:endParaRPr lang="en-US" sz="1800" dirty="0"/>
           </a:p>
@@ -11093,7 +12097,7 @@
                 <a:ea typeface="Calibri" pitchFamily="34" charset="-122"/>
                 <a:cs typeface="Calibri" pitchFamily="34" charset="-120"/>
               </a:rPr>
-              <a:t>2. BOSERUP'S THEORY</a:t>
+              <a:t>2. MALTHUS</a:t>
             </a:r>
             <a:endParaRPr lang="en-US" sz="1400" dirty="0"/>
           </a:p>
@@ -11158,7 +12162,7 @@
                 <a:ea typeface="Times New Roman" pitchFamily="34" charset="-122"/>
                 <a:cs typeface="Times New Roman" pitchFamily="34" charset="-120"/>
               </a:rPr>
-              <a:t>Activity 4: Question</a:t>
+              <a:t>Activity 3: Question</a:t>
             </a:r>
             <a:endParaRPr lang="en-US" sz="3600" dirty="0"/>
           </a:p>
@@ -11200,7 +12204,7 @@
                 <a:ea typeface="Times New Roman" pitchFamily="34" charset="-122"/>
                 <a:cs typeface="Times New Roman" pitchFamily="34" charset="-120"/>
               </a:rPr>
-              <a:t>How do terraces support Boserup's theory?</a:t>
+              <a:t>Name one "positive check" of Malthus.</a:t>
             </a:r>
             <a:endParaRPr lang="en-US" sz="4000" dirty="0"/>
           </a:p>
@@ -11312,7 +12316,7 @@
                 <a:ea typeface="Calibri" pitchFamily="34" charset="-122"/>
                 <a:cs typeface="Calibri" pitchFamily="34" charset="-120"/>
               </a:rPr>
-              <a:t>2. BOSERUP'S THEORY</a:t>
+              <a:t>2. MALTHUS</a:t>
             </a:r>
             <a:endParaRPr lang="en-US" sz="1400" dirty="0"/>
           </a:p>
@@ -11377,7 +12381,7 @@
                 <a:ea typeface="Times New Roman" pitchFamily="34" charset="-122"/>
                 <a:cs typeface="Times New Roman" pitchFamily="34" charset="-120"/>
               </a:rPr>
-              <a:t>Activity 4: Answer</a:t>
+              <a:t>Activity 3: Answer</a:t>
             </a:r>
             <a:endParaRPr lang="en-US" sz="3600" dirty="0"/>
           </a:p>
@@ -11419,7 +12423,7 @@
                 <a:ea typeface="Times New Roman" pitchFamily="34" charset="-122"/>
                 <a:cs typeface="Times New Roman" pitchFamily="34" charset="-120"/>
               </a:rPr>
-              <a:t>Pressure on land led farmers to farm slopes intensively.</a:t>
+              <a:t>Famine, war or disease.</a:t>
             </a:r>
             <a:endParaRPr lang="en-US" sz="4000" dirty="0"/>
           </a:p>
@@ -12102,7 +13106,7 @@
                           <a:ea typeface="Calibri" pitchFamily="34" charset="-122"/>
                           <a:cs typeface="Calibri" pitchFamily="34" charset="-120"/>
                         </a:rPr>
-                        <a:t>Malthus, geometric growth, arithmetic growth, positive checks, preventive checks, Boserup, agricultural intensification.</a:t>
+                        <a:t>Pessimistic view, optimistic view, geometric growth, arithmetic growth, checks, agricultural intensification, innovation.</a:t>
                       </a:r>
                       <a:endParaRPr lang="en-US" sz="1700" dirty="0">
                         <a:latin typeface="Calibri" charset="0"/>
@@ -12240,7 +13244,7 @@
                           <a:ea typeface="Calibri" pitchFamily="34" charset="-122"/>
                           <a:cs typeface="Calibri" pitchFamily="34" charset="-120"/>
                         </a:rPr>
-                        <a:t>General views; Malthus's and Boserup's theories; their views on growth and development; strengths and weaknesses.</a:t>
+                        <a:t>General views on population and resources; the Malthusian theory, its strengths and weaknesses; Boserup's theory, its strengths and weaknesses; comparison and application today.</a:t>
                       </a:r>
                       <a:endParaRPr lang="en-US" sz="1700" dirty="0">
                         <a:latin typeface="Calibri" charset="0"/>
@@ -12378,7 +13382,7 @@
                           <a:ea typeface="Calibri" pitchFamily="34" charset="-122"/>
                           <a:cs typeface="Calibri" pitchFamily="34" charset="-120"/>
                         </a:rPr>
-                        <a:t>Learners are able to compare the theories of Malthus and Boserup and apply them today.</a:t>
+                        <a:t>Learners are able to explain, compare and criticise the theories of Malthus and Boserup and apply them to North Cameroon.</a:t>
                       </a:r>
                       <a:endParaRPr lang="en-US" sz="1700" dirty="0">
                         <a:latin typeface="Calibri" charset="0"/>
@@ -12540,7 +13544,7 @@
                 <a:ea typeface="Calibri" pitchFamily="34" charset="-122"/>
                 <a:cs typeface="Calibri" pitchFamily="34" charset="-120"/>
               </a:rPr>
-              <a:t>3. STRENGTHS AND WEAKNESSES</a:t>
+              <a:t>3. BOSERUP</a:t>
             </a:r>
             <a:endParaRPr lang="en-US" sz="1400" dirty="0"/>
           </a:p>
@@ -12579,7 +13583,7 @@
                 <a:ea typeface="Times New Roman" pitchFamily="34" charset="-122"/>
                 <a:cs typeface="Times New Roman" pitchFamily="34" charset="-120"/>
               </a:rPr>
-              <a:t>Activity 5</a:t>
+              <a:t>Activity 4</a:t>
             </a:r>
             <a:endParaRPr lang="en-US" sz="3600" dirty="0"/>
           </a:p>
@@ -12587,7 +13591,7 @@
       </p:sp>
       <p:pic>
         <p:nvPicPr>
-          <p:cNvPr id="4" name="Image 0" descr="/home/claude/f4/img/v2/f4_ricefield.jpg">    </p:cNvPr>
+          <p:cNvPr id="4" name="Image 0" descr="/home/claude/f4/img/v2/boserup_big.png">    </p:cNvPr>
           <p:cNvPicPr>
             <a:picLocks noChangeAspect="1"/>
           </p:cNvPicPr>
@@ -12601,8 +13605,8 @@
         </p:blipFill>
         <p:spPr>
           <a:xfrm>
-            <a:off x="2246610" y="1783080"/>
-            <a:ext cx="7698475" cy="4270248"/>
+            <a:off x="629930" y="1783080"/>
+            <a:ext cx="10931835" cy="4270248"/>
           </a:xfrm>
           <a:prstGeom prst="rect">
             <a:avLst/>
@@ -12642,7 +13646,7 @@
                 <a:ea typeface="Times New Roman" pitchFamily="34" charset="-122"/>
                 <a:cs typeface="Times New Roman" pitchFamily="34" charset="-120"/>
               </a:rPr>
-              <a:t>High-yield rice fields.</a:t>
+              <a:t>From forest fallow to multi-cropping.</a:t>
             </a:r>
             <a:endParaRPr lang="en-US" sz="1800" dirty="0"/>
           </a:p>
@@ -12754,7 +13758,7 @@
                 <a:ea typeface="Calibri" pitchFamily="34" charset="-122"/>
                 <a:cs typeface="Calibri" pitchFamily="34" charset="-120"/>
               </a:rPr>
-              <a:t>3. STRENGTHS AND WEAKNESSES</a:t>
+              <a:t>3. BOSERUP</a:t>
             </a:r>
             <a:endParaRPr lang="en-US" sz="1400" dirty="0"/>
           </a:p>
@@ -12819,7 +13823,7 @@
                 <a:ea typeface="Times New Roman" pitchFamily="34" charset="-122"/>
                 <a:cs typeface="Times New Roman" pitchFamily="34" charset="-120"/>
               </a:rPr>
-              <a:t>Activity 5: Question</a:t>
+              <a:t>Activity 4: Question</a:t>
             </a:r>
             <a:endParaRPr lang="en-US" sz="3600" dirty="0"/>
           </a:p>
@@ -12861,7 +13865,7 @@
                 <a:ea typeface="Times New Roman" pitchFamily="34" charset="-122"/>
                 <a:cs typeface="Times New Roman" pitchFamily="34" charset="-120"/>
               </a:rPr>
-              <a:t>How does the Green Revolution challenge Malthus?</a:t>
+              <a:t>What happens to farming when population pressure grows, according to Boserup?</a:t>
             </a:r>
             <a:endParaRPr lang="en-US" sz="4000" dirty="0"/>
           </a:p>
@@ -12973,7 +13977,7 @@
                 <a:ea typeface="Calibri" pitchFamily="34" charset="-122"/>
                 <a:cs typeface="Calibri" pitchFamily="34" charset="-120"/>
               </a:rPr>
-              <a:t>3. STRENGTHS AND WEAKNESSES</a:t>
+              <a:t>3. BOSERUP</a:t>
             </a:r>
             <a:endParaRPr lang="en-US" sz="1400" dirty="0"/>
           </a:p>
@@ -13038,7 +14042,7 @@
                 <a:ea typeface="Times New Roman" pitchFamily="34" charset="-122"/>
                 <a:cs typeface="Times New Roman" pitchFamily="34" charset="-120"/>
               </a:rPr>
-              <a:t>Activity 5: Answer</a:t>
+              <a:t>Activity 4: Answer</a:t>
             </a:r>
             <a:endParaRPr lang="en-US" sz="3600" dirty="0"/>
           </a:p>
@@ -13080,7 +14084,7 @@
                 <a:ea typeface="Times New Roman" pitchFamily="34" charset="-122"/>
                 <a:cs typeface="Times New Roman" pitchFamily="34" charset="-120"/>
               </a:rPr>
-              <a:t>New seeds and irrigation raised food faster than population.</a:t>
+              <a:t>It is intensified: fallows are shortened and new methods are used.</a:t>
             </a:r>
             <a:endParaRPr lang="en-US" sz="4000" dirty="0"/>
           </a:p>
@@ -13192,15 +14196,54 @@
                 <a:ea typeface="Calibri" pitchFamily="34" charset="-122"/>
                 <a:cs typeface="Calibri" pitchFamily="34" charset="-120"/>
               </a:rPr>
-              <a:t>BOARD SUMMARY</a:t>
+              <a:t>4. APPLICATION</a:t>
             </a:r>
             <a:endParaRPr lang="en-US" sz="1400" dirty="0"/>
+          </a:p>
+        </p:txBody>
+      </p:sp>
+      <p:sp>
+        <p:nvSpPr>
+          <p:cNvPr id="3" name="Text 1"/>
+          <p:cNvSpPr/>
+          <p:nvPr/>
+        </p:nvSpPr>
+        <p:spPr>
+          <a:xfrm>
+            <a:off x="457200" y="1005840"/>
+            <a:ext cx="11277295" cy="731520"/>
+          </a:xfrm>
+          <a:prstGeom prst="rect">
+            <a:avLst/>
+          </a:prstGeom>
+          <a:noFill/>
+          <a:ln/>
+        </p:spPr>
+        <p:txBody>
+          <a:bodyPr wrap="square" lIns="0" tIns="0" rIns="0" bIns="0" rtlCol="0" anchor="ctr"/>
+          <a:lstStyle/>
+          <a:p>
+            <a:pPr algn="ctr" indent="0" marL="0">
+              <a:buNone/>
+            </a:pPr>
+            <a:r>
+              <a:rPr lang="en-US" sz="3600" b="1" dirty="0">
+                <a:solidFill>
+                  <a:srgbClr val="990011"/>
+                </a:solidFill>
+                <a:latin typeface="Times New Roman" pitchFamily="34" charset="0"/>
+                <a:ea typeface="Times New Roman" pitchFamily="34" charset="-122"/>
+                <a:cs typeface="Times New Roman" pitchFamily="34" charset="-120"/>
+              </a:rPr>
+              <a:t>Activity 5</a:t>
+            </a:r>
+            <a:endParaRPr lang="en-US" sz="3600" dirty="0"/>
           </a:p>
         </p:txBody>
       </p:sp>
       <p:pic>
         <p:nvPicPr>
-          <p:cNvPr id="3" name="Image 0" descr="/home/claude/f4/img/minesec_sheet.png">    </p:cNvPr>
+          <p:cNvPr id="4" name="Image 0" descr="/home/claude/f4/img/v2/f2t_lagdo.jpg">    </p:cNvPr>
           <p:cNvPicPr>
             <a:picLocks noChangeAspect="1"/>
           </p:cNvPicPr>
@@ -13214,8 +14257,8 @@
         </p:blipFill>
         <p:spPr>
           <a:xfrm>
-            <a:off x="0" y="658368"/>
-            <a:ext cx="3840480" cy="5833872"/>
+            <a:off x="2246610" y="1783080"/>
+            <a:ext cx="7698475" cy="4270248"/>
           </a:xfrm>
           <a:prstGeom prst="rect">
             <a:avLst/>
@@ -13224,14 +14267,14 @@
       </p:pic>
       <p:sp>
         <p:nvSpPr>
-          <p:cNvPr id="4" name="Text 1"/>
+          <p:cNvPr id="5" name="Text 2"/>
           <p:cNvSpPr/>
           <p:nvPr/>
         </p:nvSpPr>
         <p:spPr>
           <a:xfrm>
-            <a:off x="4069080" y="1005840"/>
-            <a:ext cx="7802575" cy="731520"/>
+            <a:off x="457200" y="6089904"/>
+            <a:ext cx="11277295" cy="347472"/>
           </a:xfrm>
           <a:prstGeom prst="rect">
             <a:avLst/>
@@ -13240,108 +14283,24 @@
           <a:ln/>
         </p:spPr>
         <p:txBody>
-          <a:bodyPr wrap="square" lIns="0" tIns="0" rIns="0" bIns="0" rtlCol="0" anchor="ctr">
-            <a:normAutofit/>
-          </a:bodyPr>
+          <a:bodyPr wrap="square" lIns="0" tIns="0" rIns="0" bIns="0" rtlCol="0" anchor="ctr"/>
           <a:lstStyle/>
           <a:p>
             <a:pPr algn="ctr" indent="0" marL="0">
               <a:buNone/>
             </a:pPr>
             <a:r>
-              <a:rPr lang="en-US" sz="3600" b="1" dirty="0">
-                <a:solidFill>
-                  <a:srgbClr val="990011"/>
+              <a:rPr lang="en-US" sz="1800" i="1" dirty="0">
+                <a:solidFill>
+                  <a:srgbClr val="555555"/>
                 </a:solidFill>
                 <a:latin typeface="Times New Roman" pitchFamily="34" charset="0"/>
                 <a:ea typeface="Times New Roman" pitchFamily="34" charset="-122"/>
                 <a:cs typeface="Times New Roman" pitchFamily="34" charset="-120"/>
               </a:rPr>
-              <a:t>Board Summary</a:t>
-            </a:r>
-            <a:endParaRPr lang="en-US" sz="3600" dirty="0"/>
-          </a:p>
-        </p:txBody>
-      </p:sp>
-      <p:sp>
-        <p:nvSpPr>
-          <p:cNvPr id="5" name="Text 2"/>
-          <p:cNvSpPr/>
-          <p:nvPr/>
-        </p:nvSpPr>
-        <p:spPr>
-          <a:xfrm>
-            <a:off x="4069080" y="1783080"/>
-            <a:ext cx="7802575" cy="4663440"/>
-          </a:xfrm>
-          <a:prstGeom prst="rect">
-            <a:avLst/>
-          </a:prstGeom>
-          <a:noFill/>
-          <a:ln/>
-        </p:spPr>
-        <p:txBody>
-          <a:bodyPr wrap="square" lIns="0" tIns="0" rIns="0" bIns="0" rtlCol="0" anchor="t"/>
-          <a:lstStyle/>
-          <a:p>
-            <a:pPr algn="l" indent="0" marL="0">
-              <a:spcAft>
-                <a:spcPts val="800"/>
-              </a:spcAft>
-              <a:buNone/>
-            </a:pPr>
-            <a:r>
-              <a:rPr lang="en-US" sz="4000" b="1" dirty="0">
-                <a:solidFill>
-                  <a:srgbClr val="111111"/>
-                </a:solidFill>
-                <a:latin typeface="Times New Roman" pitchFamily="34" charset="0"/>
-                <a:ea typeface="Times New Roman" pitchFamily="34" charset="-122"/>
-                <a:cs typeface="Times New Roman" pitchFamily="34" charset="-120"/>
-              </a:rPr>
-              <a:t>Topic: Population Growth and Resources</a:t>
-            </a:r>
-            <a:endParaRPr lang="en-US" sz="4000" dirty="0"/>
-          </a:p>
-          <a:p>
-            <a:pPr algn="l" indent="0" marL="0">
-              <a:spcAft>
-                <a:spcPts val="800"/>
-              </a:spcAft>
-              <a:buNone/>
-            </a:pPr>
-            <a:r>
-              <a:rPr lang="en-US" sz="4000" b="1" dirty="0">
-                <a:solidFill>
-                  <a:srgbClr val="111111"/>
-                </a:solidFill>
-                <a:latin typeface="Times New Roman" pitchFamily="34" charset="0"/>
-                <a:ea typeface="Times New Roman" pitchFamily="34" charset="-122"/>
-                <a:cs typeface="Times New Roman" pitchFamily="34" charset="-120"/>
-              </a:rPr>
-              <a:t>Sub-topic: Theories of Population Growth and Resources</a:t>
-            </a:r>
-            <a:endParaRPr lang="en-US" sz="4000" dirty="0"/>
-          </a:p>
-          <a:p>
-            <a:pPr algn="l" indent="0" marL="0">
-              <a:spcAft>
-                <a:spcPts val="800"/>
-              </a:spcAft>
-              <a:buNone/>
-            </a:pPr>
-            <a:r>
-              <a:rPr lang="en-US" sz="4000" b="1" dirty="0">
-                <a:solidFill>
-                  <a:srgbClr val="990011"/>
-                </a:solidFill>
-                <a:latin typeface="Times New Roman" pitchFamily="34" charset="0"/>
-                <a:ea typeface="Times New Roman" pitchFamily="34" charset="-122"/>
-                <a:cs typeface="Times New Roman" pitchFamily="34" charset="-120"/>
-              </a:rPr>
-              <a:t>Lesson 18: Theories of Population and Resources: Malthus and Boserup</a:t>
-            </a:r>
-            <a:endParaRPr lang="en-US" sz="4000" dirty="0"/>
+              <a:t>The Lagdo dam.</a:t>
+            </a:r>
+            <a:endParaRPr lang="en-US" sz="1800" dirty="0"/>
           </a:p>
         </p:txBody>
       </p:sp>
@@ -13451,7 +14410,7 @@
                 <a:ea typeface="Calibri" pitchFamily="34" charset="-122"/>
                 <a:cs typeface="Calibri" pitchFamily="34" charset="-120"/>
               </a:rPr>
-              <a:t>BOARD SUMMARY</a:t>
+              <a:t>4. APPLICATION</a:t>
             </a:r>
             <a:endParaRPr lang="en-US" sz="1400" dirty="0"/>
           </a:p>
@@ -13516,7 +14475,7 @@
                 <a:ea typeface="Times New Roman" pitchFamily="34" charset="-122"/>
                 <a:cs typeface="Times New Roman" pitchFamily="34" charset="-120"/>
               </a:rPr>
-              <a:t>1. General Views on Population and Resources</a:t>
+              <a:t>Activity 5: Question</a:t>
             </a:r>
             <a:endParaRPr lang="en-US" sz="3600" dirty="0"/>
           </a:p>
@@ -13550,7 +14509,7 @@
               <a:buNone/>
             </a:pPr>
             <a:r>
-              <a:rPr lang="en-US" sz="4000" i="1" dirty="0">
+              <a:rPr lang="en-US" sz="4000" dirty="0">
                 <a:solidFill>
                   <a:srgbClr val="111111"/>
                 </a:solidFill>
@@ -13558,44 +14517,7 @@
                 <a:ea typeface="Times New Roman" pitchFamily="34" charset="-122"/>
                 <a:cs typeface="Times New Roman" pitchFamily="34" charset="-120"/>
               </a:rPr>
-              <a:t>There are two main views:</a:t>
-            </a:r>
-            <a:endParaRPr lang="en-US" sz="4000" dirty="0"/>
-          </a:p>
-          <a:p>
-            <a:pPr algn="l" indent="0" marL="0">
-              <a:spcAft>
-                <a:spcPts val="800"/>
-              </a:spcAft>
-              <a:buNone/>
-            </a:pPr>
-            <a:r>
-              <a:rPr lang="en-US" sz="4000" b="1" dirty="0">
-                <a:solidFill>
-                  <a:srgbClr val="111111"/>
-                </a:solidFill>
-                <a:latin typeface="Times New Roman" pitchFamily="34" charset="0"/>
-                <a:ea typeface="Times New Roman" pitchFamily="34" charset="-122"/>
-                <a:cs typeface="Times New Roman" pitchFamily="34" charset="-120"/>
-              </a:rPr>
-              <a:t>Pessimistic view: </a:t>
-            </a:r>
-            <a:pPr algn="l" indent="0" marL="0">
-              <a:spcAft>
-                <a:spcPts val="800"/>
-              </a:spcAft>
-              <a:buNone/>
-            </a:pPr>
-            <a:r>
-              <a:rPr lang="en-US" sz="4000" dirty="0">
-                <a:solidFill>
-                  <a:srgbClr val="111111"/>
-                </a:solidFill>
-                <a:latin typeface="Times New Roman" pitchFamily="34" charset="0"/>
-                <a:ea typeface="Times New Roman" pitchFamily="34" charset="-122"/>
-                <a:cs typeface="Times New Roman" pitchFamily="34" charset="-120"/>
-              </a:rPr>
-              <a:t>Population growth is a threat because resources are limited. Growth leads to famine and poverty.</a:t>
+              <a:t>How does the Lagdo dam illustrate Boserup's theory?</a:t>
             </a:r>
             <a:endParaRPr lang="en-US" sz="4000" dirty="0"/>
           </a:p>
@@ -13707,7 +14629,7 @@
                 <a:ea typeface="Calibri" pitchFamily="34" charset="-122"/>
                 <a:cs typeface="Calibri" pitchFamily="34" charset="-120"/>
               </a:rPr>
-              <a:t>BOARD SUMMARY</a:t>
+              <a:t>4. APPLICATION</a:t>
             </a:r>
             <a:endParaRPr lang="en-US" sz="1400" dirty="0"/>
           </a:p>
@@ -13772,7 +14694,7 @@
                 <a:ea typeface="Times New Roman" pitchFamily="34" charset="-122"/>
                 <a:cs typeface="Times New Roman" pitchFamily="34" charset="-120"/>
               </a:rPr>
-              <a:t>1. General Views on Population and Resources (continued)</a:t>
+              <a:t>Activity 5: Answer</a:t>
             </a:r>
             <a:endParaRPr lang="en-US" sz="3600" dirty="0"/>
           </a:p>
@@ -13806,7 +14728,7 @@
               <a:buNone/>
             </a:pPr>
             <a:r>
-              <a:rPr lang="en-US" sz="4000" b="1" dirty="0">
+              <a:rPr lang="en-US" sz="4000" dirty="0">
                 <a:solidFill>
                   <a:srgbClr val="111111"/>
                 </a:solidFill>
@@ -13814,24 +14736,7 @@
                 <a:ea typeface="Times New Roman" pitchFamily="34" charset="-122"/>
                 <a:cs typeface="Times New Roman" pitchFamily="34" charset="-120"/>
               </a:rPr>
-              <a:t>Optimistic view: </a:t>
-            </a:r>
-            <a:pPr algn="l" indent="0" marL="0">
-              <a:spcAft>
-                <a:spcPts val="800"/>
-              </a:spcAft>
-              <a:buNone/>
-            </a:pPr>
-            <a:r>
-              <a:rPr lang="en-US" sz="4000" dirty="0">
-                <a:solidFill>
-                  <a:srgbClr val="111111"/>
-                </a:solidFill>
-                <a:latin typeface="Times New Roman" pitchFamily="34" charset="0"/>
-                <a:ea typeface="Times New Roman" pitchFamily="34" charset="-122"/>
-                <a:cs typeface="Times New Roman" pitchFamily="34" charset="-120"/>
-              </a:rPr>
-              <a:t>Population growth stimulates technology and development. People are a resource that creates new solutions.</a:t>
+              <a:t>Irrigation from the lake allows more food for a growing population.</a:t>
             </a:r>
             <a:endParaRPr lang="en-US" sz="4000" dirty="0"/>
           </a:p>
@@ -14008,7 +14913,7 @@
                 <a:ea typeface="Times New Roman" pitchFamily="34" charset="-122"/>
                 <a:cs typeface="Times New Roman" pitchFamily="34" charset="-120"/>
               </a:rPr>
-              <a:t>2. Malthus's Theory (1798)</a:t>
+              <a:t>Board Summary</a:t>
             </a:r>
             <a:endParaRPr lang="en-US" sz="3600" dirty="0"/>
           </a:p>
@@ -14042,7 +14947,7 @@
               <a:buNone/>
             </a:pPr>
             <a:r>
-              <a:rPr lang="en-US" sz="4000" i="1" dirty="0">
+              <a:rPr lang="en-US" sz="3200" b="1" dirty="0">
                 <a:solidFill>
                   <a:srgbClr val="111111"/>
                 </a:solidFill>
@@ -14050,9 +14955,9 @@
                 <a:ea typeface="Times New Roman" pitchFamily="34" charset="-122"/>
                 <a:cs typeface="Times New Roman" pitchFamily="34" charset="-120"/>
               </a:rPr>
-              <a:t>Thomas Malthus stated that:</a:t>
-            </a:r>
-            <a:endParaRPr lang="en-US" sz="4000" dirty="0"/>
+              <a:t>Topic: Population Growth and Resources</a:t>
+            </a:r>
+            <a:endParaRPr lang="en-US" sz="3200" dirty="0"/>
           </a:p>
           <a:p>
             <a:pPr algn="l" indent="0" marL="0">
@@ -14062,7 +14967,7 @@
               <a:buNone/>
             </a:pPr>
             <a:r>
-              <a:rPr lang="en-US" sz="4000" b="1" dirty="0">
+              <a:rPr lang="en-US" sz="3200" b="1" dirty="0">
                 <a:solidFill>
                   <a:srgbClr val="111111"/>
                 </a:solidFill>
@@ -14070,8 +14975,11 @@
                 <a:ea typeface="Times New Roman" pitchFamily="34" charset="-122"/>
                 <a:cs typeface="Times New Roman" pitchFamily="34" charset="-120"/>
               </a:rPr>
-              <a:t>Main idea: </a:t>
-            </a:r>
+              <a:t>Sub-topic: Theories of Population Growth and Resources</a:t>
+            </a:r>
+            <a:endParaRPr lang="en-US" sz="3200" dirty="0"/>
+          </a:p>
+          <a:p>
             <a:pPr algn="l" indent="0" marL="0">
               <a:spcAft>
                 <a:spcPts val="800"/>
@@ -14079,17 +14987,17 @@
               <a:buNone/>
             </a:pPr>
             <a:r>
-              <a:rPr lang="en-US" sz="4000" dirty="0">
-                <a:solidFill>
-                  <a:srgbClr val="111111"/>
+              <a:rPr lang="en-US" sz="3200" b="1" dirty="0">
+                <a:solidFill>
+                  <a:srgbClr val="990011"/>
                 </a:solidFill>
                 <a:latin typeface="Times New Roman" pitchFamily="34" charset="0"/>
                 <a:ea typeface="Times New Roman" pitchFamily="34" charset="-122"/>
                 <a:cs typeface="Times New Roman" pitchFamily="34" charset="-120"/>
               </a:rPr>
-              <a:t>Population grows geometrically (1, 2, 4, 8…) while food grows arithmetically (1, 2, 3, 4…). Population will therefore outgrow food.</a:t>
-            </a:r>
-            <a:endParaRPr lang="en-US" sz="4000" dirty="0"/>
+              <a:t>Lesson 18: Theories of Population and Resources: Malthus and Boserup</a:t>
+            </a:r>
+            <a:endParaRPr lang="en-US" sz="3200" dirty="0"/>
           </a:p>
         </p:txBody>
       </p:sp>
@@ -14222,7 +15130,7 @@
         <p:spPr>
           <a:xfrm>
             <a:off x="0" y="658368"/>
-            <a:ext cx="1463040" cy="5833872"/>
+            <a:ext cx="5120640" cy="5833872"/>
           </a:xfrm>
           <a:prstGeom prst="rect">
             <a:avLst/>
@@ -14237,8 +15145,8 @@
         </p:nvSpPr>
         <p:spPr>
           <a:xfrm>
-            <a:off x="1691640" y="1005840"/>
-            <a:ext cx="10180015" cy="731520"/>
+            <a:off x="5349240" y="1005840"/>
+            <a:ext cx="6522415" cy="731520"/>
           </a:xfrm>
           <a:prstGeom prst="rect">
             <a:avLst/>
@@ -14264,7 +15172,7 @@
                 <a:ea typeface="Times New Roman" pitchFamily="34" charset="-122"/>
                 <a:cs typeface="Times New Roman" pitchFamily="34" charset="-120"/>
               </a:rPr>
-              <a:t>2. Malthus's Theory (1798) (continued)</a:t>
+              <a:t>DEFINITIONS</a:t>
             </a:r>
             <a:endParaRPr lang="en-US" sz="3600" dirty="0"/>
           </a:p>
@@ -14278,8 +15186,8 @@
         </p:nvSpPr>
         <p:spPr>
           <a:xfrm>
-            <a:off x="1691640" y="1783080"/>
-            <a:ext cx="10180015" cy="4663440"/>
+            <a:off x="5349240" y="1783080"/>
+            <a:ext cx="6522415" cy="4663440"/>
           </a:xfrm>
           <a:prstGeom prst="rect">
             <a:avLst/>
@@ -14298,7 +15206,7 @@
               <a:buNone/>
             </a:pPr>
             <a:r>
-              <a:rPr lang="en-US" sz="4000" b="1" dirty="0">
+              <a:rPr lang="en-US" sz="4000" i="1" dirty="0">
                 <a:solidFill>
                   <a:srgbClr val="111111"/>
                 </a:solidFill>
@@ -14306,8 +15214,11 @@
                 <a:ea typeface="Times New Roman" pitchFamily="34" charset="-122"/>
                 <a:cs typeface="Times New Roman" pitchFamily="34" charset="-120"/>
               </a:rPr>
-              <a:t>Checks: </a:t>
-            </a:r>
+              <a:t>The key terms of this lesson are defined as follows:</a:t>
+            </a:r>
+            <a:endParaRPr lang="en-US" sz="4000" dirty="0"/>
+          </a:p>
+          <a:p>
             <a:pPr algn="l" indent="0" marL="0">
               <a:spcAft>
                 <a:spcPts val="800"/>
@@ -14315,7 +15226,7 @@
               <a:buNone/>
             </a:pPr>
             <a:r>
-              <a:rPr lang="en-US" sz="4000" dirty="0">
+              <a:rPr lang="en-US" sz="4000" b="1" dirty="0">
                 <a:solidFill>
                   <a:srgbClr val="111111"/>
                 </a:solidFill>
@@ -14323,11 +15234,8 @@
                 <a:ea typeface="Times New Roman" pitchFamily="34" charset="-122"/>
                 <a:cs typeface="Times New Roman" pitchFamily="34" charset="-120"/>
               </a:rPr>
-              <a:t>Positive checks (famine, disease, war) raise deaths. Preventive checks (late marriage, abstinence) lower births.</a:t>
-            </a:r>
-            <a:endParaRPr lang="en-US" sz="4000" dirty="0"/>
-          </a:p>
-          <a:p>
+              <a:t>Pessimistic view: </a:t>
+            </a:r>
             <a:pPr algn="l" indent="0" marL="0">
               <a:spcAft>
                 <a:spcPts val="800"/>
@@ -14335,7 +15243,7 @@
               <a:buNone/>
             </a:pPr>
             <a:r>
-              <a:rPr lang="en-US" sz="4000" b="1" dirty="0">
+              <a:rPr lang="en-US" sz="4000" dirty="0">
                 <a:solidFill>
                   <a:srgbClr val="111111"/>
                 </a:solidFill>
@@ -14343,24 +15251,7 @@
                 <a:ea typeface="Times New Roman" pitchFamily="34" charset="-122"/>
                 <a:cs typeface="Times New Roman" pitchFamily="34" charset="-120"/>
               </a:rPr>
-              <a:t>Strengths and weaknesses: </a:t>
-            </a:r>
-            <a:pPr algn="l" indent="0" marL="0">
-              <a:spcAft>
-                <a:spcPts val="800"/>
-              </a:spcAft>
-              <a:buNone/>
-            </a:pPr>
-            <a:r>
-              <a:rPr lang="en-US" sz="4000" dirty="0">
-                <a:solidFill>
-                  <a:srgbClr val="111111"/>
-                </a:solidFill>
-                <a:latin typeface="Times New Roman" pitchFamily="34" charset="0"/>
-                <a:ea typeface="Times New Roman" pitchFamily="34" charset="-122"/>
-                <a:cs typeface="Times New Roman" pitchFamily="34" charset="-120"/>
-              </a:rPr>
-              <a:t>Famines in the Sahel and Ethiopia seem to support him. But he underestimated technology, trade and the fall in birth rates.</a:t>
+              <a:t>It is the belief that population growth will outstrip resources and cause crises.</a:t>
             </a:r>
             <a:endParaRPr lang="en-US" sz="4000" dirty="0"/>
           </a:p>
@@ -14478,48 +15369,9 @@
           </a:p>
         </p:txBody>
       </p:sp>
-      <p:sp>
-        <p:nvSpPr>
-          <p:cNvPr id="3" name="Text 1"/>
-          <p:cNvSpPr/>
-          <p:nvPr/>
-        </p:nvSpPr>
-        <p:spPr>
-          <a:xfrm>
-            <a:off x="457200" y="1005840"/>
-            <a:ext cx="11277295" cy="731520"/>
-          </a:xfrm>
-          <a:prstGeom prst="rect">
-            <a:avLst/>
-          </a:prstGeom>
-          <a:noFill/>
-          <a:ln/>
-        </p:spPr>
-        <p:txBody>
-          <a:bodyPr wrap="square" lIns="0" tIns="0" rIns="0" bIns="0" rtlCol="0" anchor="ctr"/>
-          <a:lstStyle/>
-          <a:p>
-            <a:pPr algn="ctr" indent="0" marL="0">
-              <a:buNone/>
-            </a:pPr>
-            <a:r>
-              <a:rPr lang="en-US" sz="3600" b="1" dirty="0">
-                <a:solidFill>
-                  <a:srgbClr val="990011"/>
-                </a:solidFill>
-                <a:latin typeface="Times New Roman" pitchFamily="34" charset="0"/>
-                <a:ea typeface="Times New Roman" pitchFamily="34" charset="-122"/>
-                <a:cs typeface="Times New Roman" pitchFamily="34" charset="-120"/>
-              </a:rPr>
-              <a:t>2. Malthus's Theory (1798)</a:t>
-            </a:r>
-            <a:endParaRPr lang="en-US" sz="3600" dirty="0"/>
-          </a:p>
-        </p:txBody>
-      </p:sp>
       <p:pic>
         <p:nvPicPr>
-          <p:cNvPr id="4" name="Image 0" descr="/home/claude/f4/img/v2/malthus_big.png">    </p:cNvPr>
+          <p:cNvPr id="3" name="Image 0" descr="/home/claude/f4/img/minesec_sheet.png">    </p:cNvPr>
           <p:cNvPicPr>
             <a:picLocks noChangeAspect="1"/>
           </p:cNvPicPr>
@@ -14533,8 +15385,8 @@
         </p:blipFill>
         <p:spPr>
           <a:xfrm>
-            <a:off x="1215564" y="1783080"/>
-            <a:ext cx="9760567" cy="4270248"/>
+            <a:off x="0" y="658368"/>
+            <a:ext cx="2468880" cy="5833872"/>
           </a:xfrm>
           <a:prstGeom prst="rect">
             <a:avLst/>
@@ -14543,14 +15395,14 @@
       </p:pic>
       <p:sp>
         <p:nvSpPr>
-          <p:cNvPr id="5" name="Text 2"/>
+          <p:cNvPr id="4" name="Text 1"/>
           <p:cNvSpPr/>
           <p:nvPr/>
         </p:nvSpPr>
         <p:spPr>
           <a:xfrm>
-            <a:off x="457200" y="6089904"/>
-            <a:ext cx="11277295" cy="347472"/>
+            <a:off x="2697480" y="1005840"/>
+            <a:ext cx="9174175" cy="731520"/>
           </a:xfrm>
           <a:prstGeom prst="rect">
             <a:avLst/>
@@ -14559,24 +15411,122 @@
           <a:ln/>
         </p:spPr>
         <p:txBody>
-          <a:bodyPr wrap="square" lIns="0" tIns="0" rIns="0" bIns="0" rtlCol="0" anchor="ctr"/>
+          <a:bodyPr wrap="square" lIns="0" tIns="0" rIns="0" bIns="0" rtlCol="0" anchor="ctr">
+            <a:normAutofit/>
+          </a:bodyPr>
           <a:lstStyle/>
           <a:p>
             <a:pPr algn="ctr" indent="0" marL="0">
               <a:buNone/>
             </a:pPr>
             <a:r>
-              <a:rPr lang="en-US" sz="1800" i="1" dirty="0">
-                <a:solidFill>
-                  <a:srgbClr val="555555"/>
+              <a:rPr lang="en-US" sz="3600" b="1" dirty="0">
+                <a:solidFill>
+                  <a:srgbClr val="990011"/>
                 </a:solidFill>
                 <a:latin typeface="Times New Roman" pitchFamily="34" charset="0"/>
                 <a:ea typeface="Times New Roman" pitchFamily="34" charset="-122"/>
                 <a:cs typeface="Times New Roman" pitchFamily="34" charset="-120"/>
               </a:rPr>
-              <a:t>Illustration: Malthus's theory</a:t>
-            </a:r>
-            <a:endParaRPr lang="en-US" sz="1800" dirty="0"/>
+              <a:t>DEFINITIONS (continued)</a:t>
+            </a:r>
+            <a:endParaRPr lang="en-US" sz="3600" dirty="0"/>
+          </a:p>
+        </p:txBody>
+      </p:sp>
+      <p:sp>
+        <p:nvSpPr>
+          <p:cNvPr id="5" name="Text 2"/>
+          <p:cNvSpPr/>
+          <p:nvPr/>
+        </p:nvSpPr>
+        <p:spPr>
+          <a:xfrm>
+            <a:off x="2697480" y="1783080"/>
+            <a:ext cx="9174175" cy="4663440"/>
+          </a:xfrm>
+          <a:prstGeom prst="rect">
+            <a:avLst/>
+          </a:prstGeom>
+          <a:noFill/>
+          <a:ln/>
+        </p:spPr>
+        <p:txBody>
+          <a:bodyPr wrap="square" lIns="0" tIns="0" rIns="0" bIns="0" rtlCol="0" anchor="t"/>
+          <a:lstStyle/>
+          <a:p>
+            <a:pPr algn="l" indent="0" marL="0">
+              <a:spcAft>
+                <a:spcPts val="800"/>
+              </a:spcAft>
+              <a:buNone/>
+            </a:pPr>
+            <a:r>
+              <a:rPr lang="en-US" sz="4000" b="1" dirty="0">
+                <a:solidFill>
+                  <a:srgbClr val="111111"/>
+                </a:solidFill>
+                <a:latin typeface="Times New Roman" pitchFamily="34" charset="0"/>
+                <a:ea typeface="Times New Roman" pitchFamily="34" charset="-122"/>
+                <a:cs typeface="Times New Roman" pitchFamily="34" charset="-120"/>
+              </a:rPr>
+              <a:t>Optimistic view: </a:t>
+            </a:r>
+            <a:pPr algn="l" indent="0" marL="0">
+              <a:spcAft>
+                <a:spcPts val="800"/>
+              </a:spcAft>
+              <a:buNone/>
+            </a:pPr>
+            <a:r>
+              <a:rPr lang="en-US" sz="4000" dirty="0">
+                <a:solidFill>
+                  <a:srgbClr val="111111"/>
+                </a:solidFill>
+                <a:latin typeface="Times New Roman" pitchFamily="34" charset="0"/>
+                <a:ea typeface="Times New Roman" pitchFamily="34" charset="-122"/>
+                <a:cs typeface="Times New Roman" pitchFamily="34" charset="-120"/>
+              </a:rPr>
+              <a:t>It is the belief that population growth stimulates innovation that overcomes resource limits.</a:t>
+            </a:r>
+            <a:endParaRPr lang="en-US" sz="4000" dirty="0"/>
+          </a:p>
+          <a:p>
+            <a:pPr algn="l" indent="0" marL="0">
+              <a:spcAft>
+                <a:spcPts val="800"/>
+              </a:spcAft>
+              <a:buNone/>
+            </a:pPr>
+            <a:r>
+              <a:rPr lang="en-US" sz="4000" b="1" dirty="0">
+                <a:solidFill>
+                  <a:srgbClr val="111111"/>
+                </a:solidFill>
+                <a:latin typeface="Times New Roman" pitchFamily="34" charset="0"/>
+                <a:ea typeface="Times New Roman" pitchFamily="34" charset="-122"/>
+                <a:cs typeface="Times New Roman" pitchFamily="34" charset="-120"/>
+              </a:rPr>
+              <a:t>Checks: </a:t>
+            </a:r>
+            <a:pPr algn="l" indent="0" marL="0">
+              <a:spcAft>
+                <a:spcPts val="800"/>
+              </a:spcAft>
+              <a:buNone/>
+            </a:pPr>
+            <a:r>
+              <a:rPr lang="en-US" sz="4000" dirty="0">
+                <a:solidFill>
+                  <a:srgbClr val="111111"/>
+                </a:solidFill>
+                <a:latin typeface="Times New Roman" pitchFamily="34" charset="0"/>
+                <a:ea typeface="Times New Roman" pitchFamily="34" charset="-122"/>
+                <a:cs typeface="Times New Roman" pitchFamily="34" charset="-120"/>
+              </a:rPr>
+              <a:t>They are the factors that limit population growth, such as famine, war, disease or late marriage.</a:t>
+            </a:r>
+            <a:endParaRPr lang="en-US" sz="4000" dirty="0"/>
           </a:p>
         </p:txBody>
       </p:sp>
@@ -14751,7 +15701,7 @@
                 <a:ea typeface="Times New Roman" pitchFamily="34" charset="-122"/>
                 <a:cs typeface="Times New Roman" pitchFamily="34" charset="-120"/>
               </a:rPr>
-              <a:t>3. Boserup's Theory (1965)</a:t>
+              <a:t>DEFINITIONS (continued)</a:t>
             </a:r>
             <a:endParaRPr lang="en-US" sz="3600" dirty="0"/>
           </a:p>
@@ -14785,7 +15735,7 @@
               <a:buNone/>
             </a:pPr>
             <a:r>
-              <a:rPr lang="en-US" sz="4000" i="1" dirty="0">
+              <a:rPr lang="en-US" sz="4000" b="1" dirty="0">
                 <a:solidFill>
                   <a:srgbClr val="111111"/>
                 </a:solidFill>
@@ -14793,11 +15743,8 @@
                 <a:ea typeface="Times New Roman" pitchFamily="34" charset="-122"/>
                 <a:cs typeface="Times New Roman" pitchFamily="34" charset="-120"/>
               </a:rPr>
-              <a:t>Ester Boserup stated that:</a:t>
-            </a:r>
-            <a:endParaRPr lang="en-US" sz="4000" dirty="0"/>
-          </a:p>
-          <a:p>
+              <a:t>Agricultural intensification: </a:t>
+            </a:r>
             <a:pPr algn="l" indent="0" marL="0">
               <a:spcAft>
                 <a:spcPts val="800"/>
@@ -14805,7 +15752,7 @@
               <a:buNone/>
             </a:pPr>
             <a:r>
-              <a:rPr lang="en-US" sz="4000" b="1" dirty="0">
+              <a:rPr lang="en-US" sz="4000" dirty="0">
                 <a:solidFill>
                   <a:srgbClr val="111111"/>
                 </a:solidFill>
@@ -14813,24 +15760,7 @@
                 <a:ea typeface="Times New Roman" pitchFamily="34" charset="-122"/>
                 <a:cs typeface="Times New Roman" pitchFamily="34" charset="-120"/>
               </a:rPr>
-              <a:t>Main idea: </a:t>
-            </a:r>
-            <a:pPr algn="l" indent="0" marL="0">
-              <a:spcAft>
-                <a:spcPts val="800"/>
-              </a:spcAft>
-              <a:buNone/>
-            </a:pPr>
-            <a:r>
-              <a:rPr lang="en-US" sz="4000" dirty="0">
-                <a:solidFill>
-                  <a:srgbClr val="111111"/>
-                </a:solidFill>
-                <a:latin typeface="Times New Roman" pitchFamily="34" charset="0"/>
-                <a:ea typeface="Times New Roman" pitchFamily="34" charset="-122"/>
-                <a:cs typeface="Times New Roman" pitchFamily="34" charset="-120"/>
-              </a:rPr>
-              <a:t>"Necessity is the mother of invention": population pressure forces people to intensify farming. Fallow is shortened and new techniques are adopted.</a:t>
+              <a:t>It is the increase of production on the same land through more labour, new tools and new methods.</a:t>
             </a:r>
             <a:endParaRPr lang="en-US" sz="4000" dirty="0"/>
           </a:p>
@@ -15069,7 +15999,7 @@
                 <a:ea typeface="Times New Roman" pitchFamily="34" charset="-122"/>
                 <a:cs typeface="Times New Roman" pitchFamily="34" charset="-120"/>
               </a:rPr>
-              <a:t>Is Cameroon over-, under- or optimally populated? Write a paragraph with evidence.</a:t>
+              <a:t>Give the date of Malthus's essay on population.</a:t>
             </a:r>
             <a:endParaRPr lang="en-US" sz="4000" dirty="0"/>
           </a:p>
@@ -15187,9 +16117,129 @@
           </a:p>
         </p:txBody>
       </p:sp>
+      <p:sp>
+        <p:nvSpPr>
+          <p:cNvPr id="3" name="Text 1"/>
+          <p:cNvSpPr/>
+          <p:nvPr/>
+        </p:nvSpPr>
+        <p:spPr>
+          <a:xfrm>
+            <a:off x="365760" y="1005840"/>
+            <a:ext cx="11460175" cy="731520"/>
+          </a:xfrm>
+          <a:prstGeom prst="rect">
+            <a:avLst/>
+          </a:prstGeom>
+          <a:noFill/>
+          <a:ln/>
+        </p:spPr>
+        <p:txBody>
+          <a:bodyPr wrap="square" lIns="0" tIns="0" rIns="0" bIns="0" rtlCol="0" anchor="ctr">
+            <a:normAutofit/>
+          </a:bodyPr>
+          <a:lstStyle/>
+          <a:p>
+            <a:pPr algn="ctr" indent="0" marL="0">
+              <a:buNone/>
+            </a:pPr>
+            <a:r>
+              <a:rPr lang="en-US" sz="3600" b="1" dirty="0">
+                <a:solidFill>
+                  <a:srgbClr val="990011"/>
+                </a:solidFill>
+                <a:latin typeface="Times New Roman" pitchFamily="34" charset="0"/>
+                <a:ea typeface="Times New Roman" pitchFamily="34" charset="-122"/>
+                <a:cs typeface="Times New Roman" pitchFamily="34" charset="-120"/>
+              </a:rPr>
+              <a:t>1. The Malthusian Theory (Pessimistic View)</a:t>
+            </a:r>
+            <a:endParaRPr lang="en-US" sz="3600" dirty="0"/>
+          </a:p>
+        </p:txBody>
+      </p:sp>
+      <p:sp>
+        <p:nvSpPr>
+          <p:cNvPr id="4" name="Text 2"/>
+          <p:cNvSpPr/>
+          <p:nvPr/>
+        </p:nvSpPr>
+        <p:spPr>
+          <a:xfrm>
+            <a:off x="365760" y="1783080"/>
+            <a:ext cx="4846320" cy="4617720"/>
+          </a:xfrm>
+          <a:prstGeom prst="rect">
+            <a:avLst/>
+          </a:prstGeom>
+          <a:noFill/>
+          <a:ln/>
+        </p:spPr>
+        <p:txBody>
+          <a:bodyPr wrap="square" lIns="0" tIns="0" rIns="0" bIns="0" rtlCol="0" anchor="t"/>
+          <a:lstStyle/>
+          <a:p>
+            <a:pPr algn="l" indent="0" marL="0">
+              <a:spcAft>
+                <a:spcPts val="800"/>
+              </a:spcAft>
+              <a:buNone/>
+            </a:pPr>
+            <a:r>
+              <a:rPr lang="en-US" sz="3600" i="1" dirty="0">
+                <a:solidFill>
+                  <a:srgbClr val="111111"/>
+                </a:solidFill>
+                <a:latin typeface="Times New Roman" pitchFamily="34" charset="0"/>
+                <a:ea typeface="Times New Roman" pitchFamily="34" charset="-122"/>
+                <a:cs typeface="Times New Roman" pitchFamily="34" charset="-120"/>
+              </a:rPr>
+              <a:t>The theory of Malthus is presented as follows:</a:t>
+            </a:r>
+            <a:endParaRPr lang="en-US" sz="3600" dirty="0"/>
+          </a:p>
+          <a:p>
+            <a:pPr algn="l" indent="0" marL="0">
+              <a:spcAft>
+                <a:spcPts val="800"/>
+              </a:spcAft>
+              <a:buNone/>
+            </a:pPr>
+            <a:r>
+              <a:rPr lang="en-US" sz="3600" b="1" dirty="0">
+                <a:solidFill>
+                  <a:srgbClr val="111111"/>
+                </a:solidFill>
+                <a:latin typeface="Times New Roman" pitchFamily="34" charset="0"/>
+                <a:ea typeface="Times New Roman" pitchFamily="34" charset="-122"/>
+                <a:cs typeface="Times New Roman" pitchFamily="34" charset="-120"/>
+              </a:rPr>
+              <a:t>The essay: </a:t>
+            </a:r>
+            <a:pPr algn="l" indent="0" marL="0">
+              <a:spcAft>
+                <a:spcPts val="800"/>
+              </a:spcAft>
+              <a:buNone/>
+            </a:pPr>
+            <a:r>
+              <a:rPr lang="en-US" sz="3600" dirty="0">
+                <a:solidFill>
+                  <a:srgbClr val="111111"/>
+                </a:solidFill>
+                <a:latin typeface="Times New Roman" pitchFamily="34" charset="0"/>
+                <a:ea typeface="Times New Roman" pitchFamily="34" charset="-122"/>
+                <a:cs typeface="Times New Roman" pitchFamily="34" charset="-120"/>
+              </a:rPr>
+              <a:t>Thomas Malthus published "An Essay on the Principle of Population" in 1798.</a:t>
+            </a:r>
+            <a:endParaRPr lang="en-US" sz="3600" dirty="0"/>
+          </a:p>
+        </p:txBody>
+      </p:sp>
       <p:pic>
         <p:nvPicPr>
-          <p:cNvPr id="3" name="Image 0" descr="/home/claude/f4/img/minesec_sheet.png">    </p:cNvPr>
+          <p:cNvPr id="5" name="Image 0" descr="/home/claude/f4/img/v2/malthus_big.png">    </p:cNvPr>
           <p:cNvPicPr>
             <a:picLocks noChangeAspect="1"/>
           </p:cNvPicPr>
@@ -15203,8 +16253,8 @@
         </p:blipFill>
         <p:spPr>
           <a:xfrm>
-            <a:off x="0" y="658368"/>
-            <a:ext cx="5120640" cy="5833872"/>
+            <a:off x="5349240" y="2461422"/>
+            <a:ext cx="6659575" cy="2913564"/>
           </a:xfrm>
           <a:prstGeom prst="rect">
             <a:avLst/>
@@ -15213,14 +16263,14 @@
       </p:pic>
       <p:sp>
         <p:nvSpPr>
-          <p:cNvPr id="4" name="Text 1"/>
+          <p:cNvPr id="6" name="Text 3"/>
           <p:cNvSpPr/>
           <p:nvPr/>
         </p:nvSpPr>
         <p:spPr>
           <a:xfrm>
-            <a:off x="5349240" y="1005840"/>
-            <a:ext cx="6522415" cy="731520"/>
+            <a:off x="5349240" y="6089904"/>
+            <a:ext cx="6659575" cy="347472"/>
           </a:xfrm>
           <a:prstGeom prst="rect">
             <a:avLst/>
@@ -15229,85 +16279,24 @@
           <a:ln/>
         </p:spPr>
         <p:txBody>
-          <a:bodyPr wrap="square" lIns="0" tIns="0" rIns="0" bIns="0" rtlCol="0" anchor="ctr">
-            <a:normAutofit/>
-          </a:bodyPr>
+          <a:bodyPr wrap="square" lIns="0" tIns="0" rIns="0" bIns="0" rtlCol="0" anchor="ctr"/>
           <a:lstStyle/>
           <a:p>
             <a:pPr algn="ctr" indent="0" marL="0">
               <a:buNone/>
             </a:pPr>
             <a:r>
-              <a:rPr lang="en-US" sz="3600" b="1" dirty="0">
-                <a:solidFill>
-                  <a:srgbClr val="990011"/>
+              <a:rPr lang="en-US" sz="1600" i="1" dirty="0">
+                <a:solidFill>
+                  <a:srgbClr val="555555"/>
                 </a:solidFill>
                 <a:latin typeface="Times New Roman" pitchFamily="34" charset="0"/>
                 <a:ea typeface="Times New Roman" pitchFamily="34" charset="-122"/>
                 <a:cs typeface="Times New Roman" pitchFamily="34" charset="-120"/>
               </a:rPr>
-              <a:t>3. Boserup's Theory (1965) (continued)</a:t>
-            </a:r>
-            <a:endParaRPr lang="en-US" sz="3600" dirty="0"/>
-          </a:p>
-        </p:txBody>
-      </p:sp>
-      <p:sp>
-        <p:nvSpPr>
-          <p:cNvPr id="5" name="Text 2"/>
-          <p:cNvSpPr/>
-          <p:nvPr/>
-        </p:nvSpPr>
-        <p:spPr>
-          <a:xfrm>
-            <a:off x="5349240" y="1783080"/>
-            <a:ext cx="6522415" cy="4663440"/>
-          </a:xfrm>
-          <a:prstGeom prst="rect">
-            <a:avLst/>
-          </a:prstGeom>
-          <a:noFill/>
-          <a:ln/>
-        </p:spPr>
-        <p:txBody>
-          <a:bodyPr wrap="square" lIns="0" tIns="0" rIns="0" bIns="0" rtlCol="0" anchor="t"/>
-          <a:lstStyle/>
-          <a:p>
-            <a:pPr algn="l" indent="0" marL="0">
-              <a:spcAft>
-                <a:spcPts val="800"/>
-              </a:spcAft>
-              <a:buNone/>
-            </a:pPr>
-            <a:r>
-              <a:rPr lang="en-US" sz="4000" b="1" dirty="0">
-                <a:solidFill>
-                  <a:srgbClr val="111111"/>
-                </a:solidFill>
-                <a:latin typeface="Times New Roman" pitchFamily="34" charset="0"/>
-                <a:ea typeface="Times New Roman" pitchFamily="34" charset="-122"/>
-                <a:cs typeface="Times New Roman" pitchFamily="34" charset="-120"/>
-              </a:rPr>
-              <a:t>Examples: </a:t>
-            </a:r>
-            <a:pPr algn="l" indent="0" marL="0">
-              <a:spcAft>
-                <a:spcPts val="800"/>
-              </a:spcAft>
-              <a:buNone/>
-            </a:pPr>
-            <a:r>
-              <a:rPr lang="en-US" sz="4000" dirty="0">
-                <a:solidFill>
-                  <a:srgbClr val="111111"/>
-                </a:solidFill>
-                <a:latin typeface="Times New Roman" pitchFamily="34" charset="0"/>
-                <a:ea typeface="Times New Roman" pitchFamily="34" charset="-122"/>
-                <a:cs typeface="Times New Roman" pitchFamily="34" charset="-120"/>
-              </a:rPr>
-              <a:t>Terraces in the Mandara Mountains and irrigation in Asia increased food production. The Green Revolution supports her view.</a:t>
-            </a:r>
-            <a:endParaRPr lang="en-US" sz="4000" dirty="0"/>
+              <a:t>Illustration: population and food</a:t>
+            </a:r>
+            <a:endParaRPr lang="en-US" sz="1600" dirty="0"/>
           </a:p>
         </p:txBody>
       </p:sp>
@@ -15482,7 +16471,7 @@
                 <a:ea typeface="Times New Roman" pitchFamily="34" charset="-122"/>
                 <a:cs typeface="Times New Roman" pitchFamily="34" charset="-120"/>
               </a:rPr>
-              <a:t>3. Boserup's Theory (1965) (continued)</a:t>
+              <a:t>1. The Malthusian Theory (Pessimistic View)</a:t>
             </a:r>
             <a:endParaRPr lang="en-US" sz="3600" dirty="0"/>
           </a:p>
@@ -15524,7 +16513,7 @@
                 <a:ea typeface="Times New Roman" pitchFamily="34" charset="-122"/>
                 <a:cs typeface="Times New Roman" pitchFamily="34" charset="-120"/>
               </a:rPr>
-              <a:t>Strengths and weaknesses: </a:t>
+              <a:t>Main idea: </a:t>
             </a:r>
             <a:pPr algn="l" indent="0" marL="0">
               <a:spcAft>
@@ -15541,7 +16530,7 @@
                 <a:ea typeface="Times New Roman" pitchFamily="34" charset="-122"/>
                 <a:cs typeface="Times New Roman" pitchFamily="34" charset="-120"/>
               </a:rPr>
-              <a:t>It explains intensification in crowded areas. But it ignores environmental limits and societies that cannot innovate fast enough.</a:t>
+              <a:t>Population grows geometrically (1, 2, 4, 8…) while food grows arithmetically (1, 2, 3, 4…).</a:t>
             </a:r>
             <a:endParaRPr lang="en-US" sz="4000" dirty="0"/>
           </a:p>
@@ -15667,8 +16656,8 @@
         </p:nvSpPr>
         <p:spPr>
           <a:xfrm>
-            <a:off x="457200" y="1005840"/>
-            <a:ext cx="11277295" cy="731520"/>
+            <a:off x="365760" y="1005840"/>
+            <a:ext cx="11460175" cy="731520"/>
           </a:xfrm>
           <a:prstGeom prst="rect">
             <a:avLst/>
@@ -15677,7 +16666,9 @@
           <a:ln/>
         </p:spPr>
         <p:txBody>
-          <a:bodyPr wrap="square" lIns="0" tIns="0" rIns="0" bIns="0" rtlCol="0" anchor="ctr"/>
+          <a:bodyPr wrap="square" lIns="0" tIns="0" rIns="0" bIns="0" rtlCol="0" anchor="ctr">
+            <a:normAutofit/>
+          </a:bodyPr>
           <a:lstStyle/>
           <a:p>
             <a:pPr algn="ctr" indent="0" marL="0">
@@ -15692,7 +16683,66 @@
                 <a:ea typeface="Times New Roman" pitchFamily="34" charset="-122"/>
                 <a:cs typeface="Times New Roman" pitchFamily="34" charset="-120"/>
               </a:rPr>
-              <a:t>3. Boserup's Theory (1965)</a:t>
+              <a:t>1. The Malthusian Theory (Pessimistic View)</a:t>
+            </a:r>
+            <a:endParaRPr lang="en-US" sz="3600" dirty="0"/>
+          </a:p>
+        </p:txBody>
+      </p:sp>
+      <p:sp>
+        <p:nvSpPr>
+          <p:cNvPr id="4" name="Text 2"/>
+          <p:cNvSpPr/>
+          <p:nvPr/>
+        </p:nvSpPr>
+        <p:spPr>
+          <a:xfrm>
+            <a:off x="365760" y="1783080"/>
+            <a:ext cx="4846320" cy="4617720"/>
+          </a:xfrm>
+          <a:prstGeom prst="rect">
+            <a:avLst/>
+          </a:prstGeom>
+          <a:noFill/>
+          <a:ln/>
+        </p:spPr>
+        <p:txBody>
+          <a:bodyPr wrap="square" lIns="0" tIns="0" rIns="0" bIns="0" rtlCol="0" anchor="t"/>
+          <a:lstStyle/>
+          <a:p>
+            <a:pPr algn="l" indent="0" marL="0">
+              <a:spcAft>
+                <a:spcPts val="800"/>
+              </a:spcAft>
+              <a:buNone/>
+            </a:pPr>
+            <a:r>
+              <a:rPr lang="en-US" sz="3600" b="1" dirty="0">
+                <a:solidFill>
+                  <a:srgbClr val="111111"/>
+                </a:solidFill>
+                <a:latin typeface="Times New Roman" pitchFamily="34" charset="0"/>
+                <a:ea typeface="Times New Roman" pitchFamily="34" charset="-122"/>
+                <a:cs typeface="Times New Roman" pitchFamily="34" charset="-120"/>
+              </a:rPr>
+              <a:t>Checks: </a:t>
+            </a:r>
+            <a:pPr algn="l" indent="0" marL="0">
+              <a:spcAft>
+                <a:spcPts val="800"/>
+              </a:spcAft>
+              <a:buNone/>
+            </a:pPr>
+            <a:r>
+              <a:rPr lang="en-US" sz="3600" dirty="0">
+                <a:solidFill>
+                  <a:srgbClr val="111111"/>
+                </a:solidFill>
+                <a:latin typeface="Times New Roman" pitchFamily="34" charset="0"/>
+                <a:ea typeface="Times New Roman" pitchFamily="34" charset="-122"/>
+                <a:cs typeface="Times New Roman" pitchFamily="34" charset="-120"/>
+              </a:rPr>
+              <a:t>Without preventive checks (late marriage, moral restraint), positive checks (famine, war, disease) reduce the population.</a:t>
             </a:r>
             <a:endParaRPr lang="en-US" sz="3600" dirty="0"/>
           </a:p>
@@ -15700,7 +16750,7 @@
       </p:sp>
       <p:pic>
         <p:nvPicPr>
-          <p:cNvPr id="4" name="Image 0" descr="/home/claude/f4/img/v2/boserup_big.png">    </p:cNvPr>
+          <p:cNvPr id="5" name="Image 0" descr="/home/claude/f4/img/v2/f2t_drought.jpg">    </p:cNvPr>
           <p:cNvPicPr>
             <a:picLocks noChangeAspect="1"/>
           </p:cNvPicPr>
@@ -15714,8 +16764,8 @@
         </p:blipFill>
         <p:spPr>
           <a:xfrm>
-            <a:off x="629930" y="1783080"/>
-            <a:ext cx="10931835" cy="4270248"/>
+            <a:off x="5349240" y="2071212"/>
+            <a:ext cx="6659575" cy="3693983"/>
           </a:xfrm>
           <a:prstGeom prst="rect">
             <a:avLst/>
@@ -15724,14 +16774,14 @@
       </p:pic>
       <p:sp>
         <p:nvSpPr>
-          <p:cNvPr id="5" name="Text 2"/>
+          <p:cNvPr id="6" name="Text 3"/>
           <p:cNvSpPr/>
           <p:nvPr/>
         </p:nvSpPr>
         <p:spPr>
           <a:xfrm>
-            <a:off x="457200" y="6089904"/>
-            <a:ext cx="11277295" cy="347472"/>
+            <a:off x="5349240" y="6089904"/>
+            <a:ext cx="6659575" cy="347472"/>
           </a:xfrm>
           <a:prstGeom prst="rect">
             <a:avLst/>
@@ -15747,7 +16797,7 @@
               <a:buNone/>
             </a:pPr>
             <a:r>
-              <a:rPr lang="en-US" sz="1800" i="1" dirty="0">
+              <a:rPr lang="en-US" sz="1600" i="1" dirty="0">
                 <a:solidFill>
                   <a:srgbClr val="555555"/>
                 </a:solidFill>
@@ -15755,9 +16805,9 @@
                 <a:ea typeface="Times New Roman" pitchFamily="34" charset="-122"/>
                 <a:cs typeface="Times New Roman" pitchFamily="34" charset="-120"/>
               </a:rPr>
-              <a:t>Illustration: Boserup's theory</a:t>
-            </a:r>
-            <a:endParaRPr lang="en-US" sz="1800" dirty="0"/>
+              <a:t>Illustration: drought and hunger</a:t>
+            </a:r>
+            <a:endParaRPr lang="en-US" sz="1600" dirty="0"/>
           </a:p>
         </p:txBody>
       </p:sp>
@@ -15867,7 +16917,7 @@
                 <a:ea typeface="Calibri" pitchFamily="34" charset="-122"/>
                 <a:cs typeface="Calibri" pitchFamily="34" charset="-120"/>
               </a:rPr>
-              <a:t>FORMATIVE EVALUATION</a:t>
+              <a:t>BOARD SUMMARY</a:t>
             </a:r>
             <a:endParaRPr lang="en-US" sz="1400" dirty="0"/>
           </a:p>
@@ -15932,7 +16982,7 @@
                 <a:ea typeface="Times New Roman" pitchFamily="34" charset="-122"/>
                 <a:cs typeface="Times New Roman" pitchFamily="34" charset="-120"/>
               </a:rPr>
-              <a:t>Evaluation 1</a:t>
+              <a:t>1. The Malthusian Theory (Pessimistic View)</a:t>
             </a:r>
             <a:endParaRPr lang="en-US" sz="3600" dirty="0"/>
           </a:p>
@@ -15966,7 +17016,7 @@
               <a:buNone/>
             </a:pPr>
             <a:r>
-              <a:rPr lang="en-US" sz="4000" dirty="0">
+              <a:rPr lang="en-US" sz="4000" b="1" dirty="0">
                 <a:solidFill>
                   <a:srgbClr val="111111"/>
                 </a:solidFill>
@@ -15974,7 +17024,49 @@
                 <a:ea typeface="Times New Roman" pitchFamily="34" charset="-122"/>
                 <a:cs typeface="Times New Roman" pitchFamily="34" charset="-120"/>
               </a:rPr>
-              <a:t>Compare the views of Malthus and Boserup.</a:t>
+              <a:t>Strengths:</a:t>
+            </a:r>
+            <a:endParaRPr lang="en-US" sz="4000" dirty="0"/>
+          </a:p>
+          <a:p>
+            <a:pPr algn="l" marL="342900" indent="-342900">
+              <a:spcAft>
+                <a:spcPts val="800"/>
+              </a:spcAft>
+              <a:buSzPct val="100000"/>
+              <a:buChar char="•"/>
+            </a:pPr>
+            <a:r>
+              <a:rPr lang="en-US" sz="4000" dirty="0">
+                <a:solidFill>
+                  <a:srgbClr val="111111"/>
+                </a:solidFill>
+                <a:latin typeface="Times New Roman" pitchFamily="34" charset="0"/>
+                <a:ea typeface="Times New Roman" pitchFamily="34" charset="-122"/>
+                <a:cs typeface="Times New Roman" pitchFamily="34" charset="-120"/>
+              </a:rPr>
+              <a:t>It remains useful to study food insecurity in fast-growing regions.</a:t>
+            </a:r>
+            <a:endParaRPr lang="en-US" sz="4000" dirty="0"/>
+          </a:p>
+          <a:p>
+            <a:pPr algn="l" marL="342900" indent="-342900">
+              <a:spcAft>
+                <a:spcPts val="800"/>
+              </a:spcAft>
+              <a:buSzPct val="100000"/>
+              <a:buChar char="•"/>
+            </a:pPr>
+            <a:r>
+              <a:rPr lang="en-US" sz="4000" dirty="0">
+                <a:solidFill>
+                  <a:srgbClr val="111111"/>
+                </a:solidFill>
+                <a:latin typeface="Times New Roman" pitchFamily="34" charset="0"/>
+                <a:ea typeface="Times New Roman" pitchFamily="34" charset="-122"/>
+                <a:cs typeface="Times New Roman" pitchFamily="34" charset="-120"/>
+              </a:rPr>
+              <a:t>It warns of environmental damage and resource limits.</a:t>
             </a:r>
             <a:endParaRPr lang="en-US" sz="4000" dirty="0"/>
           </a:p>
@@ -16086,7 +17178,7 @@
                 <a:ea typeface="Calibri" pitchFamily="34" charset="-122"/>
                 <a:cs typeface="Calibri" pitchFamily="34" charset="-120"/>
               </a:rPr>
-              <a:t>FORMATIVE EVALUATION</a:t>
+              <a:t>BOARD SUMMARY</a:t>
             </a:r>
             <a:endParaRPr lang="en-US" sz="1400" dirty="0"/>
           </a:p>
@@ -16109,7 +17201,7 @@
         <p:spPr>
           <a:xfrm>
             <a:off x="0" y="658368"/>
-            <a:ext cx="5120640" cy="5833872"/>
+            <a:ext cx="2468880" cy="5833872"/>
           </a:xfrm>
           <a:prstGeom prst="rect">
             <a:avLst/>
@@ -16124,8 +17216,8 @@
         </p:nvSpPr>
         <p:spPr>
           <a:xfrm>
-            <a:off x="5349240" y="1005840"/>
-            <a:ext cx="6522415" cy="731520"/>
+            <a:off x="2697480" y="1005840"/>
+            <a:ext cx="9174175" cy="731520"/>
           </a:xfrm>
           <a:prstGeom prst="rect">
             <a:avLst/>
@@ -16151,7 +17243,7 @@
                 <a:ea typeface="Times New Roman" pitchFamily="34" charset="-122"/>
                 <a:cs typeface="Times New Roman" pitchFamily="34" charset="-120"/>
               </a:rPr>
-              <a:t>Expected Answer</a:t>
+              <a:t>1. The Malthusian Theory (Pessimistic View) (continued)</a:t>
             </a:r>
             <a:endParaRPr lang="en-US" sz="3600" dirty="0"/>
           </a:p>
@@ -16165,8 +17257,8 @@
         </p:nvSpPr>
         <p:spPr>
           <a:xfrm>
-            <a:off x="5349240" y="1783080"/>
-            <a:ext cx="6522415" cy="4663440"/>
+            <a:off x="2697480" y="1783080"/>
+            <a:ext cx="9174175" cy="4663440"/>
           </a:xfrm>
           <a:prstGeom prst="rect">
             <a:avLst/>
@@ -16185,7 +17277,7 @@
               <a:buNone/>
             </a:pPr>
             <a:r>
-              <a:rPr lang="en-US" sz="4000" dirty="0">
+              <a:rPr lang="en-US" sz="4000" b="1" dirty="0">
                 <a:solidFill>
                   <a:srgbClr val="111111"/>
                 </a:solidFill>
@@ -16193,7 +17285,70 @@
                 <a:ea typeface="Times New Roman" pitchFamily="34" charset="-122"/>
                 <a:cs typeface="Times New Roman" pitchFamily="34" charset="-120"/>
               </a:rPr>
-              <a:t>Malthus: population outgrows food and causes crises. Boserup: pressure leads to new methods and more food.</a:t>
+              <a:t>Weaknesses:</a:t>
+            </a:r>
+            <a:endParaRPr lang="en-US" sz="4000" dirty="0"/>
+          </a:p>
+          <a:p>
+            <a:pPr algn="l" marL="342900" indent="-342900">
+              <a:spcAft>
+                <a:spcPts val="800"/>
+              </a:spcAft>
+              <a:buSzPct val="100000"/>
+              <a:buChar char="•"/>
+            </a:pPr>
+            <a:r>
+              <a:rPr lang="en-US" sz="4000" dirty="0">
+                <a:solidFill>
+                  <a:srgbClr val="111111"/>
+                </a:solidFill>
+                <a:latin typeface="Times New Roman" pitchFamily="34" charset="0"/>
+                <a:ea typeface="Times New Roman" pitchFamily="34" charset="-122"/>
+                <a:cs typeface="Times New Roman" pitchFamily="34" charset="-120"/>
+              </a:rPr>
+              <a:t>It underestimated technology, which has greatly increased food production.</a:t>
+            </a:r>
+            <a:endParaRPr lang="en-US" sz="4000" dirty="0"/>
+          </a:p>
+          <a:p>
+            <a:pPr algn="l" marL="342900" indent="-342900">
+              <a:spcAft>
+                <a:spcPts val="800"/>
+              </a:spcAft>
+              <a:buSzPct val="100000"/>
+              <a:buChar char="•"/>
+            </a:pPr>
+            <a:r>
+              <a:rPr lang="en-US" sz="4000" dirty="0">
+                <a:solidFill>
+                  <a:srgbClr val="111111"/>
+                </a:solidFill>
+                <a:latin typeface="Times New Roman" pitchFamily="34" charset="0"/>
+                <a:ea typeface="Times New Roman" pitchFamily="34" charset="-122"/>
+                <a:cs typeface="Times New Roman" pitchFamily="34" charset="-120"/>
+              </a:rPr>
+              <a:t>It is based on pre-industrial Europe.</a:t>
+            </a:r>
+            <a:endParaRPr lang="en-US" sz="4000" dirty="0"/>
+          </a:p>
+          <a:p>
+            <a:pPr algn="l" marL="342900" indent="-342900">
+              <a:spcAft>
+                <a:spcPts val="800"/>
+              </a:spcAft>
+              <a:buSzPct val="100000"/>
+              <a:buChar char="•"/>
+            </a:pPr>
+            <a:r>
+              <a:rPr lang="en-US" sz="4000" dirty="0">
+                <a:solidFill>
+                  <a:srgbClr val="111111"/>
+                </a:solidFill>
+                <a:latin typeface="Times New Roman" pitchFamily="34" charset="0"/>
+                <a:ea typeface="Times New Roman" pitchFamily="34" charset="-122"/>
+                <a:cs typeface="Times New Roman" pitchFamily="34" charset="-120"/>
+              </a:rPr>
+              <a:t>It ignores the unequal distribution of resources and the role of policies.</a:t>
             </a:r>
             <a:endParaRPr lang="en-US" sz="4000" dirty="0"/>
           </a:p>
@@ -16305,15 +17460,135 @@
                 <a:ea typeface="Calibri" pitchFamily="34" charset="-122"/>
                 <a:cs typeface="Calibri" pitchFamily="34" charset="-120"/>
               </a:rPr>
-              <a:t>FORMATIVE EVALUATION</a:t>
+              <a:t>BOARD SUMMARY</a:t>
             </a:r>
             <a:endParaRPr lang="en-US" sz="1400" dirty="0"/>
+          </a:p>
+        </p:txBody>
+      </p:sp>
+      <p:sp>
+        <p:nvSpPr>
+          <p:cNvPr id="3" name="Text 1"/>
+          <p:cNvSpPr/>
+          <p:nvPr/>
+        </p:nvSpPr>
+        <p:spPr>
+          <a:xfrm>
+            <a:off x="365760" y="1005840"/>
+            <a:ext cx="11460175" cy="731520"/>
+          </a:xfrm>
+          <a:prstGeom prst="rect">
+            <a:avLst/>
+          </a:prstGeom>
+          <a:noFill/>
+          <a:ln/>
+        </p:spPr>
+        <p:txBody>
+          <a:bodyPr wrap="square" lIns="0" tIns="0" rIns="0" bIns="0" rtlCol="0" anchor="ctr">
+            <a:normAutofit/>
+          </a:bodyPr>
+          <a:lstStyle/>
+          <a:p>
+            <a:pPr algn="ctr" indent="0" marL="0">
+              <a:buNone/>
+            </a:pPr>
+            <a:r>
+              <a:rPr lang="en-US" sz="3600" b="1" dirty="0">
+                <a:solidFill>
+                  <a:srgbClr val="990011"/>
+                </a:solidFill>
+                <a:latin typeface="Times New Roman" pitchFamily="34" charset="0"/>
+                <a:ea typeface="Times New Roman" pitchFamily="34" charset="-122"/>
+                <a:cs typeface="Times New Roman" pitchFamily="34" charset="-120"/>
+              </a:rPr>
+              <a:t>2. Boserup's Theory (Optimistic View)</a:t>
+            </a:r>
+            <a:endParaRPr lang="en-US" sz="3600" dirty="0"/>
+          </a:p>
+        </p:txBody>
+      </p:sp>
+      <p:sp>
+        <p:nvSpPr>
+          <p:cNvPr id="4" name="Text 2"/>
+          <p:cNvSpPr/>
+          <p:nvPr/>
+        </p:nvSpPr>
+        <p:spPr>
+          <a:xfrm>
+            <a:off x="365760" y="1783080"/>
+            <a:ext cx="4846320" cy="4617720"/>
+          </a:xfrm>
+          <a:prstGeom prst="rect">
+            <a:avLst/>
+          </a:prstGeom>
+          <a:noFill/>
+          <a:ln/>
+        </p:spPr>
+        <p:txBody>
+          <a:bodyPr wrap="square" lIns="0" tIns="0" rIns="0" bIns="0" rtlCol="0" anchor="t"/>
+          <a:lstStyle/>
+          <a:p>
+            <a:pPr algn="l" indent="0" marL="0">
+              <a:spcAft>
+                <a:spcPts val="800"/>
+              </a:spcAft>
+              <a:buNone/>
+            </a:pPr>
+            <a:r>
+              <a:rPr lang="en-US" sz="3600" i="1" dirty="0">
+                <a:solidFill>
+                  <a:srgbClr val="111111"/>
+                </a:solidFill>
+                <a:latin typeface="Times New Roman" pitchFamily="34" charset="0"/>
+                <a:ea typeface="Times New Roman" pitchFamily="34" charset="-122"/>
+                <a:cs typeface="Times New Roman" pitchFamily="34" charset="-120"/>
+              </a:rPr>
+              <a:t>The theory of Boserup is presented as follows:</a:t>
+            </a:r>
+            <a:endParaRPr lang="en-US" sz="3600" dirty="0"/>
+          </a:p>
+          <a:p>
+            <a:pPr algn="l" indent="0" marL="0">
+              <a:spcAft>
+                <a:spcPts val="800"/>
+              </a:spcAft>
+              <a:buNone/>
+            </a:pPr>
+            <a:r>
+              <a:rPr lang="en-US" sz="3600" b="1" dirty="0">
+                <a:solidFill>
+                  <a:srgbClr val="111111"/>
+                </a:solidFill>
+                <a:latin typeface="Times New Roman" pitchFamily="34" charset="0"/>
+                <a:ea typeface="Times New Roman" pitchFamily="34" charset="-122"/>
+                <a:cs typeface="Times New Roman" pitchFamily="34" charset="-120"/>
+              </a:rPr>
+              <a:t>The book: </a:t>
+            </a:r>
+            <a:pPr algn="l" indent="0" marL="0">
+              <a:spcAft>
+                <a:spcPts val="800"/>
+              </a:spcAft>
+              <a:buNone/>
+            </a:pPr>
+            <a:r>
+              <a:rPr lang="en-US" sz="3600" dirty="0">
+                <a:solidFill>
+                  <a:srgbClr val="111111"/>
+                </a:solidFill>
+                <a:latin typeface="Times New Roman" pitchFamily="34" charset="0"/>
+                <a:ea typeface="Times New Roman" pitchFamily="34" charset="-122"/>
+                <a:cs typeface="Times New Roman" pitchFamily="34" charset="-120"/>
+              </a:rPr>
+              <a:t>Ester Boserup published "The Conditions of Agricultural Growth" in 1965.</a:t>
+            </a:r>
+            <a:endParaRPr lang="en-US" sz="3600" dirty="0"/>
           </a:p>
         </p:txBody>
       </p:sp>
       <p:pic>
         <p:nvPicPr>
-          <p:cNvPr id="3" name="Image 0" descr="/home/claude/f4/img/minesec_sheet.png">    </p:cNvPr>
+          <p:cNvPr id="5" name="Image 0" descr="/home/claude/f4/img/v2/boserup_big.png">    </p:cNvPr>
           <p:cNvPicPr>
             <a:picLocks noChangeAspect="1"/>
           </p:cNvPicPr>
@@ -16327,8 +17602,8 @@
         </p:blipFill>
         <p:spPr>
           <a:xfrm>
-            <a:off x="0" y="658368"/>
-            <a:ext cx="5120640" cy="5833872"/>
+            <a:off x="5349240" y="2617506"/>
+            <a:ext cx="6659575" cy="2601397"/>
           </a:xfrm>
           <a:prstGeom prst="rect">
             <a:avLst/>
@@ -16337,14 +17612,14 @@
       </p:pic>
       <p:sp>
         <p:nvSpPr>
-          <p:cNvPr id="4" name="Text 1"/>
+          <p:cNvPr id="6" name="Text 3"/>
           <p:cNvSpPr/>
           <p:nvPr/>
         </p:nvSpPr>
         <p:spPr>
           <a:xfrm>
-            <a:off x="5349240" y="1005840"/>
-            <a:ext cx="6522415" cy="731520"/>
+            <a:off x="5349240" y="6089904"/>
+            <a:ext cx="6659575" cy="347472"/>
           </a:xfrm>
           <a:prstGeom prst="rect">
             <a:avLst/>
@@ -16353,68 +17628,24 @@
           <a:ln/>
         </p:spPr>
         <p:txBody>
-          <a:bodyPr wrap="square" lIns="0" tIns="0" rIns="0" bIns="0" rtlCol="0" anchor="ctr">
-            <a:normAutofit/>
-          </a:bodyPr>
+          <a:bodyPr wrap="square" lIns="0" tIns="0" rIns="0" bIns="0" rtlCol="0" anchor="ctr"/>
           <a:lstStyle/>
           <a:p>
             <a:pPr algn="ctr" indent="0" marL="0">
               <a:buNone/>
             </a:pPr>
             <a:r>
-              <a:rPr lang="en-US" sz="3600" b="1" dirty="0">
-                <a:solidFill>
-                  <a:srgbClr val="990011"/>
+              <a:rPr lang="en-US" sz="1600" i="1" dirty="0">
+                <a:solidFill>
+                  <a:srgbClr val="555555"/>
                 </a:solidFill>
                 <a:latin typeface="Times New Roman" pitchFamily="34" charset="0"/>
                 <a:ea typeface="Times New Roman" pitchFamily="34" charset="-122"/>
                 <a:cs typeface="Times New Roman" pitchFamily="34" charset="-120"/>
               </a:rPr>
-              <a:t>Evaluation 2</a:t>
-            </a:r>
-            <a:endParaRPr lang="en-US" sz="3600" dirty="0"/>
-          </a:p>
-        </p:txBody>
-      </p:sp>
-      <p:sp>
-        <p:nvSpPr>
-          <p:cNvPr id="5" name="Text 2"/>
-          <p:cNvSpPr/>
-          <p:nvPr/>
-        </p:nvSpPr>
-        <p:spPr>
-          <a:xfrm>
-            <a:off x="5349240" y="1783080"/>
-            <a:ext cx="6522415" cy="4663440"/>
-          </a:xfrm>
-          <a:prstGeom prst="rect">
-            <a:avLst/>
-          </a:prstGeom>
-          <a:noFill/>
-          <a:ln/>
-        </p:spPr>
-        <p:txBody>
-          <a:bodyPr wrap="square" lIns="0" tIns="0" rIns="0" bIns="0" rtlCol="0" anchor="t"/>
-          <a:lstStyle/>
-          <a:p>
-            <a:pPr algn="l" indent="0" marL="0">
-              <a:spcAft>
-                <a:spcPts val="800"/>
-              </a:spcAft>
-              <a:buNone/>
-            </a:pPr>
-            <a:r>
-              <a:rPr lang="en-US" sz="4000" dirty="0">
-                <a:solidFill>
-                  <a:srgbClr val="111111"/>
-                </a:solidFill>
-                <a:latin typeface="Times New Roman" pitchFamily="34" charset="0"/>
-                <a:ea typeface="Times New Roman" pitchFamily="34" charset="-122"/>
-                <a:cs typeface="Times New Roman" pitchFamily="34" charset="-120"/>
-              </a:rPr>
-              <a:t>Give one weakness of Malthus's theory.</a:t>
-            </a:r>
-            <a:endParaRPr lang="en-US" sz="4000" dirty="0"/>
+              <a:t>Illustration: agricultural intensification</a:t>
+            </a:r>
+            <a:endParaRPr lang="en-US" sz="1600" dirty="0"/>
           </a:p>
         </p:txBody>
       </p:sp>
@@ -16524,7 +17755,7 @@
                 <a:ea typeface="Calibri" pitchFamily="34" charset="-122"/>
                 <a:cs typeface="Calibri" pitchFamily="34" charset="-120"/>
               </a:rPr>
-              <a:t>FORMATIVE EVALUATION</a:t>
+              <a:t>BOARD SUMMARY</a:t>
             </a:r>
             <a:endParaRPr lang="en-US" sz="1400" dirty="0"/>
           </a:p>
@@ -16589,7 +17820,7 @@
                 <a:ea typeface="Times New Roman" pitchFamily="34" charset="-122"/>
                 <a:cs typeface="Times New Roman" pitchFamily="34" charset="-120"/>
               </a:rPr>
-              <a:t>Expected Answer</a:t>
+              <a:t>2. Boserup's Theory (Optimistic View)</a:t>
             </a:r>
             <a:endParaRPr lang="en-US" sz="3600" dirty="0"/>
           </a:p>
@@ -16623,7 +17854,7 @@
               <a:buNone/>
             </a:pPr>
             <a:r>
-              <a:rPr lang="en-US" sz="4000" dirty="0">
+              <a:rPr lang="en-US" sz="4000" b="1" dirty="0">
                 <a:solidFill>
                   <a:srgbClr val="111111"/>
                 </a:solidFill>
@@ -16631,7 +17862,24 @@
                 <a:ea typeface="Times New Roman" pitchFamily="34" charset="-122"/>
                 <a:cs typeface="Times New Roman" pitchFamily="34" charset="-120"/>
               </a:rPr>
-              <a:t>He did not foresee technology and trade that increased food.</a:t>
+              <a:t>Main idea: </a:t>
+            </a:r>
+            <a:pPr algn="l" indent="0" marL="0">
+              <a:spcAft>
+                <a:spcPts val="800"/>
+              </a:spcAft>
+              <a:buNone/>
+            </a:pPr>
+            <a:r>
+              <a:rPr lang="en-US" sz="4000" dirty="0">
+                <a:solidFill>
+                  <a:srgbClr val="111111"/>
+                </a:solidFill>
+                <a:latin typeface="Times New Roman" pitchFamily="34" charset="0"/>
+                <a:ea typeface="Times New Roman" pitchFamily="34" charset="-122"/>
+                <a:cs typeface="Times New Roman" pitchFamily="34" charset="-120"/>
+              </a:rPr>
+              <a:t>Population pressure forces farmers to intensify: forest fallow gives way to bush fallow, short fallow, annual cropping and multi-cropping.</a:t>
             </a:r>
             <a:endParaRPr lang="en-US" sz="4000" dirty="0"/>
           </a:p>
@@ -16743,15 +17991,115 @@
                 <a:ea typeface="Calibri" pitchFamily="34" charset="-122"/>
                 <a:cs typeface="Calibri" pitchFamily="34" charset="-120"/>
               </a:rPr>
-              <a:t>REMEDIATION</a:t>
+              <a:t>BOARD SUMMARY</a:t>
             </a:r>
             <a:endParaRPr lang="en-US" sz="1400" dirty="0"/>
+          </a:p>
+        </p:txBody>
+      </p:sp>
+      <p:sp>
+        <p:nvSpPr>
+          <p:cNvPr id="3" name="Text 1"/>
+          <p:cNvSpPr/>
+          <p:nvPr/>
+        </p:nvSpPr>
+        <p:spPr>
+          <a:xfrm>
+            <a:off x="365760" y="1005840"/>
+            <a:ext cx="11460175" cy="731520"/>
+          </a:xfrm>
+          <a:prstGeom prst="rect">
+            <a:avLst/>
+          </a:prstGeom>
+          <a:noFill/>
+          <a:ln/>
+        </p:spPr>
+        <p:txBody>
+          <a:bodyPr wrap="square" lIns="0" tIns="0" rIns="0" bIns="0" rtlCol="0" anchor="ctr">
+            <a:normAutofit/>
+          </a:bodyPr>
+          <a:lstStyle/>
+          <a:p>
+            <a:pPr algn="ctr" indent="0" marL="0">
+              <a:buNone/>
+            </a:pPr>
+            <a:r>
+              <a:rPr lang="en-US" sz="3600" b="1" dirty="0">
+                <a:solidFill>
+                  <a:srgbClr val="990011"/>
+                </a:solidFill>
+                <a:latin typeface="Times New Roman" pitchFamily="34" charset="0"/>
+                <a:ea typeface="Times New Roman" pitchFamily="34" charset="-122"/>
+                <a:cs typeface="Times New Roman" pitchFamily="34" charset="-120"/>
+              </a:rPr>
+              <a:t>2. Boserup's Theory (Optimistic View)</a:t>
+            </a:r>
+            <a:endParaRPr lang="en-US" sz="3600" dirty="0"/>
+          </a:p>
+        </p:txBody>
+      </p:sp>
+      <p:sp>
+        <p:nvSpPr>
+          <p:cNvPr id="4" name="Text 2"/>
+          <p:cNvSpPr/>
+          <p:nvPr/>
+        </p:nvSpPr>
+        <p:spPr>
+          <a:xfrm>
+            <a:off x="365760" y="1783080"/>
+            <a:ext cx="4846320" cy="4617720"/>
+          </a:xfrm>
+          <a:prstGeom prst="rect">
+            <a:avLst/>
+          </a:prstGeom>
+          <a:noFill/>
+          <a:ln/>
+        </p:spPr>
+        <p:txBody>
+          <a:bodyPr wrap="square" lIns="0" tIns="0" rIns="0" bIns="0" rtlCol="0" anchor="t"/>
+          <a:lstStyle/>
+          <a:p>
+            <a:pPr algn="l" indent="0" marL="0">
+              <a:spcAft>
+                <a:spcPts val="800"/>
+              </a:spcAft>
+              <a:buNone/>
+            </a:pPr>
+            <a:r>
+              <a:rPr lang="en-US" sz="3600" b="1" dirty="0">
+                <a:solidFill>
+                  <a:srgbClr val="111111"/>
+                </a:solidFill>
+                <a:latin typeface="Times New Roman" pitchFamily="34" charset="0"/>
+                <a:ea typeface="Times New Roman" pitchFamily="34" charset="-122"/>
+                <a:cs typeface="Times New Roman" pitchFamily="34" charset="-120"/>
+              </a:rPr>
+              <a:t>Example: </a:t>
+            </a:r>
+            <a:pPr algn="l" indent="0" marL="0">
+              <a:spcAft>
+                <a:spcPts val="800"/>
+              </a:spcAft>
+              <a:buNone/>
+            </a:pPr>
+            <a:r>
+              <a:rPr lang="en-US" sz="3600" dirty="0">
+                <a:solidFill>
+                  <a:srgbClr val="111111"/>
+                </a:solidFill>
+                <a:latin typeface="Times New Roman" pitchFamily="34" charset="0"/>
+                <a:ea typeface="Times New Roman" pitchFamily="34" charset="-122"/>
+                <a:cs typeface="Times New Roman" pitchFamily="34" charset="-120"/>
+              </a:rPr>
+              <a:t>Irrigated rice around the Lagdo reservoir feeds a growing population in the North.</a:t>
+            </a:r>
+            <a:endParaRPr lang="en-US" sz="3600" dirty="0"/>
           </a:p>
         </p:txBody>
       </p:sp>
       <p:pic>
         <p:nvPicPr>
-          <p:cNvPr id="3" name="Image 0" descr="/home/claude/f4/img/minesec_sheet.png">    </p:cNvPr>
+          <p:cNvPr id="5" name="Image 0" descr="/home/claude/f4/img/v2/f2t_lagdo.jpg">    </p:cNvPr>
           <p:cNvPicPr>
             <a:picLocks noChangeAspect="1"/>
           </p:cNvPicPr>
@@ -16765,8 +18113,8 @@
         </p:blipFill>
         <p:spPr>
           <a:xfrm>
-            <a:off x="0" y="658368"/>
-            <a:ext cx="3840480" cy="5833872"/>
+            <a:off x="5349240" y="2071212"/>
+            <a:ext cx="6659575" cy="3693983"/>
           </a:xfrm>
           <a:prstGeom prst="rect">
             <a:avLst/>
@@ -16775,14 +18123,14 @@
       </p:pic>
       <p:sp>
         <p:nvSpPr>
-          <p:cNvPr id="4" name="Text 1"/>
+          <p:cNvPr id="6" name="Text 3"/>
           <p:cNvSpPr/>
           <p:nvPr/>
         </p:nvSpPr>
         <p:spPr>
           <a:xfrm>
-            <a:off x="4069080" y="1005840"/>
-            <a:ext cx="7802575" cy="731520"/>
+            <a:off x="5349240" y="6089904"/>
+            <a:ext cx="6659575" cy="347472"/>
           </a:xfrm>
           <a:prstGeom prst="rect">
             <a:avLst/>
@@ -16791,134 +18139,24 @@
           <a:ln/>
         </p:spPr>
         <p:txBody>
-          <a:bodyPr wrap="square" lIns="0" tIns="0" rIns="0" bIns="0" rtlCol="0" anchor="ctr">
-            <a:normAutofit/>
-          </a:bodyPr>
+          <a:bodyPr wrap="square" lIns="0" tIns="0" rIns="0" bIns="0" rtlCol="0" anchor="ctr"/>
           <a:lstStyle/>
           <a:p>
             <a:pPr algn="ctr" indent="0" marL="0">
               <a:buNone/>
             </a:pPr>
             <a:r>
-              <a:rPr lang="en-US" sz="3600" b="1" dirty="0">
-                <a:solidFill>
-                  <a:srgbClr val="990011"/>
+              <a:rPr lang="en-US" sz="1600" i="1" dirty="0">
+                <a:solidFill>
+                  <a:srgbClr val="555555"/>
                 </a:solidFill>
                 <a:latin typeface="Times New Roman" pitchFamily="34" charset="0"/>
                 <a:ea typeface="Times New Roman" pitchFamily="34" charset="-122"/>
                 <a:cs typeface="Times New Roman" pitchFamily="34" charset="-120"/>
               </a:rPr>
-              <a:t>Remediation</a:t>
-            </a:r>
-            <a:endParaRPr lang="en-US" sz="3600" dirty="0"/>
-          </a:p>
-        </p:txBody>
-      </p:sp>
-      <p:sp>
-        <p:nvSpPr>
-          <p:cNvPr id="5" name="Text 2"/>
-          <p:cNvSpPr/>
-          <p:nvPr/>
-        </p:nvSpPr>
-        <p:spPr>
-          <a:xfrm>
-            <a:off x="4069080" y="1783080"/>
-            <a:ext cx="7802575" cy="4663440"/>
-          </a:xfrm>
-          <a:prstGeom prst="rect">
-            <a:avLst/>
-          </a:prstGeom>
-          <a:noFill/>
-          <a:ln/>
-        </p:spPr>
-        <p:txBody>
-          <a:bodyPr wrap="square" lIns="0" tIns="0" rIns="0" bIns="0" rtlCol="0" anchor="t"/>
-          <a:lstStyle/>
-          <a:p>
-            <a:pPr algn="l" indent="0" marL="0">
-              <a:spcAft>
-                <a:spcPts val="800"/>
-              </a:spcAft>
-              <a:buNone/>
-            </a:pPr>
-            <a:r>
-              <a:rPr lang="en-US" sz="4000" b="1" dirty="0">
-                <a:solidFill>
-                  <a:srgbClr val="111111"/>
-                </a:solidFill>
-                <a:latin typeface="Times New Roman" pitchFamily="34" charset="0"/>
-                <a:ea typeface="Times New Roman" pitchFamily="34" charset="-122"/>
-                <a:cs typeface="Times New Roman" pitchFamily="34" charset="-120"/>
-              </a:rPr>
-              <a:t>Fill in the blanks:</a:t>
-            </a:r>
-            <a:endParaRPr lang="en-US" sz="4000" dirty="0"/>
-          </a:p>
-          <a:p>
-            <a:pPr algn="l" marL="342900" indent="-342900">
-              <a:spcAft>
-                <a:spcPts val="800"/>
-              </a:spcAft>
-              <a:buSzPct val="100000"/>
-              <a:buFont typeface="+mj-lt"/>
-              <a:buAutoNum type="arabicPeriod" startAt="1"/>
-            </a:pPr>
-            <a:r>
-              <a:rPr lang="en-US" sz="4000" dirty="0">
-                <a:solidFill>
-                  <a:srgbClr val="111111"/>
-                </a:solidFill>
-                <a:latin typeface="Times New Roman" pitchFamily="34" charset="0"/>
-                <a:ea typeface="Times New Roman" pitchFamily="34" charset="-122"/>
-                <a:cs typeface="Times New Roman" pitchFamily="34" charset="-120"/>
-              </a:rPr>
-              <a:t>Malthus said food grows ______.</a:t>
-            </a:r>
-            <a:endParaRPr lang="en-US" sz="4000" dirty="0"/>
-          </a:p>
-          <a:p>
-            <a:pPr algn="l" marL="342900" indent="-342900">
-              <a:spcAft>
-                <a:spcPts val="800"/>
-              </a:spcAft>
-              <a:buSzPct val="100000"/>
-              <a:buFont typeface="+mj-lt"/>
-              <a:buAutoNum type="arabicPeriod" startAt="1"/>
-            </a:pPr>
-            <a:r>
-              <a:rPr lang="en-US" sz="4000" dirty="0">
-                <a:solidFill>
-                  <a:srgbClr val="111111"/>
-                </a:solidFill>
-                <a:latin typeface="Times New Roman" pitchFamily="34" charset="0"/>
-                <a:ea typeface="Times New Roman" pitchFamily="34" charset="-122"/>
-                <a:cs typeface="Times New Roman" pitchFamily="34" charset="-120"/>
-              </a:rPr>
-              <a:t>Famine and war are Malthus's ______ checks.</a:t>
-            </a:r>
-            <a:endParaRPr lang="en-US" sz="4000" dirty="0"/>
-          </a:p>
-          <a:p>
-            <a:pPr algn="l" marL="342900" indent="-342900">
-              <a:spcAft>
-                <a:spcPts val="800"/>
-              </a:spcAft>
-              <a:buSzPct val="100000"/>
-              <a:buFont typeface="+mj-lt"/>
-              <a:buAutoNum type="arabicPeriod" startAt="1"/>
-            </a:pPr>
-            <a:r>
-              <a:rPr lang="en-US" sz="4000" dirty="0">
-                <a:solidFill>
-                  <a:srgbClr val="111111"/>
-                </a:solidFill>
-                <a:latin typeface="Times New Roman" pitchFamily="34" charset="0"/>
-                <a:ea typeface="Times New Roman" pitchFamily="34" charset="-122"/>
-                <a:cs typeface="Times New Roman" pitchFamily="34" charset="-120"/>
-              </a:rPr>
-              <a:t>Boserup said pressure leads to ______.</a:t>
-            </a:r>
-            <a:endParaRPr lang="en-US" sz="4000" dirty="0"/>
+              <a:t>Illustration: the Lagdo dam</a:t>
+            </a:r>
+            <a:endParaRPr lang="en-US" sz="1600" dirty="0"/>
           </a:p>
         </p:txBody>
       </p:sp>
@@ -17028,7 +18266,7 @@
                 <a:ea typeface="Calibri" pitchFamily="34" charset="-122"/>
                 <a:cs typeface="Calibri" pitchFamily="34" charset="-120"/>
               </a:rPr>
-              <a:t>HOMEWORK</a:t>
+              <a:t>BOARD SUMMARY</a:t>
             </a:r>
             <a:endParaRPr lang="en-US" sz="1400" dirty="0"/>
           </a:p>
@@ -17093,7 +18331,7 @@
                 <a:ea typeface="Times New Roman" pitchFamily="34" charset="-122"/>
                 <a:cs typeface="Times New Roman" pitchFamily="34" charset="-120"/>
               </a:rPr>
-              <a:t>Homework</a:t>
+              <a:t>2. Boserup's Theory (Optimistic View)</a:t>
             </a:r>
             <a:endParaRPr lang="en-US" sz="3600" dirty="0"/>
           </a:p>
@@ -17127,7 +18365,7 @@
               <a:buNone/>
             </a:pPr>
             <a:r>
-              <a:rPr lang="en-US" sz="4000" dirty="0">
+              <a:rPr lang="en-US" sz="4000" b="1" dirty="0">
                 <a:solidFill>
                   <a:srgbClr val="111111"/>
                 </a:solidFill>
@@ -17135,7 +18373,49 @@
                 <a:ea typeface="Times New Roman" pitchFamily="34" charset="-122"/>
                 <a:cs typeface="Times New Roman" pitchFamily="34" charset="-120"/>
               </a:rPr>
-              <a:t>Write a debate: "Population growth is a problem for Cameroon." Give two arguments for and two against.</a:t>
+              <a:t>Strengths:</a:t>
+            </a:r>
+            <a:endParaRPr lang="en-US" sz="4000" dirty="0"/>
+          </a:p>
+          <a:p>
+            <a:pPr algn="l" marL="342900" indent="-342900">
+              <a:spcAft>
+                <a:spcPts val="800"/>
+              </a:spcAft>
+              <a:buSzPct val="100000"/>
+              <a:buChar char="•"/>
+            </a:pPr>
+            <a:r>
+              <a:rPr lang="en-US" sz="4000" dirty="0">
+                <a:solidFill>
+                  <a:srgbClr val="111111"/>
+                </a:solidFill>
+                <a:latin typeface="Times New Roman" pitchFamily="34" charset="0"/>
+                <a:ea typeface="Times New Roman" pitchFamily="34" charset="-122"/>
+                <a:cs typeface="Times New Roman" pitchFamily="34" charset="-120"/>
+              </a:rPr>
+              <a:t>It shows the power of human innovation.</a:t>
+            </a:r>
+            <a:endParaRPr lang="en-US" sz="4000" dirty="0"/>
+          </a:p>
+          <a:p>
+            <a:pPr algn="l" marL="342900" indent="-342900">
+              <a:spcAft>
+                <a:spcPts val="800"/>
+              </a:spcAft>
+              <a:buSzPct val="100000"/>
+              <a:buChar char="•"/>
+            </a:pPr>
+            <a:r>
+              <a:rPr lang="en-US" sz="4000" dirty="0">
+                <a:solidFill>
+                  <a:srgbClr val="111111"/>
+                </a:solidFill>
+                <a:latin typeface="Times New Roman" pitchFamily="34" charset="0"/>
+                <a:ea typeface="Times New Roman" pitchFamily="34" charset="-122"/>
+                <a:cs typeface="Times New Roman" pitchFamily="34" charset="-120"/>
+              </a:rPr>
+              <a:t>It fits countries where farming has progressed with population growth.</a:t>
             </a:r>
             <a:endParaRPr lang="en-US" sz="4000" dirty="0"/>
           </a:p>
@@ -17247,7 +18527,7 @@
                 <a:ea typeface="Calibri" pitchFamily="34" charset="-122"/>
                 <a:cs typeface="Calibri" pitchFamily="34" charset="-120"/>
               </a:rPr>
-              <a:t>NEXT LESSON</a:t>
+              <a:t>BOARD SUMMARY</a:t>
             </a:r>
             <a:endParaRPr lang="en-US" sz="1400" dirty="0"/>
           </a:p>
@@ -17312,7 +18592,7 @@
                 <a:ea typeface="Times New Roman" pitchFamily="34" charset="-122"/>
                 <a:cs typeface="Times New Roman" pitchFamily="34" charset="-120"/>
               </a:rPr>
-              <a:t>Next Lesson</a:t>
+              <a:t>2. Boserup's Theory (Optimistic View) (continued)</a:t>
             </a:r>
             <a:endParaRPr lang="en-US" sz="3600" dirty="0"/>
           </a:p>
@@ -17336,10 +18616,10 @@
           <a:ln/>
         </p:spPr>
         <p:txBody>
-          <a:bodyPr wrap="square" lIns="0" tIns="0" rIns="0" bIns="0" rtlCol="0" anchor="ctr"/>
-          <a:lstStyle/>
-          <a:p>
-            <a:pPr algn="ctr" indent="0" marL="0">
+          <a:bodyPr wrap="square" lIns="0" tIns="0" rIns="0" bIns="0" rtlCol="0" anchor="t"/>
+          <a:lstStyle/>
+          <a:p>
+            <a:pPr algn="l" indent="0" marL="0">
               <a:spcAft>
                 <a:spcPts val="800"/>
               </a:spcAft>
@@ -17354,27 +18634,49 @@
                 <a:ea typeface="Times New Roman" pitchFamily="34" charset="-122"/>
                 <a:cs typeface="Times New Roman" pitchFamily="34" charset="-120"/>
               </a:rPr>
-              <a:t>Our next lesson will be on:</a:t>
+              <a:t>Weaknesses:</a:t>
             </a:r>
             <a:endParaRPr lang="en-US" sz="4000" dirty="0"/>
           </a:p>
           <a:p>
-            <a:pPr algn="ctr" indent="0" marL="0">
+            <a:pPr algn="l" marL="342900" indent="-342900">
               <a:spcAft>
                 <a:spcPts val="800"/>
               </a:spcAft>
-              <a:buNone/>
-            </a:pPr>
-            <a:r>
-              <a:rPr lang="en-US" sz="4000" b="1" dirty="0">
-                <a:solidFill>
-                  <a:srgbClr val="990011"/>
+              <a:buSzPct val="100000"/>
+              <a:buChar char="•"/>
+            </a:pPr>
+            <a:r>
+              <a:rPr lang="en-US" sz="4000" dirty="0">
+                <a:solidFill>
+                  <a:srgbClr val="111111"/>
                 </a:solidFill>
                 <a:latin typeface="Times New Roman" pitchFamily="34" charset="0"/>
                 <a:ea typeface="Times New Roman" pitchFamily="34" charset="-122"/>
                 <a:cs typeface="Times New Roman" pitchFamily="34" charset="-120"/>
               </a:rPr>
-              <a:t>Further Study 1: Population Change in Cameroon</a:t>
+              <a:t>It is too optimistic: innovation does not always come in time.</a:t>
+            </a:r>
+            <a:endParaRPr lang="en-US" sz="4000" dirty="0"/>
+          </a:p>
+          <a:p>
+            <a:pPr algn="l" marL="342900" indent="-342900">
+              <a:spcAft>
+                <a:spcPts val="800"/>
+              </a:spcAft>
+              <a:buSzPct val="100000"/>
+              <a:buChar char="•"/>
+            </a:pPr>
+            <a:r>
+              <a:rPr lang="en-US" sz="4000" dirty="0">
+                <a:solidFill>
+                  <a:srgbClr val="111111"/>
+                </a:solidFill>
+                <a:latin typeface="Times New Roman" pitchFamily="34" charset="0"/>
+                <a:ea typeface="Times New Roman" pitchFamily="34" charset="-122"/>
+                <a:cs typeface="Times New Roman" pitchFamily="34" charset="-120"/>
+              </a:rPr>
+              <a:t>Intensification can cause soil erosion and deforestation.</a:t>
             </a:r>
             <a:endParaRPr lang="en-US" sz="4000" dirty="0"/>
           </a:p>
@@ -17509,7 +18811,7 @@
         <p:spPr>
           <a:xfrm>
             <a:off x="0" y="658368"/>
-            <a:ext cx="3840480" cy="5833872"/>
+            <a:ext cx="5120640" cy="5833872"/>
           </a:xfrm>
           <a:prstGeom prst="rect">
             <a:avLst/>
@@ -17524,8 +18826,8 @@
         </p:nvSpPr>
         <p:spPr>
           <a:xfrm>
-            <a:off x="4069080" y="1005840"/>
-            <a:ext cx="7802575" cy="731520"/>
+            <a:off x="5349240" y="1005840"/>
+            <a:ext cx="6522415" cy="731520"/>
           </a:xfrm>
           <a:prstGeom prst="rect">
             <a:avLst/>
@@ -17565,8 +18867,8 @@
         </p:nvSpPr>
         <p:spPr>
           <a:xfrm>
-            <a:off x="4069080" y="1783080"/>
-            <a:ext cx="7802575" cy="4663440"/>
+            <a:off x="5349240" y="1783080"/>
+            <a:ext cx="6522415" cy="4663440"/>
           </a:xfrm>
           <a:prstGeom prst="rect">
             <a:avLst/>
@@ -17593,7 +18895,7 @@
                 <a:ea typeface="Times New Roman" pitchFamily="34" charset="-122"/>
                 <a:cs typeface="Times New Roman" pitchFamily="34" charset="-120"/>
               </a:rPr>
-              <a:t>Cameroon as a whole is closer to underpopulation (rich resources, 59 people/km²), but some areas such as the Mandara Mountains and the Western Highlands show signs of overpopulation (land shortage, erosion, migration).</a:t>
+              <a:t>Thomas Malthus published "An Essay on the Principle of Population" in 1798.</a:t>
             </a:r>
             <a:endParaRPr lang="en-US" sz="4000" dirty="0"/>
           </a:p>
@@ -17705,22 +19007,46 @@
                 <a:ea typeface="Calibri" pitchFamily="34" charset="-122"/>
                 <a:cs typeface="Calibri" pitchFamily="34" charset="-120"/>
               </a:rPr>
-              <a:t>BILINGUAL GAME</a:t>
+              <a:t>BOARD SUMMARY</a:t>
             </a:r>
             <a:endParaRPr lang="en-US" sz="1400" dirty="0"/>
           </a:p>
         </p:txBody>
       </p:sp>
-      <p:sp>
-        <p:nvSpPr>
-          <p:cNvPr id="3" name="Text 1"/>
+      <p:pic>
+        <p:nvPicPr>
+          <p:cNvPr id="3" name="Image 0" descr="/home/claude/f4/img/minesec_sheet.png">    </p:cNvPr>
+          <p:cNvPicPr>
+            <a:picLocks noChangeAspect="1"/>
+          </p:cNvPicPr>
+          <p:nvPr/>
+        </p:nvPicPr>
+        <p:blipFill>
+          <a:blip r:embed="rId1"/>
+          <a:stretch>
+            <a:fillRect/>
+          </a:stretch>
+        </p:blipFill>
+        <p:spPr>
+          <a:xfrm>
+            <a:off x="0" y="658368"/>
+            <a:ext cx="5120640" cy="5833872"/>
+          </a:xfrm>
+          <a:prstGeom prst="rect">
+            <a:avLst/>
+          </a:prstGeom>
+        </p:spPr>
+      </p:pic>
+      <p:sp>
+        <p:nvSpPr>
+          <p:cNvPr id="4" name="Text 1"/>
           <p:cNvSpPr/>
           <p:nvPr/>
         </p:nvSpPr>
         <p:spPr>
           <a:xfrm>
-            <a:off x="457200" y="1005840"/>
-            <a:ext cx="11277295" cy="731520"/>
+            <a:off x="5349240" y="1005840"/>
+            <a:ext cx="6522415" cy="731520"/>
           </a:xfrm>
           <a:prstGeom prst="rect">
             <a:avLst/>
@@ -17729,7 +19055,9 @@
           <a:ln/>
         </p:spPr>
         <p:txBody>
-          <a:bodyPr wrap="square" lIns="0" tIns="0" rIns="0" bIns="0" rtlCol="0" anchor="ctr"/>
+          <a:bodyPr wrap="square" lIns="0" tIns="0" rIns="0" bIns="0" rtlCol="0" anchor="ctr">
+            <a:normAutofit/>
+          </a:bodyPr>
           <a:lstStyle/>
           <a:p>
             <a:pPr algn="ctr" indent="0" marL="0">
@@ -17744,6 +19072,2991 @@
                 <a:ea typeface="Times New Roman" pitchFamily="34" charset="-122"/>
                 <a:cs typeface="Times New Roman" pitchFamily="34" charset="-120"/>
               </a:rPr>
+              <a:t>2. Boserup's Theory (Optimistic View) (continued)</a:t>
+            </a:r>
+            <a:endParaRPr lang="en-US" sz="3600" dirty="0"/>
+          </a:p>
+        </p:txBody>
+      </p:sp>
+      <p:sp>
+        <p:nvSpPr>
+          <p:cNvPr id="5" name="Text 2"/>
+          <p:cNvSpPr/>
+          <p:nvPr/>
+        </p:nvSpPr>
+        <p:spPr>
+          <a:xfrm>
+            <a:off x="5349240" y="1783080"/>
+            <a:ext cx="6522415" cy="4663440"/>
+          </a:xfrm>
+          <a:prstGeom prst="rect">
+            <a:avLst/>
+          </a:prstGeom>
+          <a:noFill/>
+          <a:ln/>
+        </p:spPr>
+        <p:txBody>
+          <a:bodyPr wrap="square" lIns="0" tIns="0" rIns="0" bIns="0" rtlCol="0" anchor="t"/>
+          <a:lstStyle/>
+          <a:p>
+            <a:pPr algn="l" marL="342900" indent="-342900">
+              <a:spcAft>
+                <a:spcPts val="800"/>
+              </a:spcAft>
+              <a:buSzPct val="100000"/>
+              <a:buChar char="•"/>
+            </a:pPr>
+            <a:r>
+              <a:rPr lang="en-US" sz="4000" dirty="0">
+                <a:solidFill>
+                  <a:srgbClr val="111111"/>
+                </a:solidFill>
+                <a:latin typeface="Times New Roman" pitchFamily="34" charset="0"/>
+                <a:ea typeface="Times New Roman" pitchFamily="34" charset="-122"/>
+                <a:cs typeface="Times New Roman" pitchFamily="34" charset="-120"/>
+              </a:rPr>
+              <a:t>It fails where there is war or no investment.</a:t>
+            </a:r>
+            <a:endParaRPr lang="en-US" sz="4000" dirty="0"/>
+          </a:p>
+        </p:txBody>
+      </p:sp>
+      <p:sp>
+        <p:nvSpPr>
+          <p:cNvPr id="25" name="Slide Number Placeholder 0"/>
+          <p:cNvSpPr>
+            <a:spLocks noGrp="1"/>
+          </p:cNvSpPr>
+          <p:nvPr>
+            <p:ph type="sldNum" sz="quarter" idx="4294967295"/>
+          </p:nvPr>
+        </p:nvSpPr>
+        <p:spPr>
+          <a:xfrm>
+            <a:off x="27432" y="91440"/>
+            <a:ext cx="585216" cy="475488"/>
+          </a:xfrm>
+          <a:prstGeom prst="rect">
+            <a:avLst/>
+          </a:prstGeom>
+          <a:extLst>
+            <a:ext uri="{C572A759-6A51-4108-AA02-DFA0A04FC94B}">
+              <ma14:wrappingTextBoxFlag xmlns:ma14="http://schemas.microsoft.com/office/mac/drawingml/2011/main" val="0"/>
+            </a:ext>
+          </a:extLst>
+        </p:spPr>
+        <p:txBody>
+          <a:bodyPr/>
+          <a:lstStyle>
+            <a:lvl1pPr>
+              <a:defRPr sz="2000">
+                <a:solidFill>
+                  <a:srgbClr val="FFFFFF"/>
+                </a:solidFill>
+                <a:latin typeface="Calibri"/>
+                <a:ea typeface="Calibri"/>
+                <a:cs typeface="Calibri"/>
+              </a:defRPr>
+            </a:lvl1pPr>
+          </a:lstStyle>
+          <a:p>
+            <a:pPr algn="ctr"/>
+            <a:fld id="{F7021451-1387-4CA6-816F-3879F97B5CBC}" type="slidenum">
+              <a:rPr b="1" lang="en-US"/>
+              <a:t>50</a:t>
+            </a:fld>
+            <a:endParaRPr lang="en-US"/>
+          </a:p>
+        </p:txBody>
+      </p:sp>
+    </p:spTree>
+  </p:cSld>
+  <p:clrMapOvr>
+    <a:masterClrMapping/>
+  </p:clrMapOvr>
+</p:sld>
+</file>
+
+<file path=ppt/slides/slide51.xml><?xml version="1.0" encoding="utf-8"?>
+<p:sld xmlns:a="http://schemas.openxmlformats.org/drawingml/2006/main" xmlns:r="http://schemas.openxmlformats.org/officeDocument/2006/relationships" xmlns:p="http://schemas.openxmlformats.org/presentationml/2006/main">
+  <p:cSld name="Slide 51">
+    <p:spTree>
+      <p:nvGrpSpPr>
+        <p:cNvPr id="1" name=""/>
+        <p:cNvGrpSpPr/>
+        <p:nvPr/>
+      </p:nvGrpSpPr>
+      <p:grpSpPr>
+        <a:xfrm>
+          <a:off x="0" y="0"/>
+          <a:ext cx="0" cy="0"/>
+          <a:chOff x="0" y="0"/>
+          <a:chExt cx="0" cy="0"/>
+        </a:xfrm>
+      </p:grpSpPr>
+      <p:sp>
+        <p:nvSpPr>
+          <p:cNvPr id="2" name="Text 0"/>
+          <p:cNvSpPr/>
+          <p:nvPr/>
+        </p:nvSpPr>
+        <p:spPr>
+          <a:xfrm>
+            <a:off x="457200" y="713232"/>
+            <a:ext cx="11368735" cy="274320"/>
+          </a:xfrm>
+          <a:prstGeom prst="rect">
+            <a:avLst/>
+          </a:prstGeom>
+          <a:noFill/>
+          <a:ln/>
+        </p:spPr>
+        <p:txBody>
+          <a:bodyPr wrap="square" lIns="0" tIns="0" rIns="0" bIns="0" rtlCol="0" anchor="ctr"/>
+          <a:lstStyle/>
+          <a:p>
+            <a:pPr algn="r" indent="0" marL="0">
+              <a:buNone/>
+            </a:pPr>
+            <a:r>
+              <a:rPr lang="en-US" sz="1400" b="1" dirty="0">
+                <a:solidFill>
+                  <a:srgbClr val="1C3F6E"/>
+                </a:solidFill>
+                <a:latin typeface="Calibri" pitchFamily="34" charset="0"/>
+                <a:ea typeface="Calibri" pitchFamily="34" charset="-122"/>
+                <a:cs typeface="Calibri" pitchFamily="34" charset="-120"/>
+              </a:rPr>
+              <a:t>BOARD SUMMARY</a:t>
+            </a:r>
+            <a:endParaRPr lang="en-US" sz="1400" dirty="0"/>
+          </a:p>
+        </p:txBody>
+      </p:sp>
+      <p:sp>
+        <p:nvSpPr>
+          <p:cNvPr id="3" name="Text 1"/>
+          <p:cNvSpPr/>
+          <p:nvPr/>
+        </p:nvSpPr>
+        <p:spPr>
+          <a:xfrm>
+            <a:off x="365760" y="1005840"/>
+            <a:ext cx="11460175" cy="731520"/>
+          </a:xfrm>
+          <a:prstGeom prst="rect">
+            <a:avLst/>
+          </a:prstGeom>
+          <a:noFill/>
+          <a:ln/>
+        </p:spPr>
+        <p:txBody>
+          <a:bodyPr wrap="square" lIns="0" tIns="0" rIns="0" bIns="0" rtlCol="0" anchor="ctr">
+            <a:normAutofit/>
+          </a:bodyPr>
+          <a:lstStyle/>
+          <a:p>
+            <a:pPr algn="ctr" indent="0" marL="0">
+              <a:buNone/>
+            </a:pPr>
+            <a:r>
+              <a:rPr lang="en-US" sz="3600" b="1" dirty="0">
+                <a:solidFill>
+                  <a:srgbClr val="990011"/>
+                </a:solidFill>
+                <a:latin typeface="Times New Roman" pitchFamily="34" charset="0"/>
+                <a:ea typeface="Times New Roman" pitchFamily="34" charset="-122"/>
+                <a:cs typeface="Times New Roman" pitchFamily="34" charset="-120"/>
+              </a:rPr>
+              <a:t>3. Comparison and Application Today</a:t>
+            </a:r>
+            <a:endParaRPr lang="en-US" sz="3600" dirty="0"/>
+          </a:p>
+        </p:txBody>
+      </p:sp>
+      <p:sp>
+        <p:nvSpPr>
+          <p:cNvPr id="4" name="Text 2"/>
+          <p:cNvSpPr/>
+          <p:nvPr/>
+        </p:nvSpPr>
+        <p:spPr>
+          <a:xfrm>
+            <a:off x="365760" y="1783080"/>
+            <a:ext cx="4846320" cy="4617720"/>
+          </a:xfrm>
+          <a:prstGeom prst="rect">
+            <a:avLst/>
+          </a:prstGeom>
+          <a:noFill/>
+          <a:ln/>
+        </p:spPr>
+        <p:txBody>
+          <a:bodyPr wrap="square" lIns="0" tIns="0" rIns="0" bIns="0" rtlCol="0" anchor="t"/>
+          <a:lstStyle/>
+          <a:p>
+            <a:pPr algn="l" indent="0" marL="0">
+              <a:spcAft>
+                <a:spcPts val="800"/>
+              </a:spcAft>
+              <a:buNone/>
+            </a:pPr>
+            <a:r>
+              <a:rPr lang="en-US" sz="3600" i="1" dirty="0">
+                <a:solidFill>
+                  <a:srgbClr val="111111"/>
+                </a:solidFill>
+                <a:latin typeface="Times New Roman" pitchFamily="34" charset="0"/>
+                <a:ea typeface="Times New Roman" pitchFamily="34" charset="-122"/>
+                <a:cs typeface="Times New Roman" pitchFamily="34" charset="-120"/>
+              </a:rPr>
+              <a:t>The two theories compare and apply as follows:</a:t>
+            </a:r>
+            <a:endParaRPr lang="en-US" sz="3600" dirty="0"/>
+          </a:p>
+          <a:p>
+            <a:pPr algn="l" indent="0" marL="0">
+              <a:spcAft>
+                <a:spcPts val="800"/>
+              </a:spcAft>
+              <a:buNone/>
+            </a:pPr>
+            <a:r>
+              <a:rPr lang="en-US" sz="3600" b="1" dirty="0">
+                <a:solidFill>
+                  <a:srgbClr val="111111"/>
+                </a:solidFill>
+                <a:latin typeface="Times New Roman" pitchFamily="34" charset="0"/>
+                <a:ea typeface="Times New Roman" pitchFamily="34" charset="-122"/>
+                <a:cs typeface="Times New Roman" pitchFamily="34" charset="-120"/>
+              </a:rPr>
+              <a:t>Population growth: </a:t>
+            </a:r>
+            <a:pPr algn="l" indent="0" marL="0">
+              <a:spcAft>
+                <a:spcPts val="800"/>
+              </a:spcAft>
+              <a:buNone/>
+            </a:pPr>
+            <a:r>
+              <a:rPr lang="en-US" sz="3600" dirty="0">
+                <a:solidFill>
+                  <a:srgbClr val="111111"/>
+                </a:solidFill>
+                <a:latin typeface="Times New Roman" pitchFamily="34" charset="0"/>
+                <a:ea typeface="Times New Roman" pitchFamily="34" charset="-122"/>
+                <a:cs typeface="Times New Roman" pitchFamily="34" charset="-120"/>
+              </a:rPr>
+              <a:t>Malthus sees it as a threat, Boserup as a stimulus.</a:t>
+            </a:r>
+            <a:endParaRPr lang="en-US" sz="3600" dirty="0"/>
+          </a:p>
+        </p:txBody>
+      </p:sp>
+      <p:pic>
+        <p:nvPicPr>
+          <p:cNvPr id="5" name="Image 0" descr="/home/claude/f4/img/v2/pop2_malthus_boserup.png">    </p:cNvPr>
+          <p:cNvPicPr>
+            <a:picLocks noChangeAspect="1"/>
+          </p:cNvPicPr>
+          <p:nvPr/>
+        </p:nvPicPr>
+        <p:blipFill>
+          <a:blip r:embed="rId1"/>
+          <a:stretch>
+            <a:fillRect/>
+          </a:stretch>
+        </p:blipFill>
+        <p:spPr>
+          <a:xfrm>
+            <a:off x="5349240" y="2617506"/>
+            <a:ext cx="6659575" cy="2601397"/>
+          </a:xfrm>
+          <a:prstGeom prst="rect">
+            <a:avLst/>
+          </a:prstGeom>
+        </p:spPr>
+      </p:pic>
+      <p:sp>
+        <p:nvSpPr>
+          <p:cNvPr id="6" name="Text 3"/>
+          <p:cNvSpPr/>
+          <p:nvPr/>
+        </p:nvSpPr>
+        <p:spPr>
+          <a:xfrm>
+            <a:off x="5349240" y="6089904"/>
+            <a:ext cx="6659575" cy="347472"/>
+          </a:xfrm>
+          <a:prstGeom prst="rect">
+            <a:avLst/>
+          </a:prstGeom>
+          <a:noFill/>
+          <a:ln/>
+        </p:spPr>
+        <p:txBody>
+          <a:bodyPr wrap="square" lIns="0" tIns="0" rIns="0" bIns="0" rtlCol="0" anchor="ctr"/>
+          <a:lstStyle/>
+          <a:p>
+            <a:pPr algn="ctr" indent="0" marL="0">
+              <a:buNone/>
+            </a:pPr>
+            <a:r>
+              <a:rPr lang="en-US" sz="1600" i="1" dirty="0">
+                <a:solidFill>
+                  <a:srgbClr val="555555"/>
+                </a:solidFill>
+                <a:latin typeface="Times New Roman" pitchFamily="34" charset="0"/>
+                <a:ea typeface="Times New Roman" pitchFamily="34" charset="-122"/>
+                <a:cs typeface="Times New Roman" pitchFamily="34" charset="-120"/>
+              </a:rPr>
+              <a:t>Illustration: Malthus and Boserup compared</a:t>
+            </a:r>
+            <a:endParaRPr lang="en-US" sz="1600" dirty="0"/>
+          </a:p>
+        </p:txBody>
+      </p:sp>
+      <p:sp>
+        <p:nvSpPr>
+          <p:cNvPr id="25" name="Slide Number Placeholder 0"/>
+          <p:cNvSpPr>
+            <a:spLocks noGrp="1"/>
+          </p:cNvSpPr>
+          <p:nvPr>
+            <p:ph type="sldNum" sz="quarter" idx="4294967295"/>
+          </p:nvPr>
+        </p:nvSpPr>
+        <p:spPr>
+          <a:xfrm>
+            <a:off x="27432" y="91440"/>
+            <a:ext cx="585216" cy="475488"/>
+          </a:xfrm>
+          <a:prstGeom prst="rect">
+            <a:avLst/>
+          </a:prstGeom>
+          <a:extLst>
+            <a:ext uri="{C572A759-6A51-4108-AA02-DFA0A04FC94B}">
+              <ma14:wrappingTextBoxFlag xmlns:ma14="http://schemas.microsoft.com/office/mac/drawingml/2011/main" val="0"/>
+            </a:ext>
+          </a:extLst>
+        </p:spPr>
+        <p:txBody>
+          <a:bodyPr/>
+          <a:lstStyle>
+            <a:lvl1pPr>
+              <a:defRPr sz="2000">
+                <a:solidFill>
+                  <a:srgbClr val="FFFFFF"/>
+                </a:solidFill>
+                <a:latin typeface="Calibri"/>
+                <a:ea typeface="Calibri"/>
+                <a:cs typeface="Calibri"/>
+              </a:defRPr>
+            </a:lvl1pPr>
+          </a:lstStyle>
+          <a:p>
+            <a:pPr algn="ctr"/>
+            <a:fld id="{F7021451-1387-4CA6-816F-3879F97B5CBC}" type="slidenum">
+              <a:rPr b="1" lang="en-US"/>
+              <a:t>51</a:t>
+            </a:fld>
+            <a:endParaRPr lang="en-US"/>
+          </a:p>
+        </p:txBody>
+      </p:sp>
+    </p:spTree>
+  </p:cSld>
+  <p:clrMapOvr>
+    <a:masterClrMapping/>
+  </p:clrMapOvr>
+</p:sld>
+</file>
+
+<file path=ppt/slides/slide52.xml><?xml version="1.0" encoding="utf-8"?>
+<p:sld xmlns:a="http://schemas.openxmlformats.org/drawingml/2006/main" xmlns:r="http://schemas.openxmlformats.org/officeDocument/2006/relationships" xmlns:p="http://schemas.openxmlformats.org/presentationml/2006/main">
+  <p:cSld name="Slide 52">
+    <p:spTree>
+      <p:nvGrpSpPr>
+        <p:cNvPr id="1" name=""/>
+        <p:cNvGrpSpPr/>
+        <p:nvPr/>
+      </p:nvGrpSpPr>
+      <p:grpSpPr>
+        <a:xfrm>
+          <a:off x="0" y="0"/>
+          <a:ext cx="0" cy="0"/>
+          <a:chOff x="0" y="0"/>
+          <a:chExt cx="0" cy="0"/>
+        </a:xfrm>
+      </p:grpSpPr>
+      <p:sp>
+        <p:nvSpPr>
+          <p:cNvPr id="2" name="Text 0"/>
+          <p:cNvSpPr/>
+          <p:nvPr/>
+        </p:nvSpPr>
+        <p:spPr>
+          <a:xfrm>
+            <a:off x="457200" y="713232"/>
+            <a:ext cx="11368735" cy="274320"/>
+          </a:xfrm>
+          <a:prstGeom prst="rect">
+            <a:avLst/>
+          </a:prstGeom>
+          <a:noFill/>
+          <a:ln/>
+        </p:spPr>
+        <p:txBody>
+          <a:bodyPr wrap="square" lIns="0" tIns="0" rIns="0" bIns="0" rtlCol="0" anchor="ctr"/>
+          <a:lstStyle/>
+          <a:p>
+            <a:pPr algn="r" indent="0" marL="0">
+              <a:buNone/>
+            </a:pPr>
+            <a:r>
+              <a:rPr lang="en-US" sz="1400" b="1" dirty="0">
+                <a:solidFill>
+                  <a:srgbClr val="1C3F6E"/>
+                </a:solidFill>
+                <a:latin typeface="Calibri" pitchFamily="34" charset="0"/>
+                <a:ea typeface="Calibri" pitchFamily="34" charset="-122"/>
+                <a:cs typeface="Calibri" pitchFamily="34" charset="-120"/>
+              </a:rPr>
+              <a:t>BOARD SUMMARY</a:t>
+            </a:r>
+            <a:endParaRPr lang="en-US" sz="1400" dirty="0"/>
+          </a:p>
+        </p:txBody>
+      </p:sp>
+      <p:pic>
+        <p:nvPicPr>
+          <p:cNvPr id="3" name="Image 0" descr="/home/claude/f4/img/minesec_sheet.png">    </p:cNvPr>
+          <p:cNvPicPr>
+            <a:picLocks noChangeAspect="1"/>
+          </p:cNvPicPr>
+          <p:nvPr/>
+        </p:nvPicPr>
+        <p:blipFill>
+          <a:blip r:embed="rId1"/>
+          <a:stretch>
+            <a:fillRect/>
+          </a:stretch>
+        </p:blipFill>
+        <p:spPr>
+          <a:xfrm>
+            <a:off x="0" y="658368"/>
+            <a:ext cx="2468880" cy="5833872"/>
+          </a:xfrm>
+          <a:prstGeom prst="rect">
+            <a:avLst/>
+          </a:prstGeom>
+        </p:spPr>
+      </p:pic>
+      <p:sp>
+        <p:nvSpPr>
+          <p:cNvPr id="4" name="Text 1"/>
+          <p:cNvSpPr/>
+          <p:nvPr/>
+        </p:nvSpPr>
+        <p:spPr>
+          <a:xfrm>
+            <a:off x="2697480" y="1005840"/>
+            <a:ext cx="9174175" cy="731520"/>
+          </a:xfrm>
+          <a:prstGeom prst="rect">
+            <a:avLst/>
+          </a:prstGeom>
+          <a:noFill/>
+          <a:ln/>
+        </p:spPr>
+        <p:txBody>
+          <a:bodyPr wrap="square" lIns="0" tIns="0" rIns="0" bIns="0" rtlCol="0" anchor="ctr">
+            <a:normAutofit/>
+          </a:bodyPr>
+          <a:lstStyle/>
+          <a:p>
+            <a:pPr algn="ctr" indent="0" marL="0">
+              <a:buNone/>
+            </a:pPr>
+            <a:r>
+              <a:rPr lang="en-US" sz="3600" b="1" dirty="0">
+                <a:solidFill>
+                  <a:srgbClr val="990011"/>
+                </a:solidFill>
+                <a:latin typeface="Times New Roman" pitchFamily="34" charset="0"/>
+                <a:ea typeface="Times New Roman" pitchFamily="34" charset="-122"/>
+                <a:cs typeface="Times New Roman" pitchFamily="34" charset="-120"/>
+              </a:rPr>
+              <a:t>3. Comparison and Application Today</a:t>
+            </a:r>
+            <a:endParaRPr lang="en-US" sz="3600" dirty="0"/>
+          </a:p>
+        </p:txBody>
+      </p:sp>
+      <p:sp>
+        <p:nvSpPr>
+          <p:cNvPr id="5" name="Text 2"/>
+          <p:cNvSpPr/>
+          <p:nvPr/>
+        </p:nvSpPr>
+        <p:spPr>
+          <a:xfrm>
+            <a:off x="2697480" y="1783080"/>
+            <a:ext cx="9174175" cy="4663440"/>
+          </a:xfrm>
+          <a:prstGeom prst="rect">
+            <a:avLst/>
+          </a:prstGeom>
+          <a:noFill/>
+          <a:ln/>
+        </p:spPr>
+        <p:txBody>
+          <a:bodyPr wrap="square" lIns="0" tIns="0" rIns="0" bIns="0" rtlCol="0" anchor="t"/>
+          <a:lstStyle/>
+          <a:p>
+            <a:pPr algn="l" indent="0" marL="0">
+              <a:spcAft>
+                <a:spcPts val="800"/>
+              </a:spcAft>
+              <a:buNone/>
+            </a:pPr>
+            <a:r>
+              <a:rPr lang="en-US" sz="4000" b="1" dirty="0">
+                <a:solidFill>
+                  <a:srgbClr val="111111"/>
+                </a:solidFill>
+                <a:latin typeface="Times New Roman" pitchFamily="34" charset="0"/>
+                <a:ea typeface="Times New Roman" pitchFamily="34" charset="-122"/>
+                <a:cs typeface="Times New Roman" pitchFamily="34" charset="-120"/>
+              </a:rPr>
+              <a:t>Development: </a:t>
+            </a:r>
+            <a:pPr algn="l" indent="0" marL="0">
+              <a:spcAft>
+                <a:spcPts val="800"/>
+              </a:spcAft>
+              <a:buNone/>
+            </a:pPr>
+            <a:r>
+              <a:rPr lang="en-US" sz="4000" dirty="0">
+                <a:solidFill>
+                  <a:srgbClr val="111111"/>
+                </a:solidFill>
+                <a:latin typeface="Times New Roman" pitchFamily="34" charset="0"/>
+                <a:ea typeface="Times New Roman" pitchFamily="34" charset="-122"/>
+                <a:cs typeface="Times New Roman" pitchFamily="34" charset="-120"/>
+              </a:rPr>
+              <a:t>For Malthus it hinders development, for Boserup it promotes it through technology.</a:t>
+            </a:r>
+            <a:endParaRPr lang="en-US" sz="4000" dirty="0"/>
+          </a:p>
+          <a:p>
+            <a:pPr algn="l" indent="0" marL="0">
+              <a:spcAft>
+                <a:spcPts val="800"/>
+              </a:spcAft>
+              <a:buNone/>
+            </a:pPr>
+            <a:r>
+              <a:rPr lang="en-US" sz="4000" b="1" dirty="0">
+                <a:solidFill>
+                  <a:srgbClr val="111111"/>
+                </a:solidFill>
+                <a:latin typeface="Times New Roman" pitchFamily="34" charset="0"/>
+                <a:ea typeface="Times New Roman" pitchFamily="34" charset="-122"/>
+                <a:cs typeface="Times New Roman" pitchFamily="34" charset="-120"/>
+              </a:rPr>
+              <a:t>Developing countries: </a:t>
+            </a:r>
+            <a:pPr algn="l" indent="0" marL="0">
+              <a:spcAft>
+                <a:spcPts val="800"/>
+              </a:spcAft>
+              <a:buNone/>
+            </a:pPr>
+            <a:r>
+              <a:rPr lang="en-US" sz="4000" dirty="0">
+                <a:solidFill>
+                  <a:srgbClr val="111111"/>
+                </a:solidFill>
+                <a:latin typeface="Times New Roman" pitchFamily="34" charset="0"/>
+                <a:ea typeface="Times New Roman" pitchFamily="34" charset="-122"/>
+                <a:cs typeface="Times New Roman" pitchFamily="34" charset="-120"/>
+              </a:rPr>
+              <a:t>In sub-Saharan Africa rapid growth causes shortages, but innovations such as improved seeds and irrigation support Boserup.</a:t>
+            </a:r>
+            <a:endParaRPr lang="en-US" sz="4000" dirty="0"/>
+          </a:p>
+        </p:txBody>
+      </p:sp>
+      <p:sp>
+        <p:nvSpPr>
+          <p:cNvPr id="25" name="Slide Number Placeholder 0"/>
+          <p:cNvSpPr>
+            <a:spLocks noGrp="1"/>
+          </p:cNvSpPr>
+          <p:nvPr>
+            <p:ph type="sldNum" sz="quarter" idx="4294967295"/>
+          </p:nvPr>
+        </p:nvSpPr>
+        <p:spPr>
+          <a:xfrm>
+            <a:off x="27432" y="91440"/>
+            <a:ext cx="585216" cy="475488"/>
+          </a:xfrm>
+          <a:prstGeom prst="rect">
+            <a:avLst/>
+          </a:prstGeom>
+          <a:extLst>
+            <a:ext uri="{C572A759-6A51-4108-AA02-DFA0A04FC94B}">
+              <ma14:wrappingTextBoxFlag xmlns:ma14="http://schemas.microsoft.com/office/mac/drawingml/2011/main" val="0"/>
+            </a:ext>
+          </a:extLst>
+        </p:spPr>
+        <p:txBody>
+          <a:bodyPr/>
+          <a:lstStyle>
+            <a:lvl1pPr>
+              <a:defRPr sz="2000">
+                <a:solidFill>
+                  <a:srgbClr val="FFFFFF"/>
+                </a:solidFill>
+                <a:latin typeface="Calibri"/>
+                <a:ea typeface="Calibri"/>
+                <a:cs typeface="Calibri"/>
+              </a:defRPr>
+            </a:lvl1pPr>
+          </a:lstStyle>
+          <a:p>
+            <a:pPr algn="ctr"/>
+            <a:fld id="{F7021451-1387-4CA6-816F-3879F97B5CBC}" type="slidenum">
+              <a:rPr b="1" lang="en-US"/>
+              <a:t>52</a:t>
+            </a:fld>
+            <a:endParaRPr lang="en-US"/>
+          </a:p>
+        </p:txBody>
+      </p:sp>
+    </p:spTree>
+  </p:cSld>
+  <p:clrMapOvr>
+    <a:masterClrMapping/>
+  </p:clrMapOvr>
+</p:sld>
+</file>
+
+<file path=ppt/slides/slide53.xml><?xml version="1.0" encoding="utf-8"?>
+<p:sld xmlns:a="http://schemas.openxmlformats.org/drawingml/2006/main" xmlns:r="http://schemas.openxmlformats.org/officeDocument/2006/relationships" xmlns:p="http://schemas.openxmlformats.org/presentationml/2006/main">
+  <p:cSld name="Slide 53">
+    <p:spTree>
+      <p:nvGrpSpPr>
+        <p:cNvPr id="1" name=""/>
+        <p:cNvGrpSpPr/>
+        <p:nvPr/>
+      </p:nvGrpSpPr>
+      <p:grpSpPr>
+        <a:xfrm>
+          <a:off x="0" y="0"/>
+          <a:ext cx="0" cy="0"/>
+          <a:chOff x="0" y="0"/>
+          <a:chExt cx="0" cy="0"/>
+        </a:xfrm>
+      </p:grpSpPr>
+      <p:sp>
+        <p:nvSpPr>
+          <p:cNvPr id="2" name="Text 0"/>
+          <p:cNvSpPr/>
+          <p:nvPr/>
+        </p:nvSpPr>
+        <p:spPr>
+          <a:xfrm>
+            <a:off x="457200" y="713232"/>
+            <a:ext cx="11368735" cy="274320"/>
+          </a:xfrm>
+          <a:prstGeom prst="rect">
+            <a:avLst/>
+          </a:prstGeom>
+          <a:noFill/>
+          <a:ln/>
+        </p:spPr>
+        <p:txBody>
+          <a:bodyPr wrap="square" lIns="0" tIns="0" rIns="0" bIns="0" rtlCol="0" anchor="ctr"/>
+          <a:lstStyle/>
+          <a:p>
+            <a:pPr algn="r" indent="0" marL="0">
+              <a:buNone/>
+            </a:pPr>
+            <a:r>
+              <a:rPr lang="en-US" sz="1400" b="1" dirty="0">
+                <a:solidFill>
+                  <a:srgbClr val="1C3F6E"/>
+                </a:solidFill>
+                <a:latin typeface="Calibri" pitchFamily="34" charset="0"/>
+                <a:ea typeface="Calibri" pitchFamily="34" charset="-122"/>
+                <a:cs typeface="Calibri" pitchFamily="34" charset="-120"/>
+              </a:rPr>
+              <a:t>BOARD SUMMARY</a:t>
+            </a:r>
+            <a:endParaRPr lang="en-US" sz="1400" dirty="0"/>
+          </a:p>
+        </p:txBody>
+      </p:sp>
+      <p:pic>
+        <p:nvPicPr>
+          <p:cNvPr id="3" name="Image 0" descr="/home/claude/f4/img/minesec_sheet.png">    </p:cNvPr>
+          <p:cNvPicPr>
+            <a:picLocks noChangeAspect="1"/>
+          </p:cNvPicPr>
+          <p:nvPr/>
+        </p:nvPicPr>
+        <p:blipFill>
+          <a:blip r:embed="rId1"/>
+          <a:stretch>
+            <a:fillRect/>
+          </a:stretch>
+        </p:blipFill>
+        <p:spPr>
+          <a:xfrm>
+            <a:off x="0" y="658368"/>
+            <a:ext cx="3840480" cy="5833872"/>
+          </a:xfrm>
+          <a:prstGeom prst="rect">
+            <a:avLst/>
+          </a:prstGeom>
+        </p:spPr>
+      </p:pic>
+      <p:sp>
+        <p:nvSpPr>
+          <p:cNvPr id="4" name="Text 1"/>
+          <p:cNvSpPr/>
+          <p:nvPr/>
+        </p:nvSpPr>
+        <p:spPr>
+          <a:xfrm>
+            <a:off x="4069080" y="1005840"/>
+            <a:ext cx="7802575" cy="731520"/>
+          </a:xfrm>
+          <a:prstGeom prst="rect">
+            <a:avLst/>
+          </a:prstGeom>
+          <a:noFill/>
+          <a:ln/>
+        </p:spPr>
+        <p:txBody>
+          <a:bodyPr wrap="square" lIns="0" tIns="0" rIns="0" bIns="0" rtlCol="0" anchor="ctr">
+            <a:normAutofit/>
+          </a:bodyPr>
+          <a:lstStyle/>
+          <a:p>
+            <a:pPr algn="ctr" indent="0" marL="0">
+              <a:buNone/>
+            </a:pPr>
+            <a:r>
+              <a:rPr lang="en-US" sz="3600" b="1" dirty="0">
+                <a:solidFill>
+                  <a:srgbClr val="990011"/>
+                </a:solidFill>
+                <a:latin typeface="Times New Roman" pitchFamily="34" charset="0"/>
+                <a:ea typeface="Times New Roman" pitchFamily="34" charset="-122"/>
+                <a:cs typeface="Times New Roman" pitchFamily="34" charset="-120"/>
+              </a:rPr>
+              <a:t>3. Comparison and Application Today (continued)</a:t>
+            </a:r>
+            <a:endParaRPr lang="en-US" sz="3600" dirty="0"/>
+          </a:p>
+        </p:txBody>
+      </p:sp>
+      <p:sp>
+        <p:nvSpPr>
+          <p:cNvPr id="5" name="Text 2"/>
+          <p:cNvSpPr/>
+          <p:nvPr/>
+        </p:nvSpPr>
+        <p:spPr>
+          <a:xfrm>
+            <a:off x="4069080" y="1783080"/>
+            <a:ext cx="7802575" cy="4663440"/>
+          </a:xfrm>
+          <a:prstGeom prst="rect">
+            <a:avLst/>
+          </a:prstGeom>
+          <a:noFill/>
+          <a:ln/>
+        </p:spPr>
+        <p:txBody>
+          <a:bodyPr wrap="square" lIns="0" tIns="0" rIns="0" bIns="0" rtlCol="0" anchor="t"/>
+          <a:lstStyle/>
+          <a:p>
+            <a:pPr algn="l" indent="0" marL="0">
+              <a:spcAft>
+                <a:spcPts val="800"/>
+              </a:spcAft>
+              <a:buNone/>
+            </a:pPr>
+            <a:r>
+              <a:rPr lang="en-US" sz="4000" b="1" dirty="0">
+                <a:solidFill>
+                  <a:srgbClr val="111111"/>
+                </a:solidFill>
+                <a:latin typeface="Times New Roman" pitchFamily="34" charset="0"/>
+                <a:ea typeface="Times New Roman" pitchFamily="34" charset="-122"/>
+                <a:cs typeface="Times New Roman" pitchFamily="34" charset="-120"/>
+              </a:rPr>
+              <a:t>Developed countries: </a:t>
+            </a:r>
+            <a:pPr algn="l" indent="0" marL="0">
+              <a:spcAft>
+                <a:spcPts val="800"/>
+              </a:spcAft>
+              <a:buNone/>
+            </a:pPr>
+            <a:r>
+              <a:rPr lang="en-US" sz="4000" dirty="0">
+                <a:solidFill>
+                  <a:srgbClr val="111111"/>
+                </a:solidFill>
+                <a:latin typeface="Times New Roman" pitchFamily="34" charset="0"/>
+                <a:ea typeface="Times New Roman" pitchFamily="34" charset="-122"/>
+                <a:cs typeface="Times New Roman" pitchFamily="34" charset="-120"/>
+              </a:rPr>
+              <a:t>Climate change and over-consumption revive Malthusian fears about limits.</a:t>
+            </a:r>
+            <a:endParaRPr lang="en-US" sz="4000" dirty="0"/>
+          </a:p>
+          <a:p>
+            <a:pPr algn="l" indent="0" marL="0">
+              <a:spcAft>
+                <a:spcPts val="800"/>
+              </a:spcAft>
+              <a:buNone/>
+            </a:pPr>
+            <a:r>
+              <a:rPr lang="en-US" sz="4000" b="1" dirty="0">
+                <a:solidFill>
+                  <a:srgbClr val="111111"/>
+                </a:solidFill>
+                <a:latin typeface="Times New Roman" pitchFamily="34" charset="0"/>
+                <a:ea typeface="Times New Roman" pitchFamily="34" charset="-122"/>
+                <a:cs typeface="Times New Roman" pitchFamily="34" charset="-120"/>
+              </a:rPr>
+              <a:t>Balance: </a:t>
+            </a:r>
+            <a:pPr algn="l" indent="0" marL="0">
+              <a:spcAft>
+                <a:spcPts val="800"/>
+              </a:spcAft>
+              <a:buNone/>
+            </a:pPr>
+            <a:r>
+              <a:rPr lang="en-US" sz="4000" dirty="0">
+                <a:solidFill>
+                  <a:srgbClr val="111111"/>
+                </a:solidFill>
+                <a:latin typeface="Times New Roman" pitchFamily="34" charset="0"/>
+                <a:ea typeface="Times New Roman" pitchFamily="34" charset="-122"/>
+                <a:cs typeface="Times New Roman" pitchFamily="34" charset="-120"/>
+              </a:rPr>
+              <a:t>Good policies combine the control of population growth with innovation and conservation.</a:t>
+            </a:r>
+            <a:endParaRPr lang="en-US" sz="4000" dirty="0"/>
+          </a:p>
+        </p:txBody>
+      </p:sp>
+      <p:sp>
+        <p:nvSpPr>
+          <p:cNvPr id="25" name="Slide Number Placeholder 0"/>
+          <p:cNvSpPr>
+            <a:spLocks noGrp="1"/>
+          </p:cNvSpPr>
+          <p:nvPr>
+            <p:ph type="sldNum" sz="quarter" idx="4294967295"/>
+          </p:nvPr>
+        </p:nvSpPr>
+        <p:spPr>
+          <a:xfrm>
+            <a:off x="27432" y="91440"/>
+            <a:ext cx="585216" cy="475488"/>
+          </a:xfrm>
+          <a:prstGeom prst="rect">
+            <a:avLst/>
+          </a:prstGeom>
+          <a:extLst>
+            <a:ext uri="{C572A759-6A51-4108-AA02-DFA0A04FC94B}">
+              <ma14:wrappingTextBoxFlag xmlns:ma14="http://schemas.microsoft.com/office/mac/drawingml/2011/main" val="0"/>
+            </a:ext>
+          </a:extLst>
+        </p:spPr>
+        <p:txBody>
+          <a:bodyPr/>
+          <a:lstStyle>
+            <a:lvl1pPr>
+              <a:defRPr sz="2000">
+                <a:solidFill>
+                  <a:srgbClr val="FFFFFF"/>
+                </a:solidFill>
+                <a:latin typeface="Calibri"/>
+                <a:ea typeface="Calibri"/>
+                <a:cs typeface="Calibri"/>
+              </a:defRPr>
+            </a:lvl1pPr>
+          </a:lstStyle>
+          <a:p>
+            <a:pPr algn="ctr"/>
+            <a:fld id="{F7021451-1387-4CA6-816F-3879F97B5CBC}" type="slidenum">
+              <a:rPr b="1" lang="en-US"/>
+              <a:t>53</a:t>
+            </a:fld>
+            <a:endParaRPr lang="en-US"/>
+          </a:p>
+        </p:txBody>
+      </p:sp>
+    </p:spTree>
+  </p:cSld>
+  <p:clrMapOvr>
+    <a:masterClrMapping/>
+  </p:clrMapOvr>
+</p:sld>
+</file>
+
+<file path=ppt/slides/slide54.xml><?xml version="1.0" encoding="utf-8"?>
+<p:sld xmlns:a="http://schemas.openxmlformats.org/drawingml/2006/main" xmlns:r="http://schemas.openxmlformats.org/officeDocument/2006/relationships" xmlns:p="http://schemas.openxmlformats.org/presentationml/2006/main">
+  <p:cSld name="Slide 54">
+    <p:spTree>
+      <p:nvGrpSpPr>
+        <p:cNvPr id="1" name=""/>
+        <p:cNvGrpSpPr/>
+        <p:nvPr/>
+      </p:nvGrpSpPr>
+      <p:grpSpPr>
+        <a:xfrm>
+          <a:off x="0" y="0"/>
+          <a:ext cx="0" cy="0"/>
+          <a:chOff x="0" y="0"/>
+          <a:chExt cx="0" cy="0"/>
+        </a:xfrm>
+      </p:grpSpPr>
+      <p:sp>
+        <p:nvSpPr>
+          <p:cNvPr id="2" name="Text 0"/>
+          <p:cNvSpPr/>
+          <p:nvPr/>
+        </p:nvSpPr>
+        <p:spPr>
+          <a:xfrm>
+            <a:off x="457200" y="713232"/>
+            <a:ext cx="11368735" cy="274320"/>
+          </a:xfrm>
+          <a:prstGeom prst="rect">
+            <a:avLst/>
+          </a:prstGeom>
+          <a:noFill/>
+          <a:ln/>
+        </p:spPr>
+        <p:txBody>
+          <a:bodyPr wrap="square" lIns="0" tIns="0" rIns="0" bIns="0" rtlCol="0" anchor="ctr"/>
+          <a:lstStyle/>
+          <a:p>
+            <a:pPr algn="r" indent="0" marL="0">
+              <a:buNone/>
+            </a:pPr>
+            <a:r>
+              <a:rPr lang="en-US" sz="1400" b="1" dirty="0">
+                <a:solidFill>
+                  <a:srgbClr val="1C3F6E"/>
+                </a:solidFill>
+                <a:latin typeface="Calibri" pitchFamily="34" charset="0"/>
+                <a:ea typeface="Calibri" pitchFamily="34" charset="-122"/>
+                <a:cs typeface="Calibri" pitchFamily="34" charset="-120"/>
+              </a:rPr>
+              <a:t>FORMATIVE EVALUATION</a:t>
+            </a:r>
+            <a:endParaRPr lang="en-US" sz="1400" dirty="0"/>
+          </a:p>
+        </p:txBody>
+      </p:sp>
+      <p:pic>
+        <p:nvPicPr>
+          <p:cNvPr id="3" name="Image 0" descr="/home/claude/f4/img/minesec_sheet.png">    </p:cNvPr>
+          <p:cNvPicPr>
+            <a:picLocks noChangeAspect="1"/>
+          </p:cNvPicPr>
+          <p:nvPr/>
+        </p:nvPicPr>
+        <p:blipFill>
+          <a:blip r:embed="rId1"/>
+          <a:stretch>
+            <a:fillRect/>
+          </a:stretch>
+        </p:blipFill>
+        <p:spPr>
+          <a:xfrm>
+            <a:off x="0" y="658368"/>
+            <a:ext cx="5120640" cy="5833872"/>
+          </a:xfrm>
+          <a:prstGeom prst="rect">
+            <a:avLst/>
+          </a:prstGeom>
+        </p:spPr>
+      </p:pic>
+      <p:sp>
+        <p:nvSpPr>
+          <p:cNvPr id="4" name="Text 1"/>
+          <p:cNvSpPr/>
+          <p:nvPr/>
+        </p:nvSpPr>
+        <p:spPr>
+          <a:xfrm>
+            <a:off x="5349240" y="1005840"/>
+            <a:ext cx="6522415" cy="731520"/>
+          </a:xfrm>
+          <a:prstGeom prst="rect">
+            <a:avLst/>
+          </a:prstGeom>
+          <a:noFill/>
+          <a:ln/>
+        </p:spPr>
+        <p:txBody>
+          <a:bodyPr wrap="square" lIns="0" tIns="0" rIns="0" bIns="0" rtlCol="0" anchor="ctr">
+            <a:normAutofit/>
+          </a:bodyPr>
+          <a:lstStyle/>
+          <a:p>
+            <a:pPr algn="ctr" indent="0" marL="0">
+              <a:buNone/>
+            </a:pPr>
+            <a:r>
+              <a:rPr lang="en-US" sz="3600" b="1" dirty="0">
+                <a:solidFill>
+                  <a:srgbClr val="990011"/>
+                </a:solidFill>
+                <a:latin typeface="Times New Roman" pitchFamily="34" charset="0"/>
+                <a:ea typeface="Times New Roman" pitchFamily="34" charset="-122"/>
+                <a:cs typeface="Times New Roman" pitchFamily="34" charset="-120"/>
+              </a:rPr>
+              <a:t>Evaluation 1</a:t>
+            </a:r>
+            <a:endParaRPr lang="en-US" sz="3600" dirty="0"/>
+          </a:p>
+        </p:txBody>
+      </p:sp>
+      <p:sp>
+        <p:nvSpPr>
+          <p:cNvPr id="5" name="Text 2"/>
+          <p:cNvSpPr/>
+          <p:nvPr/>
+        </p:nvSpPr>
+        <p:spPr>
+          <a:xfrm>
+            <a:off x="5349240" y="1783080"/>
+            <a:ext cx="6522415" cy="4663440"/>
+          </a:xfrm>
+          <a:prstGeom prst="rect">
+            <a:avLst/>
+          </a:prstGeom>
+          <a:noFill/>
+          <a:ln/>
+        </p:spPr>
+        <p:txBody>
+          <a:bodyPr wrap="square" lIns="0" tIns="0" rIns="0" bIns="0" rtlCol="0" anchor="t"/>
+          <a:lstStyle/>
+          <a:p>
+            <a:pPr algn="l" indent="0" marL="0">
+              <a:spcAft>
+                <a:spcPts val="800"/>
+              </a:spcAft>
+              <a:buNone/>
+            </a:pPr>
+            <a:r>
+              <a:rPr lang="en-US" sz="4000" dirty="0">
+                <a:solidFill>
+                  <a:srgbClr val="111111"/>
+                </a:solidFill>
+                <a:latin typeface="Times New Roman" pitchFamily="34" charset="0"/>
+                <a:ea typeface="Times New Roman" pitchFamily="34" charset="-122"/>
+                <a:cs typeface="Times New Roman" pitchFamily="34" charset="-120"/>
+              </a:rPr>
+              <a:t>State the main difference between Malthus and Boserup.</a:t>
+            </a:r>
+            <a:endParaRPr lang="en-US" sz="4000" dirty="0"/>
+          </a:p>
+        </p:txBody>
+      </p:sp>
+      <p:sp>
+        <p:nvSpPr>
+          <p:cNvPr id="25" name="Slide Number Placeholder 0"/>
+          <p:cNvSpPr>
+            <a:spLocks noGrp="1"/>
+          </p:cNvSpPr>
+          <p:nvPr>
+            <p:ph type="sldNum" sz="quarter" idx="4294967295"/>
+          </p:nvPr>
+        </p:nvSpPr>
+        <p:spPr>
+          <a:xfrm>
+            <a:off x="27432" y="91440"/>
+            <a:ext cx="585216" cy="475488"/>
+          </a:xfrm>
+          <a:prstGeom prst="rect">
+            <a:avLst/>
+          </a:prstGeom>
+          <a:extLst>
+            <a:ext uri="{C572A759-6A51-4108-AA02-DFA0A04FC94B}">
+              <ma14:wrappingTextBoxFlag xmlns:ma14="http://schemas.microsoft.com/office/mac/drawingml/2011/main" val="0"/>
+            </a:ext>
+          </a:extLst>
+        </p:spPr>
+        <p:txBody>
+          <a:bodyPr/>
+          <a:lstStyle>
+            <a:lvl1pPr>
+              <a:defRPr sz="2000">
+                <a:solidFill>
+                  <a:srgbClr val="FFFFFF"/>
+                </a:solidFill>
+                <a:latin typeface="Calibri"/>
+                <a:ea typeface="Calibri"/>
+                <a:cs typeface="Calibri"/>
+              </a:defRPr>
+            </a:lvl1pPr>
+          </a:lstStyle>
+          <a:p>
+            <a:pPr algn="ctr"/>
+            <a:fld id="{F7021451-1387-4CA6-816F-3879F97B5CBC}" type="slidenum">
+              <a:rPr b="1" lang="en-US"/>
+              <a:t>54</a:t>
+            </a:fld>
+            <a:endParaRPr lang="en-US"/>
+          </a:p>
+        </p:txBody>
+      </p:sp>
+    </p:spTree>
+  </p:cSld>
+  <p:clrMapOvr>
+    <a:masterClrMapping/>
+  </p:clrMapOvr>
+</p:sld>
+</file>
+
+<file path=ppt/slides/slide55.xml><?xml version="1.0" encoding="utf-8"?>
+<p:sld xmlns:a="http://schemas.openxmlformats.org/drawingml/2006/main" xmlns:r="http://schemas.openxmlformats.org/officeDocument/2006/relationships" xmlns:p="http://schemas.openxmlformats.org/presentationml/2006/main">
+  <p:cSld name="Slide 55">
+    <p:spTree>
+      <p:nvGrpSpPr>
+        <p:cNvPr id="1" name=""/>
+        <p:cNvGrpSpPr/>
+        <p:nvPr/>
+      </p:nvGrpSpPr>
+      <p:grpSpPr>
+        <a:xfrm>
+          <a:off x="0" y="0"/>
+          <a:ext cx="0" cy="0"/>
+          <a:chOff x="0" y="0"/>
+          <a:chExt cx="0" cy="0"/>
+        </a:xfrm>
+      </p:grpSpPr>
+      <p:sp>
+        <p:nvSpPr>
+          <p:cNvPr id="2" name="Text 0"/>
+          <p:cNvSpPr/>
+          <p:nvPr/>
+        </p:nvSpPr>
+        <p:spPr>
+          <a:xfrm>
+            <a:off x="457200" y="713232"/>
+            <a:ext cx="11368735" cy="274320"/>
+          </a:xfrm>
+          <a:prstGeom prst="rect">
+            <a:avLst/>
+          </a:prstGeom>
+          <a:noFill/>
+          <a:ln/>
+        </p:spPr>
+        <p:txBody>
+          <a:bodyPr wrap="square" lIns="0" tIns="0" rIns="0" bIns="0" rtlCol="0" anchor="ctr"/>
+          <a:lstStyle/>
+          <a:p>
+            <a:pPr algn="r" indent="0" marL="0">
+              <a:buNone/>
+            </a:pPr>
+            <a:r>
+              <a:rPr lang="en-US" sz="1400" b="1" dirty="0">
+                <a:solidFill>
+                  <a:srgbClr val="1C3F6E"/>
+                </a:solidFill>
+                <a:latin typeface="Calibri" pitchFamily="34" charset="0"/>
+                <a:ea typeface="Calibri" pitchFamily="34" charset="-122"/>
+                <a:cs typeface="Calibri" pitchFamily="34" charset="-120"/>
+              </a:rPr>
+              <a:t>FORMATIVE EVALUATION</a:t>
+            </a:r>
+            <a:endParaRPr lang="en-US" sz="1400" dirty="0"/>
+          </a:p>
+        </p:txBody>
+      </p:sp>
+      <p:pic>
+        <p:nvPicPr>
+          <p:cNvPr id="3" name="Image 0" descr="/home/claude/f4/img/minesec_sheet.png">    </p:cNvPr>
+          <p:cNvPicPr>
+            <a:picLocks noChangeAspect="1"/>
+          </p:cNvPicPr>
+          <p:nvPr/>
+        </p:nvPicPr>
+        <p:blipFill>
+          <a:blip r:embed="rId1"/>
+          <a:stretch>
+            <a:fillRect/>
+          </a:stretch>
+        </p:blipFill>
+        <p:spPr>
+          <a:xfrm>
+            <a:off x="0" y="658368"/>
+            <a:ext cx="5120640" cy="5833872"/>
+          </a:xfrm>
+          <a:prstGeom prst="rect">
+            <a:avLst/>
+          </a:prstGeom>
+        </p:spPr>
+      </p:pic>
+      <p:sp>
+        <p:nvSpPr>
+          <p:cNvPr id="4" name="Text 1"/>
+          <p:cNvSpPr/>
+          <p:nvPr/>
+        </p:nvSpPr>
+        <p:spPr>
+          <a:xfrm>
+            <a:off x="5349240" y="1005840"/>
+            <a:ext cx="6522415" cy="731520"/>
+          </a:xfrm>
+          <a:prstGeom prst="rect">
+            <a:avLst/>
+          </a:prstGeom>
+          <a:noFill/>
+          <a:ln/>
+        </p:spPr>
+        <p:txBody>
+          <a:bodyPr wrap="square" lIns="0" tIns="0" rIns="0" bIns="0" rtlCol="0" anchor="ctr">
+            <a:normAutofit/>
+          </a:bodyPr>
+          <a:lstStyle/>
+          <a:p>
+            <a:pPr algn="ctr" indent="0" marL="0">
+              <a:buNone/>
+            </a:pPr>
+            <a:r>
+              <a:rPr lang="en-US" sz="3600" b="1" dirty="0">
+                <a:solidFill>
+                  <a:srgbClr val="990011"/>
+                </a:solidFill>
+                <a:latin typeface="Times New Roman" pitchFamily="34" charset="0"/>
+                <a:ea typeface="Times New Roman" pitchFamily="34" charset="-122"/>
+                <a:cs typeface="Times New Roman" pitchFamily="34" charset="-120"/>
+              </a:rPr>
+              <a:t>Expected Answer</a:t>
+            </a:r>
+            <a:endParaRPr lang="en-US" sz="3600" dirty="0"/>
+          </a:p>
+        </p:txBody>
+      </p:sp>
+      <p:sp>
+        <p:nvSpPr>
+          <p:cNvPr id="5" name="Text 2"/>
+          <p:cNvSpPr/>
+          <p:nvPr/>
+        </p:nvSpPr>
+        <p:spPr>
+          <a:xfrm>
+            <a:off x="5349240" y="1783080"/>
+            <a:ext cx="6522415" cy="4663440"/>
+          </a:xfrm>
+          <a:prstGeom prst="rect">
+            <a:avLst/>
+          </a:prstGeom>
+          <a:noFill/>
+          <a:ln/>
+        </p:spPr>
+        <p:txBody>
+          <a:bodyPr wrap="square" lIns="0" tIns="0" rIns="0" bIns="0" rtlCol="0" anchor="t"/>
+          <a:lstStyle/>
+          <a:p>
+            <a:pPr algn="l" indent="0" marL="0">
+              <a:spcAft>
+                <a:spcPts val="800"/>
+              </a:spcAft>
+              <a:buNone/>
+            </a:pPr>
+            <a:r>
+              <a:rPr lang="en-US" sz="4000" dirty="0">
+                <a:solidFill>
+                  <a:srgbClr val="111111"/>
+                </a:solidFill>
+                <a:latin typeface="Times New Roman" pitchFamily="34" charset="0"/>
+                <a:ea typeface="Times New Roman" pitchFamily="34" charset="-122"/>
+                <a:cs typeface="Times New Roman" pitchFamily="34" charset="-120"/>
+              </a:rPr>
+              <a:t>Malthus thinks population growth leads to famine; Boserup thinks it leads to agricultural innovation.</a:t>
+            </a:r>
+            <a:endParaRPr lang="en-US" sz="4000" dirty="0"/>
+          </a:p>
+        </p:txBody>
+      </p:sp>
+      <p:sp>
+        <p:nvSpPr>
+          <p:cNvPr id="25" name="Slide Number Placeholder 0"/>
+          <p:cNvSpPr>
+            <a:spLocks noGrp="1"/>
+          </p:cNvSpPr>
+          <p:nvPr>
+            <p:ph type="sldNum" sz="quarter" idx="4294967295"/>
+          </p:nvPr>
+        </p:nvSpPr>
+        <p:spPr>
+          <a:xfrm>
+            <a:off x="27432" y="91440"/>
+            <a:ext cx="585216" cy="475488"/>
+          </a:xfrm>
+          <a:prstGeom prst="rect">
+            <a:avLst/>
+          </a:prstGeom>
+          <a:extLst>
+            <a:ext uri="{C572A759-6A51-4108-AA02-DFA0A04FC94B}">
+              <ma14:wrappingTextBoxFlag xmlns:ma14="http://schemas.microsoft.com/office/mac/drawingml/2011/main" val="0"/>
+            </a:ext>
+          </a:extLst>
+        </p:spPr>
+        <p:txBody>
+          <a:bodyPr/>
+          <a:lstStyle>
+            <a:lvl1pPr>
+              <a:defRPr sz="2000">
+                <a:solidFill>
+                  <a:srgbClr val="FFFFFF"/>
+                </a:solidFill>
+                <a:latin typeface="Calibri"/>
+                <a:ea typeface="Calibri"/>
+                <a:cs typeface="Calibri"/>
+              </a:defRPr>
+            </a:lvl1pPr>
+          </a:lstStyle>
+          <a:p>
+            <a:pPr algn="ctr"/>
+            <a:fld id="{F7021451-1387-4CA6-816F-3879F97B5CBC}" type="slidenum">
+              <a:rPr b="1" lang="en-US"/>
+              <a:t>55</a:t>
+            </a:fld>
+            <a:endParaRPr lang="en-US"/>
+          </a:p>
+        </p:txBody>
+      </p:sp>
+    </p:spTree>
+  </p:cSld>
+  <p:clrMapOvr>
+    <a:masterClrMapping/>
+  </p:clrMapOvr>
+</p:sld>
+</file>
+
+<file path=ppt/slides/slide56.xml><?xml version="1.0" encoding="utf-8"?>
+<p:sld xmlns:a="http://schemas.openxmlformats.org/drawingml/2006/main" xmlns:r="http://schemas.openxmlformats.org/officeDocument/2006/relationships" xmlns:p="http://schemas.openxmlformats.org/presentationml/2006/main">
+  <p:cSld name="Slide 56">
+    <p:spTree>
+      <p:nvGrpSpPr>
+        <p:cNvPr id="1" name=""/>
+        <p:cNvGrpSpPr/>
+        <p:nvPr/>
+      </p:nvGrpSpPr>
+      <p:grpSpPr>
+        <a:xfrm>
+          <a:off x="0" y="0"/>
+          <a:ext cx="0" cy="0"/>
+          <a:chOff x="0" y="0"/>
+          <a:chExt cx="0" cy="0"/>
+        </a:xfrm>
+      </p:grpSpPr>
+      <p:sp>
+        <p:nvSpPr>
+          <p:cNvPr id="2" name="Text 0"/>
+          <p:cNvSpPr/>
+          <p:nvPr/>
+        </p:nvSpPr>
+        <p:spPr>
+          <a:xfrm>
+            <a:off x="457200" y="713232"/>
+            <a:ext cx="11368735" cy="274320"/>
+          </a:xfrm>
+          <a:prstGeom prst="rect">
+            <a:avLst/>
+          </a:prstGeom>
+          <a:noFill/>
+          <a:ln/>
+        </p:spPr>
+        <p:txBody>
+          <a:bodyPr wrap="square" lIns="0" tIns="0" rIns="0" bIns="0" rtlCol="0" anchor="ctr"/>
+          <a:lstStyle/>
+          <a:p>
+            <a:pPr algn="r" indent="0" marL="0">
+              <a:buNone/>
+            </a:pPr>
+            <a:r>
+              <a:rPr lang="en-US" sz="1400" b="1" dirty="0">
+                <a:solidFill>
+                  <a:srgbClr val="1C3F6E"/>
+                </a:solidFill>
+                <a:latin typeface="Calibri" pitchFamily="34" charset="0"/>
+                <a:ea typeface="Calibri" pitchFamily="34" charset="-122"/>
+                <a:cs typeface="Calibri" pitchFamily="34" charset="-120"/>
+              </a:rPr>
+              <a:t>FORMATIVE EVALUATION</a:t>
+            </a:r>
+            <a:endParaRPr lang="en-US" sz="1400" dirty="0"/>
+          </a:p>
+        </p:txBody>
+      </p:sp>
+      <p:pic>
+        <p:nvPicPr>
+          <p:cNvPr id="3" name="Image 0" descr="/home/claude/f4/img/minesec_sheet.png">    </p:cNvPr>
+          <p:cNvPicPr>
+            <a:picLocks noChangeAspect="1"/>
+          </p:cNvPicPr>
+          <p:nvPr/>
+        </p:nvPicPr>
+        <p:blipFill>
+          <a:blip r:embed="rId1"/>
+          <a:stretch>
+            <a:fillRect/>
+          </a:stretch>
+        </p:blipFill>
+        <p:spPr>
+          <a:xfrm>
+            <a:off x="0" y="658368"/>
+            <a:ext cx="5120640" cy="5833872"/>
+          </a:xfrm>
+          <a:prstGeom prst="rect">
+            <a:avLst/>
+          </a:prstGeom>
+        </p:spPr>
+      </p:pic>
+      <p:sp>
+        <p:nvSpPr>
+          <p:cNvPr id="4" name="Text 1"/>
+          <p:cNvSpPr/>
+          <p:nvPr/>
+        </p:nvSpPr>
+        <p:spPr>
+          <a:xfrm>
+            <a:off x="5349240" y="1005840"/>
+            <a:ext cx="6522415" cy="731520"/>
+          </a:xfrm>
+          <a:prstGeom prst="rect">
+            <a:avLst/>
+          </a:prstGeom>
+          <a:noFill/>
+          <a:ln/>
+        </p:spPr>
+        <p:txBody>
+          <a:bodyPr wrap="square" lIns="0" tIns="0" rIns="0" bIns="0" rtlCol="0" anchor="ctr">
+            <a:normAutofit/>
+          </a:bodyPr>
+          <a:lstStyle/>
+          <a:p>
+            <a:pPr algn="ctr" indent="0" marL="0">
+              <a:buNone/>
+            </a:pPr>
+            <a:r>
+              <a:rPr lang="en-US" sz="3600" b="1" dirty="0">
+                <a:solidFill>
+                  <a:srgbClr val="990011"/>
+                </a:solidFill>
+                <a:latin typeface="Times New Roman" pitchFamily="34" charset="0"/>
+                <a:ea typeface="Times New Roman" pitchFamily="34" charset="-122"/>
+                <a:cs typeface="Times New Roman" pitchFamily="34" charset="-120"/>
+              </a:rPr>
+              <a:t>Evaluation 2</a:t>
+            </a:r>
+            <a:endParaRPr lang="en-US" sz="3600" dirty="0"/>
+          </a:p>
+        </p:txBody>
+      </p:sp>
+      <p:sp>
+        <p:nvSpPr>
+          <p:cNvPr id="5" name="Text 2"/>
+          <p:cNvSpPr/>
+          <p:nvPr/>
+        </p:nvSpPr>
+        <p:spPr>
+          <a:xfrm>
+            <a:off x="5349240" y="1783080"/>
+            <a:ext cx="6522415" cy="4663440"/>
+          </a:xfrm>
+          <a:prstGeom prst="rect">
+            <a:avLst/>
+          </a:prstGeom>
+          <a:noFill/>
+          <a:ln/>
+        </p:spPr>
+        <p:txBody>
+          <a:bodyPr wrap="square" lIns="0" tIns="0" rIns="0" bIns="0" rtlCol="0" anchor="t"/>
+          <a:lstStyle/>
+          <a:p>
+            <a:pPr algn="l" indent="0" marL="0">
+              <a:spcAft>
+                <a:spcPts val="800"/>
+              </a:spcAft>
+              <a:buNone/>
+            </a:pPr>
+            <a:r>
+              <a:rPr lang="en-US" sz="4000" dirty="0">
+                <a:solidFill>
+                  <a:srgbClr val="111111"/>
+                </a:solidFill>
+                <a:latin typeface="Times New Roman" pitchFamily="34" charset="0"/>
+                <a:ea typeface="Times New Roman" pitchFamily="34" charset="-122"/>
+                <a:cs typeface="Times New Roman" pitchFamily="34" charset="-120"/>
+              </a:rPr>
+              <a:t>Give one weakness of each theory.</a:t>
+            </a:r>
+            <a:endParaRPr lang="en-US" sz="4000" dirty="0"/>
+          </a:p>
+        </p:txBody>
+      </p:sp>
+      <p:sp>
+        <p:nvSpPr>
+          <p:cNvPr id="25" name="Slide Number Placeholder 0"/>
+          <p:cNvSpPr>
+            <a:spLocks noGrp="1"/>
+          </p:cNvSpPr>
+          <p:nvPr>
+            <p:ph type="sldNum" sz="quarter" idx="4294967295"/>
+          </p:nvPr>
+        </p:nvSpPr>
+        <p:spPr>
+          <a:xfrm>
+            <a:off x="27432" y="91440"/>
+            <a:ext cx="585216" cy="475488"/>
+          </a:xfrm>
+          <a:prstGeom prst="rect">
+            <a:avLst/>
+          </a:prstGeom>
+          <a:extLst>
+            <a:ext uri="{C572A759-6A51-4108-AA02-DFA0A04FC94B}">
+              <ma14:wrappingTextBoxFlag xmlns:ma14="http://schemas.microsoft.com/office/mac/drawingml/2011/main" val="0"/>
+            </a:ext>
+          </a:extLst>
+        </p:spPr>
+        <p:txBody>
+          <a:bodyPr/>
+          <a:lstStyle>
+            <a:lvl1pPr>
+              <a:defRPr sz="2000">
+                <a:solidFill>
+                  <a:srgbClr val="FFFFFF"/>
+                </a:solidFill>
+                <a:latin typeface="Calibri"/>
+                <a:ea typeface="Calibri"/>
+                <a:cs typeface="Calibri"/>
+              </a:defRPr>
+            </a:lvl1pPr>
+          </a:lstStyle>
+          <a:p>
+            <a:pPr algn="ctr"/>
+            <a:fld id="{F7021451-1387-4CA6-816F-3879F97B5CBC}" type="slidenum">
+              <a:rPr b="1" lang="en-US"/>
+              <a:t>56</a:t>
+            </a:fld>
+            <a:endParaRPr lang="en-US"/>
+          </a:p>
+        </p:txBody>
+      </p:sp>
+    </p:spTree>
+  </p:cSld>
+  <p:clrMapOvr>
+    <a:masterClrMapping/>
+  </p:clrMapOvr>
+</p:sld>
+</file>
+
+<file path=ppt/slides/slide57.xml><?xml version="1.0" encoding="utf-8"?>
+<p:sld xmlns:a="http://schemas.openxmlformats.org/drawingml/2006/main" xmlns:r="http://schemas.openxmlformats.org/officeDocument/2006/relationships" xmlns:p="http://schemas.openxmlformats.org/presentationml/2006/main">
+  <p:cSld name="Slide 57">
+    <p:spTree>
+      <p:nvGrpSpPr>
+        <p:cNvPr id="1" name=""/>
+        <p:cNvGrpSpPr/>
+        <p:nvPr/>
+      </p:nvGrpSpPr>
+      <p:grpSpPr>
+        <a:xfrm>
+          <a:off x="0" y="0"/>
+          <a:ext cx="0" cy="0"/>
+          <a:chOff x="0" y="0"/>
+          <a:chExt cx="0" cy="0"/>
+        </a:xfrm>
+      </p:grpSpPr>
+      <p:sp>
+        <p:nvSpPr>
+          <p:cNvPr id="2" name="Text 0"/>
+          <p:cNvSpPr/>
+          <p:nvPr/>
+        </p:nvSpPr>
+        <p:spPr>
+          <a:xfrm>
+            <a:off x="457200" y="713232"/>
+            <a:ext cx="11368735" cy="274320"/>
+          </a:xfrm>
+          <a:prstGeom prst="rect">
+            <a:avLst/>
+          </a:prstGeom>
+          <a:noFill/>
+          <a:ln/>
+        </p:spPr>
+        <p:txBody>
+          <a:bodyPr wrap="square" lIns="0" tIns="0" rIns="0" bIns="0" rtlCol="0" anchor="ctr"/>
+          <a:lstStyle/>
+          <a:p>
+            <a:pPr algn="r" indent="0" marL="0">
+              <a:buNone/>
+            </a:pPr>
+            <a:r>
+              <a:rPr lang="en-US" sz="1400" b="1" dirty="0">
+                <a:solidFill>
+                  <a:srgbClr val="1C3F6E"/>
+                </a:solidFill>
+                <a:latin typeface="Calibri" pitchFamily="34" charset="0"/>
+                <a:ea typeface="Calibri" pitchFamily="34" charset="-122"/>
+                <a:cs typeface="Calibri" pitchFamily="34" charset="-120"/>
+              </a:rPr>
+              <a:t>FORMATIVE EVALUATION</a:t>
+            </a:r>
+            <a:endParaRPr lang="en-US" sz="1400" dirty="0"/>
+          </a:p>
+        </p:txBody>
+      </p:sp>
+      <p:pic>
+        <p:nvPicPr>
+          <p:cNvPr id="3" name="Image 0" descr="/home/claude/f4/img/minesec_sheet.png">    </p:cNvPr>
+          <p:cNvPicPr>
+            <a:picLocks noChangeAspect="1"/>
+          </p:cNvPicPr>
+          <p:nvPr/>
+        </p:nvPicPr>
+        <p:blipFill>
+          <a:blip r:embed="rId1"/>
+          <a:stretch>
+            <a:fillRect/>
+          </a:stretch>
+        </p:blipFill>
+        <p:spPr>
+          <a:xfrm>
+            <a:off x="0" y="658368"/>
+            <a:ext cx="5120640" cy="5833872"/>
+          </a:xfrm>
+          <a:prstGeom prst="rect">
+            <a:avLst/>
+          </a:prstGeom>
+        </p:spPr>
+      </p:pic>
+      <p:sp>
+        <p:nvSpPr>
+          <p:cNvPr id="4" name="Text 1"/>
+          <p:cNvSpPr/>
+          <p:nvPr/>
+        </p:nvSpPr>
+        <p:spPr>
+          <a:xfrm>
+            <a:off x="5349240" y="1005840"/>
+            <a:ext cx="6522415" cy="731520"/>
+          </a:xfrm>
+          <a:prstGeom prst="rect">
+            <a:avLst/>
+          </a:prstGeom>
+          <a:noFill/>
+          <a:ln/>
+        </p:spPr>
+        <p:txBody>
+          <a:bodyPr wrap="square" lIns="0" tIns="0" rIns="0" bIns="0" rtlCol="0" anchor="ctr">
+            <a:normAutofit/>
+          </a:bodyPr>
+          <a:lstStyle/>
+          <a:p>
+            <a:pPr algn="ctr" indent="0" marL="0">
+              <a:buNone/>
+            </a:pPr>
+            <a:r>
+              <a:rPr lang="en-US" sz="3600" b="1" dirty="0">
+                <a:solidFill>
+                  <a:srgbClr val="990011"/>
+                </a:solidFill>
+                <a:latin typeface="Times New Roman" pitchFamily="34" charset="0"/>
+                <a:ea typeface="Times New Roman" pitchFamily="34" charset="-122"/>
+                <a:cs typeface="Times New Roman" pitchFamily="34" charset="-120"/>
+              </a:rPr>
+              <a:t>Expected Answer</a:t>
+            </a:r>
+            <a:endParaRPr lang="en-US" sz="3600" dirty="0"/>
+          </a:p>
+        </p:txBody>
+      </p:sp>
+      <p:sp>
+        <p:nvSpPr>
+          <p:cNvPr id="5" name="Text 2"/>
+          <p:cNvSpPr/>
+          <p:nvPr/>
+        </p:nvSpPr>
+        <p:spPr>
+          <a:xfrm>
+            <a:off x="5349240" y="1783080"/>
+            <a:ext cx="6522415" cy="4663440"/>
+          </a:xfrm>
+          <a:prstGeom prst="rect">
+            <a:avLst/>
+          </a:prstGeom>
+          <a:noFill/>
+          <a:ln/>
+        </p:spPr>
+        <p:txBody>
+          <a:bodyPr wrap="square" lIns="0" tIns="0" rIns="0" bIns="0" rtlCol="0" anchor="t"/>
+          <a:lstStyle/>
+          <a:p>
+            <a:pPr algn="l" indent="0" marL="0">
+              <a:spcAft>
+                <a:spcPts val="800"/>
+              </a:spcAft>
+              <a:buNone/>
+            </a:pPr>
+            <a:r>
+              <a:rPr lang="en-US" sz="4000" dirty="0">
+                <a:solidFill>
+                  <a:srgbClr val="111111"/>
+                </a:solidFill>
+                <a:latin typeface="Times New Roman" pitchFamily="34" charset="0"/>
+                <a:ea typeface="Times New Roman" pitchFamily="34" charset="-122"/>
+                <a:cs typeface="Times New Roman" pitchFamily="34" charset="-120"/>
+              </a:rPr>
+              <a:t>Malthus underestimated technology; Boserup is too optimistic and ignores environmental limits.</a:t>
+            </a:r>
+            <a:endParaRPr lang="en-US" sz="4000" dirty="0"/>
+          </a:p>
+        </p:txBody>
+      </p:sp>
+      <p:sp>
+        <p:nvSpPr>
+          <p:cNvPr id="25" name="Slide Number Placeholder 0"/>
+          <p:cNvSpPr>
+            <a:spLocks noGrp="1"/>
+          </p:cNvSpPr>
+          <p:nvPr>
+            <p:ph type="sldNum" sz="quarter" idx="4294967295"/>
+          </p:nvPr>
+        </p:nvSpPr>
+        <p:spPr>
+          <a:xfrm>
+            <a:off x="27432" y="91440"/>
+            <a:ext cx="585216" cy="475488"/>
+          </a:xfrm>
+          <a:prstGeom prst="rect">
+            <a:avLst/>
+          </a:prstGeom>
+          <a:extLst>
+            <a:ext uri="{C572A759-6A51-4108-AA02-DFA0A04FC94B}">
+              <ma14:wrappingTextBoxFlag xmlns:ma14="http://schemas.microsoft.com/office/mac/drawingml/2011/main" val="0"/>
+            </a:ext>
+          </a:extLst>
+        </p:spPr>
+        <p:txBody>
+          <a:bodyPr/>
+          <a:lstStyle>
+            <a:lvl1pPr>
+              <a:defRPr sz="2000">
+                <a:solidFill>
+                  <a:srgbClr val="FFFFFF"/>
+                </a:solidFill>
+                <a:latin typeface="Calibri"/>
+                <a:ea typeface="Calibri"/>
+                <a:cs typeface="Calibri"/>
+              </a:defRPr>
+            </a:lvl1pPr>
+          </a:lstStyle>
+          <a:p>
+            <a:pPr algn="ctr"/>
+            <a:fld id="{F7021451-1387-4CA6-816F-3879F97B5CBC}" type="slidenum">
+              <a:rPr b="1" lang="en-US"/>
+              <a:t>57</a:t>
+            </a:fld>
+            <a:endParaRPr lang="en-US"/>
+          </a:p>
+        </p:txBody>
+      </p:sp>
+    </p:spTree>
+  </p:cSld>
+  <p:clrMapOvr>
+    <a:masterClrMapping/>
+  </p:clrMapOvr>
+</p:sld>
+</file>
+
+<file path=ppt/slides/slide58.xml><?xml version="1.0" encoding="utf-8"?>
+<p:sld xmlns:a="http://schemas.openxmlformats.org/drawingml/2006/main" xmlns:r="http://schemas.openxmlformats.org/officeDocument/2006/relationships" xmlns:p="http://schemas.openxmlformats.org/presentationml/2006/main">
+  <p:cSld name="Slide 58">
+    <p:spTree>
+      <p:nvGrpSpPr>
+        <p:cNvPr id="1" name=""/>
+        <p:cNvGrpSpPr/>
+        <p:nvPr/>
+      </p:nvGrpSpPr>
+      <p:grpSpPr>
+        <a:xfrm>
+          <a:off x="0" y="0"/>
+          <a:ext cx="0" cy="0"/>
+          <a:chOff x="0" y="0"/>
+          <a:chExt cx="0" cy="0"/>
+        </a:xfrm>
+      </p:grpSpPr>
+      <p:sp>
+        <p:nvSpPr>
+          <p:cNvPr id="2" name="Text 0"/>
+          <p:cNvSpPr/>
+          <p:nvPr/>
+        </p:nvSpPr>
+        <p:spPr>
+          <a:xfrm>
+            <a:off x="457200" y="713232"/>
+            <a:ext cx="11368735" cy="274320"/>
+          </a:xfrm>
+          <a:prstGeom prst="rect">
+            <a:avLst/>
+          </a:prstGeom>
+          <a:noFill/>
+          <a:ln/>
+        </p:spPr>
+        <p:txBody>
+          <a:bodyPr wrap="square" lIns="0" tIns="0" rIns="0" bIns="0" rtlCol="0" anchor="ctr"/>
+          <a:lstStyle/>
+          <a:p>
+            <a:pPr algn="r" indent="0" marL="0">
+              <a:buNone/>
+            </a:pPr>
+            <a:r>
+              <a:rPr lang="en-US" sz="1400" b="1" dirty="0">
+                <a:solidFill>
+                  <a:srgbClr val="1C3F6E"/>
+                </a:solidFill>
+                <a:latin typeface="Calibri" pitchFamily="34" charset="0"/>
+                <a:ea typeface="Calibri" pitchFamily="34" charset="-122"/>
+                <a:cs typeface="Calibri" pitchFamily="34" charset="-120"/>
+              </a:rPr>
+              <a:t>REMEDIATION</a:t>
+            </a:r>
+            <a:endParaRPr lang="en-US" sz="1400" dirty="0"/>
+          </a:p>
+        </p:txBody>
+      </p:sp>
+      <p:pic>
+        <p:nvPicPr>
+          <p:cNvPr id="3" name="Image 0" descr="/home/claude/f4/img/minesec_sheet.png">    </p:cNvPr>
+          <p:cNvPicPr>
+            <a:picLocks noChangeAspect="1"/>
+          </p:cNvPicPr>
+          <p:nvPr/>
+        </p:nvPicPr>
+        <p:blipFill>
+          <a:blip r:embed="rId1"/>
+          <a:stretch>
+            <a:fillRect/>
+          </a:stretch>
+        </p:blipFill>
+        <p:spPr>
+          <a:xfrm>
+            <a:off x="0" y="658368"/>
+            <a:ext cx="3840480" cy="5833872"/>
+          </a:xfrm>
+          <a:prstGeom prst="rect">
+            <a:avLst/>
+          </a:prstGeom>
+        </p:spPr>
+      </p:pic>
+      <p:sp>
+        <p:nvSpPr>
+          <p:cNvPr id="4" name="Text 1"/>
+          <p:cNvSpPr/>
+          <p:nvPr/>
+        </p:nvSpPr>
+        <p:spPr>
+          <a:xfrm>
+            <a:off x="4069080" y="1005840"/>
+            <a:ext cx="7802575" cy="731520"/>
+          </a:xfrm>
+          <a:prstGeom prst="rect">
+            <a:avLst/>
+          </a:prstGeom>
+          <a:noFill/>
+          <a:ln/>
+        </p:spPr>
+        <p:txBody>
+          <a:bodyPr wrap="square" lIns="0" tIns="0" rIns="0" bIns="0" rtlCol="0" anchor="ctr">
+            <a:normAutofit/>
+          </a:bodyPr>
+          <a:lstStyle/>
+          <a:p>
+            <a:pPr algn="ctr" indent="0" marL="0">
+              <a:buNone/>
+            </a:pPr>
+            <a:r>
+              <a:rPr lang="en-US" sz="3600" b="1" dirty="0">
+                <a:solidFill>
+                  <a:srgbClr val="990011"/>
+                </a:solidFill>
+                <a:latin typeface="Times New Roman" pitchFamily="34" charset="0"/>
+                <a:ea typeface="Times New Roman" pitchFamily="34" charset="-122"/>
+                <a:cs typeface="Times New Roman" pitchFamily="34" charset="-120"/>
+              </a:rPr>
+              <a:t>Remediation</a:t>
+            </a:r>
+            <a:endParaRPr lang="en-US" sz="3600" dirty="0"/>
+          </a:p>
+        </p:txBody>
+      </p:sp>
+      <p:sp>
+        <p:nvSpPr>
+          <p:cNvPr id="5" name="Text 2"/>
+          <p:cNvSpPr/>
+          <p:nvPr/>
+        </p:nvSpPr>
+        <p:spPr>
+          <a:xfrm>
+            <a:off x="4069080" y="1783080"/>
+            <a:ext cx="7802575" cy="4663440"/>
+          </a:xfrm>
+          <a:prstGeom prst="rect">
+            <a:avLst/>
+          </a:prstGeom>
+          <a:noFill/>
+          <a:ln/>
+        </p:spPr>
+        <p:txBody>
+          <a:bodyPr wrap="square" lIns="0" tIns="0" rIns="0" bIns="0" rtlCol="0" anchor="t"/>
+          <a:lstStyle/>
+          <a:p>
+            <a:pPr algn="l" indent="0" marL="0">
+              <a:spcAft>
+                <a:spcPts val="800"/>
+              </a:spcAft>
+              <a:buNone/>
+            </a:pPr>
+            <a:r>
+              <a:rPr lang="en-US" sz="4000" b="1" dirty="0">
+                <a:solidFill>
+                  <a:srgbClr val="111111"/>
+                </a:solidFill>
+                <a:latin typeface="Times New Roman" pitchFamily="34" charset="0"/>
+                <a:ea typeface="Times New Roman" pitchFamily="34" charset="-122"/>
+                <a:cs typeface="Times New Roman" pitchFamily="34" charset="-120"/>
+              </a:rPr>
+              <a:t>Fill in the blanks:</a:t>
+            </a:r>
+            <a:endParaRPr lang="en-US" sz="4000" dirty="0"/>
+          </a:p>
+          <a:p>
+            <a:pPr algn="l" marL="342900" indent="-342900">
+              <a:spcAft>
+                <a:spcPts val="800"/>
+              </a:spcAft>
+              <a:buSzPct val="100000"/>
+              <a:buFont typeface="+mj-lt"/>
+              <a:buAutoNum type="arabicPeriod" startAt="1"/>
+            </a:pPr>
+            <a:r>
+              <a:rPr lang="en-US" sz="4000" dirty="0">
+                <a:solidFill>
+                  <a:srgbClr val="111111"/>
+                </a:solidFill>
+                <a:latin typeface="Times New Roman" pitchFamily="34" charset="0"/>
+                <a:ea typeface="Times New Roman" pitchFamily="34" charset="-122"/>
+                <a:cs typeface="Times New Roman" pitchFamily="34" charset="-120"/>
+              </a:rPr>
+              <a:t>Malthus published his essay in ______.</a:t>
+            </a:r>
+            <a:endParaRPr lang="en-US" sz="4000" dirty="0"/>
+          </a:p>
+          <a:p>
+            <a:pPr algn="l" marL="342900" indent="-342900">
+              <a:spcAft>
+                <a:spcPts val="800"/>
+              </a:spcAft>
+              <a:buSzPct val="100000"/>
+              <a:buFont typeface="+mj-lt"/>
+              <a:buAutoNum type="arabicPeriod" startAt="1"/>
+            </a:pPr>
+            <a:r>
+              <a:rPr lang="en-US" sz="4000" dirty="0">
+                <a:solidFill>
+                  <a:srgbClr val="111111"/>
+                </a:solidFill>
+                <a:latin typeface="Times New Roman" pitchFamily="34" charset="0"/>
+                <a:ea typeface="Times New Roman" pitchFamily="34" charset="-122"/>
+                <a:cs typeface="Times New Roman" pitchFamily="34" charset="-120"/>
+              </a:rPr>
+              <a:t>According to Malthus, food grows ______.</a:t>
+            </a:r>
+            <a:endParaRPr lang="en-US" sz="4000" dirty="0"/>
+          </a:p>
+          <a:p>
+            <a:pPr algn="l" marL="342900" indent="-342900">
+              <a:spcAft>
+                <a:spcPts val="800"/>
+              </a:spcAft>
+              <a:buSzPct val="100000"/>
+              <a:buFont typeface="+mj-lt"/>
+              <a:buAutoNum type="arabicPeriod" startAt="1"/>
+            </a:pPr>
+            <a:r>
+              <a:rPr lang="en-US" sz="4000" dirty="0">
+                <a:solidFill>
+                  <a:srgbClr val="111111"/>
+                </a:solidFill>
+                <a:latin typeface="Times New Roman" pitchFamily="34" charset="0"/>
+                <a:ea typeface="Times New Roman" pitchFamily="34" charset="-122"/>
+                <a:cs typeface="Times New Roman" pitchFamily="34" charset="-120"/>
+              </a:rPr>
+              <a:t>Boserup's theory is ______.</a:t>
+            </a:r>
+            <a:endParaRPr lang="en-US" sz="4000" dirty="0"/>
+          </a:p>
+        </p:txBody>
+      </p:sp>
+      <p:sp>
+        <p:nvSpPr>
+          <p:cNvPr id="25" name="Slide Number Placeholder 0"/>
+          <p:cNvSpPr>
+            <a:spLocks noGrp="1"/>
+          </p:cNvSpPr>
+          <p:nvPr>
+            <p:ph type="sldNum" sz="quarter" idx="4294967295"/>
+          </p:nvPr>
+        </p:nvSpPr>
+        <p:spPr>
+          <a:xfrm>
+            <a:off x="27432" y="91440"/>
+            <a:ext cx="585216" cy="475488"/>
+          </a:xfrm>
+          <a:prstGeom prst="rect">
+            <a:avLst/>
+          </a:prstGeom>
+          <a:extLst>
+            <a:ext uri="{C572A759-6A51-4108-AA02-DFA0A04FC94B}">
+              <ma14:wrappingTextBoxFlag xmlns:ma14="http://schemas.microsoft.com/office/mac/drawingml/2011/main" val="0"/>
+            </a:ext>
+          </a:extLst>
+        </p:spPr>
+        <p:txBody>
+          <a:bodyPr/>
+          <a:lstStyle>
+            <a:lvl1pPr>
+              <a:defRPr sz="2000">
+                <a:solidFill>
+                  <a:srgbClr val="FFFFFF"/>
+                </a:solidFill>
+                <a:latin typeface="Calibri"/>
+                <a:ea typeface="Calibri"/>
+                <a:cs typeface="Calibri"/>
+              </a:defRPr>
+            </a:lvl1pPr>
+          </a:lstStyle>
+          <a:p>
+            <a:pPr algn="ctr"/>
+            <a:fld id="{F7021451-1387-4CA6-816F-3879F97B5CBC}" type="slidenum">
+              <a:rPr b="1" lang="en-US"/>
+              <a:t>58</a:t>
+            </a:fld>
+            <a:endParaRPr lang="en-US"/>
+          </a:p>
+        </p:txBody>
+      </p:sp>
+    </p:spTree>
+  </p:cSld>
+  <p:clrMapOvr>
+    <a:masterClrMapping/>
+  </p:clrMapOvr>
+</p:sld>
+</file>
+
+<file path=ppt/slides/slide59.xml><?xml version="1.0" encoding="utf-8"?>
+<p:sld xmlns:a="http://schemas.openxmlformats.org/drawingml/2006/main" xmlns:r="http://schemas.openxmlformats.org/officeDocument/2006/relationships" xmlns:p="http://schemas.openxmlformats.org/presentationml/2006/main">
+  <p:cSld name="Slide 59">
+    <p:spTree>
+      <p:nvGrpSpPr>
+        <p:cNvPr id="1" name=""/>
+        <p:cNvGrpSpPr/>
+        <p:nvPr/>
+      </p:nvGrpSpPr>
+      <p:grpSpPr>
+        <a:xfrm>
+          <a:off x="0" y="0"/>
+          <a:ext cx="0" cy="0"/>
+          <a:chOff x="0" y="0"/>
+          <a:chExt cx="0" cy="0"/>
+        </a:xfrm>
+      </p:grpSpPr>
+      <p:sp>
+        <p:nvSpPr>
+          <p:cNvPr id="2" name="Text 0"/>
+          <p:cNvSpPr/>
+          <p:nvPr/>
+        </p:nvSpPr>
+        <p:spPr>
+          <a:xfrm>
+            <a:off x="457200" y="713232"/>
+            <a:ext cx="11368735" cy="274320"/>
+          </a:xfrm>
+          <a:prstGeom prst="rect">
+            <a:avLst/>
+          </a:prstGeom>
+          <a:noFill/>
+          <a:ln/>
+        </p:spPr>
+        <p:txBody>
+          <a:bodyPr wrap="square" lIns="0" tIns="0" rIns="0" bIns="0" rtlCol="0" anchor="ctr"/>
+          <a:lstStyle/>
+          <a:p>
+            <a:pPr algn="r" indent="0" marL="0">
+              <a:buNone/>
+            </a:pPr>
+            <a:r>
+              <a:rPr lang="en-US" sz="1400" b="1" dirty="0">
+                <a:solidFill>
+                  <a:srgbClr val="1C3F6E"/>
+                </a:solidFill>
+                <a:latin typeface="Calibri" pitchFamily="34" charset="0"/>
+                <a:ea typeface="Calibri" pitchFamily="34" charset="-122"/>
+                <a:cs typeface="Calibri" pitchFamily="34" charset="-120"/>
+              </a:rPr>
+              <a:t>HOMEWORK</a:t>
+            </a:r>
+            <a:endParaRPr lang="en-US" sz="1400" dirty="0"/>
+          </a:p>
+        </p:txBody>
+      </p:sp>
+      <p:pic>
+        <p:nvPicPr>
+          <p:cNvPr id="3" name="Image 0" descr="/home/claude/f4/img/minesec_sheet.png">    </p:cNvPr>
+          <p:cNvPicPr>
+            <a:picLocks noChangeAspect="1"/>
+          </p:cNvPicPr>
+          <p:nvPr/>
+        </p:nvPicPr>
+        <p:blipFill>
+          <a:blip r:embed="rId1"/>
+          <a:stretch>
+            <a:fillRect/>
+          </a:stretch>
+        </p:blipFill>
+        <p:spPr>
+          <a:xfrm>
+            <a:off x="0" y="658368"/>
+            <a:ext cx="5120640" cy="5833872"/>
+          </a:xfrm>
+          <a:prstGeom prst="rect">
+            <a:avLst/>
+          </a:prstGeom>
+        </p:spPr>
+      </p:pic>
+      <p:sp>
+        <p:nvSpPr>
+          <p:cNvPr id="4" name="Text 1"/>
+          <p:cNvSpPr/>
+          <p:nvPr/>
+        </p:nvSpPr>
+        <p:spPr>
+          <a:xfrm>
+            <a:off x="5349240" y="1005840"/>
+            <a:ext cx="6522415" cy="731520"/>
+          </a:xfrm>
+          <a:prstGeom prst="rect">
+            <a:avLst/>
+          </a:prstGeom>
+          <a:noFill/>
+          <a:ln/>
+        </p:spPr>
+        <p:txBody>
+          <a:bodyPr wrap="square" lIns="0" tIns="0" rIns="0" bIns="0" rtlCol="0" anchor="ctr">
+            <a:normAutofit/>
+          </a:bodyPr>
+          <a:lstStyle/>
+          <a:p>
+            <a:pPr algn="ctr" indent="0" marL="0">
+              <a:buNone/>
+            </a:pPr>
+            <a:r>
+              <a:rPr lang="en-US" sz="3600" b="1" dirty="0">
+                <a:solidFill>
+                  <a:srgbClr val="990011"/>
+                </a:solidFill>
+                <a:latin typeface="Times New Roman" pitchFamily="34" charset="0"/>
+                <a:ea typeface="Times New Roman" pitchFamily="34" charset="-122"/>
+                <a:cs typeface="Times New Roman" pitchFamily="34" charset="-120"/>
+              </a:rPr>
+              <a:t>Homework</a:t>
+            </a:r>
+            <a:endParaRPr lang="en-US" sz="3600" dirty="0"/>
+          </a:p>
+        </p:txBody>
+      </p:sp>
+      <p:sp>
+        <p:nvSpPr>
+          <p:cNvPr id="5" name="Text 2"/>
+          <p:cNvSpPr/>
+          <p:nvPr/>
+        </p:nvSpPr>
+        <p:spPr>
+          <a:xfrm>
+            <a:off x="5349240" y="1783080"/>
+            <a:ext cx="6522415" cy="4663440"/>
+          </a:xfrm>
+          <a:prstGeom prst="rect">
+            <a:avLst/>
+          </a:prstGeom>
+          <a:noFill/>
+          <a:ln/>
+        </p:spPr>
+        <p:txBody>
+          <a:bodyPr wrap="square" lIns="0" tIns="0" rIns="0" bIns="0" rtlCol="0" anchor="t"/>
+          <a:lstStyle/>
+          <a:p>
+            <a:pPr algn="l" indent="0" marL="0">
+              <a:spcAft>
+                <a:spcPts val="800"/>
+              </a:spcAft>
+              <a:buNone/>
+            </a:pPr>
+            <a:r>
+              <a:rPr lang="en-US" sz="4000" dirty="0">
+                <a:solidFill>
+                  <a:srgbClr val="111111"/>
+                </a:solidFill>
+                <a:latin typeface="Times New Roman" pitchFamily="34" charset="0"/>
+                <a:ea typeface="Times New Roman" pitchFamily="34" charset="-122"/>
+                <a:cs typeface="Times New Roman" pitchFamily="34" charset="-120"/>
+              </a:rPr>
+              <a:t>State the population of Cameroon at the 2005 census.</a:t>
+            </a:r>
+            <a:endParaRPr lang="en-US" sz="4000" dirty="0"/>
+          </a:p>
+        </p:txBody>
+      </p:sp>
+      <p:sp>
+        <p:nvSpPr>
+          <p:cNvPr id="25" name="Slide Number Placeholder 0"/>
+          <p:cNvSpPr>
+            <a:spLocks noGrp="1"/>
+          </p:cNvSpPr>
+          <p:nvPr>
+            <p:ph type="sldNum" sz="quarter" idx="4294967295"/>
+          </p:nvPr>
+        </p:nvSpPr>
+        <p:spPr>
+          <a:xfrm>
+            <a:off x="27432" y="91440"/>
+            <a:ext cx="585216" cy="475488"/>
+          </a:xfrm>
+          <a:prstGeom prst="rect">
+            <a:avLst/>
+          </a:prstGeom>
+          <a:extLst>
+            <a:ext uri="{C572A759-6A51-4108-AA02-DFA0A04FC94B}">
+              <ma14:wrappingTextBoxFlag xmlns:ma14="http://schemas.microsoft.com/office/mac/drawingml/2011/main" val="0"/>
+            </a:ext>
+          </a:extLst>
+        </p:spPr>
+        <p:txBody>
+          <a:bodyPr/>
+          <a:lstStyle>
+            <a:lvl1pPr>
+              <a:defRPr sz="2000">
+                <a:solidFill>
+                  <a:srgbClr val="FFFFFF"/>
+                </a:solidFill>
+                <a:latin typeface="Calibri"/>
+                <a:ea typeface="Calibri"/>
+                <a:cs typeface="Calibri"/>
+              </a:defRPr>
+            </a:lvl1pPr>
+          </a:lstStyle>
+          <a:p>
+            <a:pPr algn="ctr"/>
+            <a:fld id="{F7021451-1387-4CA6-816F-3879F97B5CBC}" type="slidenum">
+              <a:rPr b="1" lang="en-US"/>
+              <a:t>59</a:t>
+            </a:fld>
+            <a:endParaRPr lang="en-US"/>
+          </a:p>
+        </p:txBody>
+      </p:sp>
+    </p:spTree>
+  </p:cSld>
+  <p:clrMapOvr>
+    <a:masterClrMapping/>
+  </p:clrMapOvr>
+</p:sld>
+</file>
+
+<file path=ppt/slides/slide6.xml><?xml version="1.0" encoding="utf-8"?>
+<p:sld xmlns:a="http://schemas.openxmlformats.org/drawingml/2006/main" xmlns:r="http://schemas.openxmlformats.org/officeDocument/2006/relationships" xmlns:p="http://schemas.openxmlformats.org/presentationml/2006/main">
+  <p:cSld name="Slide 6">
+    <p:spTree>
+      <p:nvGrpSpPr>
+        <p:cNvPr id="1" name=""/>
+        <p:cNvGrpSpPr/>
+        <p:nvPr/>
+      </p:nvGrpSpPr>
+      <p:grpSpPr>
+        <a:xfrm>
+          <a:off x="0" y="0"/>
+          <a:ext cx="0" cy="0"/>
+          <a:chOff x="0" y="0"/>
+          <a:chExt cx="0" cy="0"/>
+        </a:xfrm>
+      </p:grpSpPr>
+      <p:sp>
+        <p:nvSpPr>
+          <p:cNvPr id="2" name="Text 0"/>
+          <p:cNvSpPr/>
+          <p:nvPr/>
+        </p:nvSpPr>
+        <p:spPr>
+          <a:xfrm>
+            <a:off x="457200" y="713232"/>
+            <a:ext cx="11368735" cy="274320"/>
+          </a:xfrm>
+          <a:prstGeom prst="rect">
+            <a:avLst/>
+          </a:prstGeom>
+          <a:noFill/>
+          <a:ln/>
+        </p:spPr>
+        <p:txBody>
+          <a:bodyPr wrap="square" lIns="0" tIns="0" rIns="0" bIns="0" rtlCol="0" anchor="ctr"/>
+          <a:lstStyle/>
+          <a:p>
+            <a:pPr algn="r" indent="0" marL="0">
+              <a:buNone/>
+            </a:pPr>
+            <a:r>
+              <a:rPr lang="en-US" sz="1400" b="1" dirty="0">
+                <a:solidFill>
+                  <a:srgbClr val="1C3F6E"/>
+                </a:solidFill>
+                <a:latin typeface="Calibri" pitchFamily="34" charset="0"/>
+                <a:ea typeface="Calibri" pitchFamily="34" charset="-122"/>
+                <a:cs typeface="Calibri" pitchFamily="34" charset="-120"/>
+              </a:rPr>
+              <a:t>LESSON PLAN</a:t>
+            </a:r>
+            <a:endParaRPr lang="en-US" sz="1400" dirty="0"/>
+          </a:p>
+        </p:txBody>
+      </p:sp>
+      <p:pic>
+        <p:nvPicPr>
+          <p:cNvPr id="3" name="Image 0" descr="/home/claude/f4/img/minesec_sheet.png">    </p:cNvPr>
+          <p:cNvPicPr>
+            <a:picLocks noChangeAspect="1"/>
+          </p:cNvPicPr>
+          <p:nvPr/>
+        </p:nvPicPr>
+        <p:blipFill>
+          <a:blip r:embed="rId1"/>
+          <a:stretch>
+            <a:fillRect/>
+          </a:stretch>
+        </p:blipFill>
+        <p:spPr>
+          <a:xfrm>
+            <a:off x="0" y="658368"/>
+            <a:ext cx="2468880" cy="5833872"/>
+          </a:xfrm>
+          <a:prstGeom prst="rect">
+            <a:avLst/>
+          </a:prstGeom>
+        </p:spPr>
+      </p:pic>
+      <p:sp>
+        <p:nvSpPr>
+          <p:cNvPr id="4" name="Text 1"/>
+          <p:cNvSpPr/>
+          <p:nvPr/>
+        </p:nvSpPr>
+        <p:spPr>
+          <a:xfrm>
+            <a:off x="2697480" y="1005840"/>
+            <a:ext cx="9174175" cy="731520"/>
+          </a:xfrm>
+          <a:prstGeom prst="rect">
+            <a:avLst/>
+          </a:prstGeom>
+          <a:noFill/>
+          <a:ln/>
+        </p:spPr>
+        <p:txBody>
+          <a:bodyPr wrap="square" lIns="0" tIns="0" rIns="0" bIns="0" rtlCol="0" anchor="ctr">
+            <a:normAutofit/>
+          </a:bodyPr>
+          <a:lstStyle/>
+          <a:p>
+            <a:pPr algn="ctr" indent="0" marL="0">
+              <a:buNone/>
+            </a:pPr>
+            <a:r>
+              <a:rPr lang="en-US" sz="3600" b="1" dirty="0">
+                <a:solidFill>
+                  <a:srgbClr val="990011"/>
+                </a:solidFill>
+                <a:latin typeface="Times New Roman" pitchFamily="34" charset="0"/>
+                <a:ea typeface="Times New Roman" pitchFamily="34" charset="-122"/>
+                <a:cs typeface="Times New Roman" pitchFamily="34" charset="-120"/>
+              </a:rPr>
+              <a:t>Lesson Plan</a:t>
+            </a:r>
+            <a:endParaRPr lang="en-US" sz="3600" dirty="0"/>
+          </a:p>
+        </p:txBody>
+      </p:sp>
+      <p:sp>
+        <p:nvSpPr>
+          <p:cNvPr id="5" name="Text 2"/>
+          <p:cNvSpPr/>
+          <p:nvPr/>
+        </p:nvSpPr>
+        <p:spPr>
+          <a:xfrm>
+            <a:off x="2697480" y="1783080"/>
+            <a:ext cx="9174175" cy="4663440"/>
+          </a:xfrm>
+          <a:prstGeom prst="rect">
+            <a:avLst/>
+          </a:prstGeom>
+          <a:noFill/>
+          <a:ln/>
+        </p:spPr>
+        <p:txBody>
+          <a:bodyPr wrap="square" lIns="0" tIns="0" rIns="0" bIns="0" rtlCol="0" anchor="t"/>
+          <a:lstStyle/>
+          <a:p>
+            <a:pPr algn="l" marL="342900" indent="-342900">
+              <a:spcAft>
+                <a:spcPts val="800"/>
+              </a:spcAft>
+              <a:buSzPct val="100000"/>
+              <a:buFont typeface="+mj-lt"/>
+              <a:buAutoNum type="arabicPeriod" startAt="1"/>
+            </a:pPr>
+            <a:r>
+              <a:rPr lang="en-US" sz="4000" dirty="0">
+                <a:solidFill>
+                  <a:srgbClr val="111111"/>
+                </a:solidFill>
+                <a:latin typeface="Times New Roman" pitchFamily="34" charset="0"/>
+                <a:ea typeface="Times New Roman" pitchFamily="34" charset="-122"/>
+                <a:cs typeface="Times New Roman" pitchFamily="34" charset="-120"/>
+              </a:rPr>
+              <a:t>Correction of the homework</a:t>
+            </a:r>
+            <a:endParaRPr lang="en-US" sz="4000" dirty="0"/>
+          </a:p>
+          <a:p>
+            <a:pPr algn="l" marL="342900" indent="-342900">
+              <a:spcAft>
+                <a:spcPts val="800"/>
+              </a:spcAft>
+              <a:buSzPct val="100000"/>
+              <a:buFont typeface="+mj-lt"/>
+              <a:buAutoNum type="arabicPeriod" startAt="1"/>
+            </a:pPr>
+            <a:r>
+              <a:rPr lang="en-US" sz="4000" dirty="0">
+                <a:solidFill>
+                  <a:srgbClr val="111111"/>
+                </a:solidFill>
+                <a:latin typeface="Times New Roman" pitchFamily="34" charset="0"/>
+                <a:ea typeface="Times New Roman" pitchFamily="34" charset="-122"/>
+                <a:cs typeface="Times New Roman" pitchFamily="34" charset="-120"/>
+              </a:rPr>
+              <a:t>Objectives and recall</a:t>
+            </a:r>
+            <a:endParaRPr lang="en-US" sz="4000" dirty="0"/>
+          </a:p>
+          <a:p>
+            <a:pPr algn="l" marL="342900" indent="-342900">
+              <a:spcAft>
+                <a:spcPts val="800"/>
+              </a:spcAft>
+              <a:buSzPct val="100000"/>
+              <a:buFont typeface="+mj-lt"/>
+              <a:buAutoNum type="arabicPeriod" startAt="1"/>
+            </a:pPr>
+            <a:r>
+              <a:rPr lang="en-US" sz="4000" dirty="0">
+                <a:solidFill>
+                  <a:srgbClr val="111111"/>
+                </a:solidFill>
+                <a:latin typeface="Times New Roman" pitchFamily="34" charset="0"/>
+                <a:ea typeface="Times New Roman" pitchFamily="34" charset="-122"/>
+                <a:cs typeface="Times New Roman" pitchFamily="34" charset="-120"/>
+              </a:rPr>
+              <a:t>Real-life situation and action to take</a:t>
+            </a:r>
+            <a:endParaRPr lang="en-US" sz="4000" dirty="0"/>
+          </a:p>
+          <a:p>
+            <a:pPr algn="l" marL="342900" indent="-342900">
+              <a:spcAft>
+                <a:spcPts val="800"/>
+              </a:spcAft>
+              <a:buSzPct val="100000"/>
+              <a:buFont typeface="+mj-lt"/>
+              <a:buAutoNum type="arabicPeriod" startAt="1"/>
+            </a:pPr>
+            <a:r>
+              <a:rPr lang="en-US" sz="4000" dirty="0">
+                <a:solidFill>
+                  <a:srgbClr val="111111"/>
+                </a:solidFill>
+                <a:latin typeface="Times New Roman" pitchFamily="34" charset="0"/>
+                <a:ea typeface="Times New Roman" pitchFamily="34" charset="-122"/>
+                <a:cs typeface="Times New Roman" pitchFamily="34" charset="-120"/>
+              </a:rPr>
+              <a:t>Learning activities</a:t>
+            </a:r>
+            <a:endParaRPr lang="en-US" sz="4000" dirty="0"/>
+          </a:p>
+          <a:p>
+            <a:pPr algn="l" marL="342900" indent="-342900">
+              <a:spcAft>
+                <a:spcPts val="800"/>
+              </a:spcAft>
+              <a:buSzPct val="100000"/>
+              <a:buFont typeface="+mj-lt"/>
+              <a:buAutoNum type="arabicPeriod" startAt="1"/>
+            </a:pPr>
+            <a:r>
+              <a:rPr lang="en-US" sz="4000" dirty="0">
+                <a:solidFill>
+                  <a:srgbClr val="111111"/>
+                </a:solidFill>
+                <a:latin typeface="Times New Roman" pitchFamily="34" charset="0"/>
+                <a:ea typeface="Times New Roman" pitchFamily="34" charset="-122"/>
+                <a:cs typeface="Times New Roman" pitchFamily="34" charset="-120"/>
+              </a:rPr>
+              <a:t>Board summary</a:t>
+            </a:r>
+            <a:endParaRPr lang="en-US" sz="4000" dirty="0"/>
+          </a:p>
+          <a:p>
+            <a:pPr algn="l" marL="342900" indent="-342900">
+              <a:spcAft>
+                <a:spcPts val="800"/>
+              </a:spcAft>
+              <a:buSzPct val="100000"/>
+              <a:buFont typeface="+mj-lt"/>
+              <a:buAutoNum type="arabicPeriod" startAt="1"/>
+            </a:pPr>
+            <a:r>
+              <a:rPr lang="en-US" sz="4000" dirty="0">
+                <a:solidFill>
+                  <a:srgbClr val="111111"/>
+                </a:solidFill>
+                <a:latin typeface="Times New Roman" pitchFamily="34" charset="0"/>
+                <a:ea typeface="Times New Roman" pitchFamily="34" charset="-122"/>
+                <a:cs typeface="Times New Roman" pitchFamily="34" charset="-120"/>
+              </a:rPr>
+              <a:t>Evaluation, remediation and homework</a:t>
+            </a:r>
+            <a:endParaRPr lang="en-US" sz="4000" dirty="0"/>
+          </a:p>
+        </p:txBody>
+      </p:sp>
+      <p:sp>
+        <p:nvSpPr>
+          <p:cNvPr id="25" name="Slide Number Placeholder 0"/>
+          <p:cNvSpPr>
+            <a:spLocks noGrp="1"/>
+          </p:cNvSpPr>
+          <p:nvPr>
+            <p:ph type="sldNum" sz="quarter" idx="4294967295"/>
+          </p:nvPr>
+        </p:nvSpPr>
+        <p:spPr>
+          <a:xfrm>
+            <a:off x="27432" y="91440"/>
+            <a:ext cx="585216" cy="475488"/>
+          </a:xfrm>
+          <a:prstGeom prst="rect">
+            <a:avLst/>
+          </a:prstGeom>
+          <a:extLst>
+            <a:ext uri="{C572A759-6A51-4108-AA02-DFA0A04FC94B}">
+              <ma14:wrappingTextBoxFlag xmlns:ma14="http://schemas.microsoft.com/office/mac/drawingml/2011/main" val="0"/>
+            </a:ext>
+          </a:extLst>
+        </p:spPr>
+        <p:txBody>
+          <a:bodyPr/>
+          <a:lstStyle>
+            <a:lvl1pPr>
+              <a:defRPr sz="2000">
+                <a:solidFill>
+                  <a:srgbClr val="FFFFFF"/>
+                </a:solidFill>
+                <a:latin typeface="Calibri"/>
+                <a:ea typeface="Calibri"/>
+                <a:cs typeface="Calibri"/>
+              </a:defRPr>
+            </a:lvl1pPr>
+          </a:lstStyle>
+          <a:p>
+            <a:pPr algn="ctr"/>
+            <a:fld id="{F7021451-1387-4CA6-816F-3879F97B5CBC}" type="slidenum">
+              <a:rPr b="1" lang="en-US"/>
+              <a:t>6</a:t>
+            </a:fld>
+            <a:endParaRPr lang="en-US"/>
+          </a:p>
+        </p:txBody>
+      </p:sp>
+    </p:spTree>
+  </p:cSld>
+  <p:clrMapOvr>
+    <a:masterClrMapping/>
+  </p:clrMapOvr>
+</p:sld>
+</file>
+
+<file path=ppt/slides/slide60.xml><?xml version="1.0" encoding="utf-8"?>
+<p:sld xmlns:a="http://schemas.openxmlformats.org/drawingml/2006/main" xmlns:r="http://schemas.openxmlformats.org/officeDocument/2006/relationships" xmlns:p="http://schemas.openxmlformats.org/presentationml/2006/main">
+  <p:cSld name="Slide 60">
+    <p:spTree>
+      <p:nvGrpSpPr>
+        <p:cNvPr id="1" name=""/>
+        <p:cNvGrpSpPr/>
+        <p:nvPr/>
+      </p:nvGrpSpPr>
+      <p:grpSpPr>
+        <a:xfrm>
+          <a:off x="0" y="0"/>
+          <a:ext cx="0" cy="0"/>
+          <a:chOff x="0" y="0"/>
+          <a:chExt cx="0" cy="0"/>
+        </a:xfrm>
+      </p:grpSpPr>
+      <p:sp>
+        <p:nvSpPr>
+          <p:cNvPr id="2" name="Text 0"/>
+          <p:cNvSpPr/>
+          <p:nvPr/>
+        </p:nvSpPr>
+        <p:spPr>
+          <a:xfrm>
+            <a:off x="457200" y="713232"/>
+            <a:ext cx="11368735" cy="274320"/>
+          </a:xfrm>
+          <a:prstGeom prst="rect">
+            <a:avLst/>
+          </a:prstGeom>
+          <a:noFill/>
+          <a:ln/>
+        </p:spPr>
+        <p:txBody>
+          <a:bodyPr wrap="square" lIns="0" tIns="0" rIns="0" bIns="0" rtlCol="0" anchor="ctr"/>
+          <a:lstStyle/>
+          <a:p>
+            <a:pPr algn="r" indent="0" marL="0">
+              <a:buNone/>
+            </a:pPr>
+            <a:r>
+              <a:rPr lang="en-US" sz="1400" b="1" dirty="0">
+                <a:solidFill>
+                  <a:srgbClr val="1C3F6E"/>
+                </a:solidFill>
+                <a:latin typeface="Calibri" pitchFamily="34" charset="0"/>
+                <a:ea typeface="Calibri" pitchFamily="34" charset="-122"/>
+                <a:cs typeface="Calibri" pitchFamily="34" charset="-120"/>
+              </a:rPr>
+              <a:t>NEXT LESSON</a:t>
+            </a:r>
+            <a:endParaRPr lang="en-US" sz="1400" dirty="0"/>
+          </a:p>
+        </p:txBody>
+      </p:sp>
+      <p:pic>
+        <p:nvPicPr>
+          <p:cNvPr id="3" name="Image 0" descr="/home/claude/f4/img/minesec_sheet.png">    </p:cNvPr>
+          <p:cNvPicPr>
+            <a:picLocks noChangeAspect="1"/>
+          </p:cNvPicPr>
+          <p:nvPr/>
+        </p:nvPicPr>
+        <p:blipFill>
+          <a:blip r:embed="rId1"/>
+          <a:stretch>
+            <a:fillRect/>
+          </a:stretch>
+        </p:blipFill>
+        <p:spPr>
+          <a:xfrm>
+            <a:off x="0" y="658368"/>
+            <a:ext cx="5120640" cy="5833872"/>
+          </a:xfrm>
+          <a:prstGeom prst="rect">
+            <a:avLst/>
+          </a:prstGeom>
+        </p:spPr>
+      </p:pic>
+      <p:sp>
+        <p:nvSpPr>
+          <p:cNvPr id="4" name="Text 1"/>
+          <p:cNvSpPr/>
+          <p:nvPr/>
+        </p:nvSpPr>
+        <p:spPr>
+          <a:xfrm>
+            <a:off x="5349240" y="1005840"/>
+            <a:ext cx="6522415" cy="731520"/>
+          </a:xfrm>
+          <a:prstGeom prst="rect">
+            <a:avLst/>
+          </a:prstGeom>
+          <a:noFill/>
+          <a:ln/>
+        </p:spPr>
+        <p:txBody>
+          <a:bodyPr wrap="square" lIns="0" tIns="0" rIns="0" bIns="0" rtlCol="0" anchor="ctr">
+            <a:normAutofit/>
+          </a:bodyPr>
+          <a:lstStyle/>
+          <a:p>
+            <a:pPr algn="ctr" indent="0" marL="0">
+              <a:buNone/>
+            </a:pPr>
+            <a:r>
+              <a:rPr lang="en-US" sz="3600" b="1" dirty="0">
+                <a:solidFill>
+                  <a:srgbClr val="990011"/>
+                </a:solidFill>
+                <a:latin typeface="Times New Roman" pitchFamily="34" charset="0"/>
+                <a:ea typeface="Times New Roman" pitchFamily="34" charset="-122"/>
+                <a:cs typeface="Times New Roman" pitchFamily="34" charset="-120"/>
+              </a:rPr>
+              <a:t>Next Lesson</a:t>
+            </a:r>
+            <a:endParaRPr lang="en-US" sz="3600" dirty="0"/>
+          </a:p>
+        </p:txBody>
+      </p:sp>
+      <p:sp>
+        <p:nvSpPr>
+          <p:cNvPr id="5" name="Text 2"/>
+          <p:cNvSpPr/>
+          <p:nvPr/>
+        </p:nvSpPr>
+        <p:spPr>
+          <a:xfrm>
+            <a:off x="5349240" y="1783080"/>
+            <a:ext cx="6522415" cy="4663440"/>
+          </a:xfrm>
+          <a:prstGeom prst="rect">
+            <a:avLst/>
+          </a:prstGeom>
+          <a:noFill/>
+          <a:ln/>
+        </p:spPr>
+        <p:txBody>
+          <a:bodyPr wrap="square" lIns="0" tIns="0" rIns="0" bIns="0" rtlCol="0" anchor="ctr"/>
+          <a:lstStyle/>
+          <a:p>
+            <a:pPr algn="ctr" indent="0" marL="0">
+              <a:spcAft>
+                <a:spcPts val="800"/>
+              </a:spcAft>
+              <a:buNone/>
+            </a:pPr>
+            <a:r>
+              <a:rPr lang="en-US" sz="4000" b="1" dirty="0">
+                <a:solidFill>
+                  <a:srgbClr val="111111"/>
+                </a:solidFill>
+                <a:latin typeface="Times New Roman" pitchFamily="34" charset="0"/>
+                <a:ea typeface="Times New Roman" pitchFamily="34" charset="-122"/>
+                <a:cs typeface="Times New Roman" pitchFamily="34" charset="-120"/>
+              </a:rPr>
+              <a:t>Our next lesson will be on:</a:t>
+            </a:r>
+            <a:endParaRPr lang="en-US" sz="4000" dirty="0"/>
+          </a:p>
+          <a:p>
+            <a:pPr algn="ctr" indent="0" marL="0">
+              <a:spcAft>
+                <a:spcPts val="800"/>
+              </a:spcAft>
+              <a:buNone/>
+            </a:pPr>
+            <a:r>
+              <a:rPr lang="en-US" sz="4000" b="1" dirty="0">
+                <a:solidFill>
+                  <a:srgbClr val="990011"/>
+                </a:solidFill>
+                <a:latin typeface="Times New Roman" pitchFamily="34" charset="0"/>
+                <a:ea typeface="Times New Roman" pitchFamily="34" charset="-122"/>
+                <a:cs typeface="Times New Roman" pitchFamily="34" charset="-120"/>
+              </a:rPr>
+              <a:t>Further Study 1: Population Change in Cameroon</a:t>
+            </a:r>
+            <a:endParaRPr lang="en-US" sz="4000" dirty="0"/>
+          </a:p>
+        </p:txBody>
+      </p:sp>
+      <p:sp>
+        <p:nvSpPr>
+          <p:cNvPr id="25" name="Slide Number Placeholder 0"/>
+          <p:cNvSpPr>
+            <a:spLocks noGrp="1"/>
+          </p:cNvSpPr>
+          <p:nvPr>
+            <p:ph type="sldNum" sz="quarter" idx="4294967295"/>
+          </p:nvPr>
+        </p:nvSpPr>
+        <p:spPr>
+          <a:xfrm>
+            <a:off x="27432" y="91440"/>
+            <a:ext cx="585216" cy="475488"/>
+          </a:xfrm>
+          <a:prstGeom prst="rect">
+            <a:avLst/>
+          </a:prstGeom>
+          <a:extLst>
+            <a:ext uri="{C572A759-6A51-4108-AA02-DFA0A04FC94B}">
+              <ma14:wrappingTextBoxFlag xmlns:ma14="http://schemas.microsoft.com/office/mac/drawingml/2011/main" val="0"/>
+            </a:ext>
+          </a:extLst>
+        </p:spPr>
+        <p:txBody>
+          <a:bodyPr/>
+          <a:lstStyle>
+            <a:lvl1pPr>
+              <a:defRPr sz="2000">
+                <a:solidFill>
+                  <a:srgbClr val="FFFFFF"/>
+                </a:solidFill>
+                <a:latin typeface="Calibri"/>
+                <a:ea typeface="Calibri"/>
+                <a:cs typeface="Calibri"/>
+              </a:defRPr>
+            </a:lvl1pPr>
+          </a:lstStyle>
+          <a:p>
+            <a:pPr algn="ctr"/>
+            <a:fld id="{F7021451-1387-4CA6-816F-3879F97B5CBC}" type="slidenum">
+              <a:rPr b="1" lang="en-US"/>
+              <a:t>60</a:t>
+            </a:fld>
+            <a:endParaRPr lang="en-US"/>
+          </a:p>
+        </p:txBody>
+      </p:sp>
+    </p:spTree>
+  </p:cSld>
+  <p:clrMapOvr>
+    <a:masterClrMapping/>
+  </p:clrMapOvr>
+</p:sld>
+</file>
+
+<file path=ppt/slides/slide61.xml><?xml version="1.0" encoding="utf-8"?>
+<p:sld xmlns:a="http://schemas.openxmlformats.org/drawingml/2006/main" xmlns:r="http://schemas.openxmlformats.org/officeDocument/2006/relationships" xmlns:p="http://schemas.openxmlformats.org/presentationml/2006/main">
+  <p:cSld name="Slide 61">
+    <p:spTree>
+      <p:nvGrpSpPr>
+        <p:cNvPr id="1" name=""/>
+        <p:cNvGrpSpPr/>
+        <p:nvPr/>
+      </p:nvGrpSpPr>
+      <p:grpSpPr>
+        <a:xfrm>
+          <a:off x="0" y="0"/>
+          <a:ext cx="0" cy="0"/>
+          <a:chOff x="0" y="0"/>
+          <a:chExt cx="0" cy="0"/>
+        </a:xfrm>
+      </p:grpSpPr>
+      <p:sp>
+        <p:nvSpPr>
+          <p:cNvPr id="2" name="Text 0"/>
+          <p:cNvSpPr/>
+          <p:nvPr/>
+        </p:nvSpPr>
+        <p:spPr>
+          <a:xfrm>
+            <a:off x="457200" y="713232"/>
+            <a:ext cx="11368735" cy="274320"/>
+          </a:xfrm>
+          <a:prstGeom prst="rect">
+            <a:avLst/>
+          </a:prstGeom>
+          <a:noFill/>
+          <a:ln/>
+        </p:spPr>
+        <p:txBody>
+          <a:bodyPr wrap="square" lIns="0" tIns="0" rIns="0" bIns="0" rtlCol="0" anchor="ctr"/>
+          <a:lstStyle/>
+          <a:p>
+            <a:pPr algn="r" indent="0" marL="0">
+              <a:buNone/>
+            </a:pPr>
+            <a:r>
+              <a:rPr lang="en-US" sz="1400" b="1" dirty="0">
+                <a:solidFill>
+                  <a:srgbClr val="1C3F6E"/>
+                </a:solidFill>
+                <a:latin typeface="Calibri" pitchFamily="34" charset="0"/>
+                <a:ea typeface="Calibri" pitchFamily="34" charset="-122"/>
+                <a:cs typeface="Calibri" pitchFamily="34" charset="-120"/>
+              </a:rPr>
+              <a:t>BILINGUAL GAME</a:t>
+            </a:r>
+            <a:endParaRPr lang="en-US" sz="1400" dirty="0"/>
+          </a:p>
+        </p:txBody>
+      </p:sp>
+      <p:sp>
+        <p:nvSpPr>
+          <p:cNvPr id="3" name="Text 1"/>
+          <p:cNvSpPr/>
+          <p:nvPr/>
+        </p:nvSpPr>
+        <p:spPr>
+          <a:xfrm>
+            <a:off x="457200" y="1005840"/>
+            <a:ext cx="11277295" cy="731520"/>
+          </a:xfrm>
+          <a:prstGeom prst="rect">
+            <a:avLst/>
+          </a:prstGeom>
+          <a:noFill/>
+          <a:ln/>
+        </p:spPr>
+        <p:txBody>
+          <a:bodyPr wrap="square" lIns="0" tIns="0" rIns="0" bIns="0" rtlCol="0" anchor="ctr"/>
+          <a:lstStyle/>
+          <a:p>
+            <a:pPr algn="ctr" indent="0" marL="0">
+              <a:buNone/>
+            </a:pPr>
+            <a:r>
+              <a:rPr lang="en-US" sz="3600" b="1" dirty="0">
+                <a:solidFill>
+                  <a:srgbClr val="990011"/>
+                </a:solidFill>
+                <a:latin typeface="Times New Roman" pitchFamily="34" charset="0"/>
+                <a:ea typeface="Times New Roman" pitchFamily="34" charset="-122"/>
+                <a:cs typeface="Times New Roman" pitchFamily="34" charset="-120"/>
+              </a:rPr>
               <a:t>Bilingual Game (Jeu Bilingue)</a:t>
             </a:r>
             <a:endParaRPr lang="en-US" sz="3600" dirty="0"/>
@@ -17752,7 +22065,7 @@
       </p:sp>
       <p:graphicFrame>
         <p:nvGraphicFramePr>
-          <p:cNvPr id="51" name="Table 0"/>
+          <p:cNvPr id="62" name="Table 0"/>
           <p:cNvGraphicFramePr>
             <a:graphicFrameLocks noGrp="1"/>
           </p:cNvGraphicFramePr>
@@ -17910,6 +22223,282 @@
                     </a:lnB>
                     <a:solidFill>
                       <a:srgbClr val="990011"/>
+                    </a:solidFill>
+                  </a:tcPr>
+                </a:tc>
+              </a:tr>
+              <a:tr h="0">
+                <a:tc>
+                  <a:txBody>
+                    <a:bodyPr/>
+                    <a:lstStyle/>
+                    <a:p>
+                      <a:pPr algn="ctr" indent="0" marL="0">
+                        <a:buNone/>
+                      </a:pPr>
+                      <a:r>
+                        <a:rPr lang="en-US" sz="2200" dirty="0">
+                          <a:solidFill>
+                            <a:srgbClr val="111111"/>
+                          </a:solidFill>
+                          <a:latin typeface="Calibri" pitchFamily="34" charset="0"/>
+                          <a:ea typeface="Calibri" pitchFamily="34" charset="-122"/>
+                          <a:cs typeface="Calibri" pitchFamily="34" charset="-120"/>
+                        </a:rPr>
+                        <a:t>Population growth</a:t>
+                      </a:r>
+                      <a:endParaRPr lang="en-US" sz="2200" dirty="0">
+                        <a:latin typeface="Calibri" charset="0"/>
+                        <a:ea typeface="Calibri" charset="0"/>
+                        <a:cs typeface="Calibri" charset="0"/>
+                      </a:endParaRPr>
+                    </a:p>
+                  </a:txBody>
+                  <a:tcPr marL="73152" marR="73152" marT="73152" marB="73152" anchor="ctr">
+                    <a:lnL w="12700" cap="flat" cmpd="sng" algn="ctr">
+                      <a:solidFill>
+                        <a:srgbClr val="BBBBBB"/>
+                      </a:solidFill>
+                      <a:prstDash val="solid"/>
+                      <a:round/>
+                      <a:headEnd type="none" w="med" len="med"/>
+                      <a:tailEnd type="none" w="med" len="med"/>
+                    </a:lnL>
+                    <a:lnR w="12700" cap="flat" cmpd="sng" algn="ctr">
+                      <a:solidFill>
+                        <a:srgbClr val="BBBBBB"/>
+                      </a:solidFill>
+                      <a:prstDash val="solid"/>
+                      <a:round/>
+                      <a:headEnd type="none" w="med" len="med"/>
+                      <a:tailEnd type="none" w="med" len="med"/>
+                    </a:lnR>
+                    <a:lnT w="12700" cap="flat" cmpd="sng" algn="ctr">
+                      <a:solidFill>
+                        <a:srgbClr val="BBBBBB"/>
+                      </a:solidFill>
+                      <a:prstDash val="solid"/>
+                      <a:round/>
+                      <a:headEnd type="none" w="med" len="med"/>
+                      <a:tailEnd type="none" w="med" len="med"/>
+                    </a:lnT>
+                    <a:lnB w="12700" cap="flat" cmpd="sng" algn="ctr">
+                      <a:solidFill>
+                        <a:srgbClr val="BBBBBB"/>
+                      </a:solidFill>
+                      <a:prstDash val="solid"/>
+                      <a:round/>
+                      <a:headEnd type="none" w="med" len="med"/>
+                      <a:tailEnd type="none" w="med" len="med"/>
+                    </a:lnB>
+                    <a:solidFill>
+                      <a:srgbClr val="FFFFFF"/>
+                    </a:solidFill>
+                  </a:tcPr>
+                </a:tc>
+                <a:tc>
+                  <a:txBody>
+                    <a:bodyPr/>
+                    <a:lstStyle/>
+                    <a:p>
+                      <a:pPr algn="ctr" indent="0" marL="0">
+                        <a:buNone/>
+                      </a:pPr>
+                      <a:r>
+                        <a:rPr lang="en-US" sz="2200" dirty="0">
+                          <a:solidFill>
+                            <a:srgbClr val="111111"/>
+                          </a:solidFill>
+                          <a:latin typeface="Calibri" pitchFamily="34" charset="0"/>
+                          <a:ea typeface="Calibri" pitchFamily="34" charset="-122"/>
+                          <a:cs typeface="Calibri" pitchFamily="34" charset="-120"/>
+                        </a:rPr>
+                        <a:t>La croissance démographique</a:t>
+                      </a:r>
+                      <a:endParaRPr lang="en-US" sz="2200" dirty="0">
+                        <a:latin typeface="Calibri" charset="0"/>
+                        <a:ea typeface="Calibri" charset="0"/>
+                        <a:cs typeface="Calibri" charset="0"/>
+                      </a:endParaRPr>
+                    </a:p>
+                  </a:txBody>
+                  <a:tcPr marL="73152" marR="73152" marT="73152" marB="73152" anchor="ctr">
+                    <a:lnL w="12700" cap="flat" cmpd="sng" algn="ctr">
+                      <a:solidFill>
+                        <a:srgbClr val="BBBBBB"/>
+                      </a:solidFill>
+                      <a:prstDash val="solid"/>
+                      <a:round/>
+                      <a:headEnd type="none" w="med" len="med"/>
+                      <a:tailEnd type="none" w="med" len="med"/>
+                    </a:lnL>
+                    <a:lnR w="12700" cap="flat" cmpd="sng" algn="ctr">
+                      <a:solidFill>
+                        <a:srgbClr val="BBBBBB"/>
+                      </a:solidFill>
+                      <a:prstDash val="solid"/>
+                      <a:round/>
+                      <a:headEnd type="none" w="med" len="med"/>
+                      <a:tailEnd type="none" w="med" len="med"/>
+                    </a:lnR>
+                    <a:lnT w="12700" cap="flat" cmpd="sng" algn="ctr">
+                      <a:solidFill>
+                        <a:srgbClr val="BBBBBB"/>
+                      </a:solidFill>
+                      <a:prstDash val="solid"/>
+                      <a:round/>
+                      <a:headEnd type="none" w="med" len="med"/>
+                      <a:tailEnd type="none" w="med" len="med"/>
+                    </a:lnT>
+                    <a:lnB w="12700" cap="flat" cmpd="sng" algn="ctr">
+                      <a:solidFill>
+                        <a:srgbClr val="BBBBBB"/>
+                      </a:solidFill>
+                      <a:prstDash val="solid"/>
+                      <a:round/>
+                      <a:headEnd type="none" w="med" len="med"/>
+                      <a:tailEnd type="none" w="med" len="med"/>
+                    </a:lnB>
+                    <a:solidFill>
+                      <a:srgbClr val="FFFFFF"/>
+                    </a:solidFill>
+                  </a:tcPr>
+                </a:tc>
+              </a:tr>
+              <a:tr h="0">
+                <a:tc>
+                  <a:txBody>
+                    <a:bodyPr/>
+                    <a:lstStyle/>
+                    <a:p>
+                      <a:pPr algn="ctr" indent="0" marL="0">
+                        <a:buNone/>
+                      </a:pPr>
+                      <a:r>
+                        <a:rPr lang="en-US" sz="2200" dirty="0">
+                          <a:solidFill>
+                            <a:srgbClr val="111111"/>
+                          </a:solidFill>
+                          <a:latin typeface="Calibri" pitchFamily="34" charset="0"/>
+                          <a:ea typeface="Calibri" pitchFamily="34" charset="-122"/>
+                          <a:cs typeface="Calibri" pitchFamily="34" charset="-120"/>
+                        </a:rPr>
+                        <a:t>Resources</a:t>
+                      </a:r>
+                      <a:endParaRPr lang="en-US" sz="2200" dirty="0">
+                        <a:latin typeface="Calibri" charset="0"/>
+                        <a:ea typeface="Calibri" charset="0"/>
+                        <a:cs typeface="Calibri" charset="0"/>
+                      </a:endParaRPr>
+                    </a:p>
+                  </a:txBody>
+                  <a:tcPr marL="73152" marR="73152" marT="73152" marB="73152" anchor="ctr">
+                    <a:lnL w="12700" cap="flat" cmpd="sng" algn="ctr">
+                      <a:solidFill>
+                        <a:srgbClr val="BBBBBB"/>
+                      </a:solidFill>
+                      <a:prstDash val="solid"/>
+                      <a:round/>
+                      <a:headEnd type="none" w="med" len="med"/>
+                      <a:tailEnd type="none" w="med" len="med"/>
+                    </a:lnL>
+                    <a:lnR w="12700" cap="flat" cmpd="sng" algn="ctr">
+                      <a:solidFill>
+                        <a:srgbClr val="BBBBBB"/>
+                      </a:solidFill>
+                      <a:prstDash val="solid"/>
+                      <a:round/>
+                      <a:headEnd type="none" w="med" len="med"/>
+                      <a:tailEnd type="none" w="med" len="med"/>
+                    </a:lnR>
+                    <a:lnT w="12700" cap="flat" cmpd="sng" algn="ctr">
+                      <a:solidFill>
+                        <a:srgbClr val="BBBBBB"/>
+                      </a:solidFill>
+                      <a:prstDash val="solid"/>
+                      <a:round/>
+                      <a:headEnd type="none" w="med" len="med"/>
+                      <a:tailEnd type="none" w="med" len="med"/>
+                    </a:lnT>
+                    <a:lnB w="12700" cap="flat" cmpd="sng" algn="ctr">
+                      <a:solidFill>
+                        <a:srgbClr val="BBBBBB"/>
+                      </a:solidFill>
+                      <a:prstDash val="solid"/>
+                      <a:round/>
+                      <a:headEnd type="none" w="med" len="med"/>
+                      <a:tailEnd type="none" w="med" len="med"/>
+                    </a:lnB>
+                    <a:solidFill>
+                      <a:srgbClr val="F2F4F8"/>
+                    </a:solidFill>
+                  </a:tcPr>
+                </a:tc>
+                <a:tc>
+                  <a:txBody>
+                    <a:bodyPr/>
+                    <a:lstStyle/>
+                    <a:p>
+                      <a:pPr algn="ctr" indent="0" marL="0">
+                        <a:buNone/>
+                      </a:pPr>
+                      <a:r>
+                        <a:rPr lang="en-US" sz="2200" dirty="0">
+                          <a:solidFill>
+                            <a:srgbClr val="111111"/>
+                          </a:solidFill>
+                          <a:latin typeface="Calibri" pitchFamily="34" charset="0"/>
+                          <a:ea typeface="Calibri" pitchFamily="34" charset="-122"/>
+                          <a:cs typeface="Calibri" pitchFamily="34" charset="-120"/>
+                        </a:rPr>
+                        <a:t>Les ressources</a:t>
+                      </a:r>
+                      <a:endParaRPr lang="en-US" sz="2200" dirty="0">
+                        <a:latin typeface="Calibri" charset="0"/>
+                        <a:ea typeface="Calibri" charset="0"/>
+                        <a:cs typeface="Calibri" charset="0"/>
+                      </a:endParaRPr>
+                    </a:p>
+                  </a:txBody>
+                  <a:tcPr marL="73152" marR="73152" marT="73152" marB="73152" anchor="ctr">
+                    <a:lnL w="12700" cap="flat" cmpd="sng" algn="ctr">
+                      <a:solidFill>
+                        <a:srgbClr val="BBBBBB"/>
+                      </a:solidFill>
+                      <a:prstDash val="solid"/>
+                      <a:round/>
+                      <a:headEnd type="none" w="med" len="med"/>
+                      <a:tailEnd type="none" w="med" len="med"/>
+                    </a:lnL>
+                    <a:lnR w="12700" cap="flat" cmpd="sng" algn="ctr">
+                      <a:solidFill>
+                        <a:srgbClr val="BBBBBB"/>
+                      </a:solidFill>
+                      <a:prstDash val="solid"/>
+                      <a:round/>
+                      <a:headEnd type="none" w="med" len="med"/>
+                      <a:tailEnd type="none" w="med" len="med"/>
+                    </a:lnR>
+                    <a:lnT w="12700" cap="flat" cmpd="sng" algn="ctr">
+                      <a:solidFill>
+                        <a:srgbClr val="BBBBBB"/>
+                      </a:solidFill>
+                      <a:prstDash val="solid"/>
+                      <a:round/>
+                      <a:headEnd type="none" w="med" len="med"/>
+                      <a:tailEnd type="none" w="med" len="med"/>
+                    </a:lnT>
+                    <a:lnB w="12700" cap="flat" cmpd="sng" algn="ctr">
+                      <a:solidFill>
+                        <a:srgbClr val="BBBBBB"/>
+                      </a:solidFill>
+                      <a:prstDash val="solid"/>
+                      <a:round/>
+                      <a:headEnd type="none" w="med" len="med"/>
+                      <a:tailEnd type="none" w="med" len="med"/>
+                    </a:lnB>
+                    <a:solidFill>
+                      <a:srgbClr val="F2F4F8"/>
                     </a:solidFill>
                   </a:tcPr>
                 </a:tc>
@@ -18208,7 +22797,7 @@
                           <a:ea typeface="Calibri" pitchFamily="34" charset="-122"/>
                           <a:cs typeface="Calibri" pitchFamily="34" charset="-120"/>
                         </a:rPr>
-                        <a:t>Check</a:t>
+                        <a:t>Invention</a:t>
                       </a:r>
                       <a:endParaRPr lang="en-US" sz="2200" dirty="0">
                         <a:latin typeface="Calibri" charset="0"/>
@@ -18276,7 +22865,7 @@
                           <a:ea typeface="Calibri" pitchFamily="34" charset="-122"/>
                           <a:cs typeface="Calibri" pitchFamily="34" charset="-120"/>
                         </a:rPr>
-                        <a:t>Le frein</a:t>
+                        <a:t>L'invention</a:t>
                       </a:r>
                       <a:endParaRPr lang="en-US" sz="2200" dirty="0">
                         <a:latin typeface="Calibri" charset="0"/>
@@ -18346,7 +22935,7 @@
                           <a:ea typeface="Calibri" pitchFamily="34" charset="-122"/>
                           <a:cs typeface="Calibri" pitchFamily="34" charset="-120"/>
                         </a:rPr>
-                        <a:t>Innovation</a:t>
+                        <a:t>Intensification</a:t>
                       </a:r>
                       <a:endParaRPr lang="en-US" sz="2200" dirty="0">
                         <a:latin typeface="Calibri" charset="0"/>
@@ -18414,283 +23003,7 @@
                           <a:ea typeface="Calibri" pitchFamily="34" charset="-122"/>
                           <a:cs typeface="Calibri" pitchFamily="34" charset="-120"/>
                         </a:rPr>
-                        <a:t>L'innovation</a:t>
-                      </a:r>
-                      <a:endParaRPr lang="en-US" sz="2200" dirty="0">
-                        <a:latin typeface="Calibri" charset="0"/>
-                        <a:ea typeface="Calibri" charset="0"/>
-                        <a:cs typeface="Calibri" charset="0"/>
-                      </a:endParaRPr>
-                    </a:p>
-                  </a:txBody>
-                  <a:tcPr marL="73152" marR="73152" marT="73152" marB="73152" anchor="ctr">
-                    <a:lnL w="12700" cap="flat" cmpd="sng" algn="ctr">
-                      <a:solidFill>
-                        <a:srgbClr val="BBBBBB"/>
-                      </a:solidFill>
-                      <a:prstDash val="solid"/>
-                      <a:round/>
-                      <a:headEnd type="none" w="med" len="med"/>
-                      <a:tailEnd type="none" w="med" len="med"/>
-                    </a:lnL>
-                    <a:lnR w="12700" cap="flat" cmpd="sng" algn="ctr">
-                      <a:solidFill>
-                        <a:srgbClr val="BBBBBB"/>
-                      </a:solidFill>
-                      <a:prstDash val="solid"/>
-                      <a:round/>
-                      <a:headEnd type="none" w="med" len="med"/>
-                      <a:tailEnd type="none" w="med" len="med"/>
-                    </a:lnR>
-                    <a:lnT w="12700" cap="flat" cmpd="sng" algn="ctr">
-                      <a:solidFill>
-                        <a:srgbClr val="BBBBBB"/>
-                      </a:solidFill>
-                      <a:prstDash val="solid"/>
-                      <a:round/>
-                      <a:headEnd type="none" w="med" len="med"/>
-                      <a:tailEnd type="none" w="med" len="med"/>
-                    </a:lnT>
-                    <a:lnB w="12700" cap="flat" cmpd="sng" algn="ctr">
-                      <a:solidFill>
-                        <a:srgbClr val="BBBBBB"/>
-                      </a:solidFill>
-                      <a:prstDash val="solid"/>
-                      <a:round/>
-                      <a:headEnd type="none" w="med" len="med"/>
-                      <a:tailEnd type="none" w="med" len="med"/>
-                    </a:lnB>
-                    <a:solidFill>
-                      <a:srgbClr val="F2F4F8"/>
-                    </a:solidFill>
-                  </a:tcPr>
-                </a:tc>
-              </a:tr>
-              <a:tr h="0">
-                <a:tc>
-                  <a:txBody>
-                    <a:bodyPr/>
-                    <a:lstStyle/>
-                    <a:p>
-                      <a:pPr algn="ctr" indent="0" marL="0">
-                        <a:buNone/>
-                      </a:pPr>
-                      <a:r>
-                        <a:rPr lang="en-US" sz="2200" dirty="0">
-                          <a:solidFill>
-                            <a:srgbClr val="111111"/>
-                          </a:solidFill>
-                          <a:latin typeface="Calibri" pitchFamily="34" charset="0"/>
-                          <a:ea typeface="Calibri" pitchFamily="34" charset="-122"/>
-                          <a:cs typeface="Calibri" pitchFamily="34" charset="-120"/>
-                        </a:rPr>
-                        <a:t>Intensification</a:t>
-                      </a:r>
-                      <a:endParaRPr lang="en-US" sz="2200" dirty="0">
-                        <a:latin typeface="Calibri" charset="0"/>
-                        <a:ea typeface="Calibri" charset="0"/>
-                        <a:cs typeface="Calibri" charset="0"/>
-                      </a:endParaRPr>
-                    </a:p>
-                  </a:txBody>
-                  <a:tcPr marL="73152" marR="73152" marT="73152" marB="73152" anchor="ctr">
-                    <a:lnL w="12700" cap="flat" cmpd="sng" algn="ctr">
-                      <a:solidFill>
-                        <a:srgbClr val="BBBBBB"/>
-                      </a:solidFill>
-                      <a:prstDash val="solid"/>
-                      <a:round/>
-                      <a:headEnd type="none" w="med" len="med"/>
-                      <a:tailEnd type="none" w="med" len="med"/>
-                    </a:lnL>
-                    <a:lnR w="12700" cap="flat" cmpd="sng" algn="ctr">
-                      <a:solidFill>
-                        <a:srgbClr val="BBBBBB"/>
-                      </a:solidFill>
-                      <a:prstDash val="solid"/>
-                      <a:round/>
-                      <a:headEnd type="none" w="med" len="med"/>
-                      <a:tailEnd type="none" w="med" len="med"/>
-                    </a:lnR>
-                    <a:lnT w="12700" cap="flat" cmpd="sng" algn="ctr">
-                      <a:solidFill>
-                        <a:srgbClr val="BBBBBB"/>
-                      </a:solidFill>
-                      <a:prstDash val="solid"/>
-                      <a:round/>
-                      <a:headEnd type="none" w="med" len="med"/>
-                      <a:tailEnd type="none" w="med" len="med"/>
-                    </a:lnT>
-                    <a:lnB w="12700" cap="flat" cmpd="sng" algn="ctr">
-                      <a:solidFill>
-                        <a:srgbClr val="BBBBBB"/>
-                      </a:solidFill>
-                      <a:prstDash val="solid"/>
-                      <a:round/>
-                      <a:headEnd type="none" w="med" len="med"/>
-                      <a:tailEnd type="none" w="med" len="med"/>
-                    </a:lnB>
-                    <a:solidFill>
-                      <a:srgbClr val="FFFFFF"/>
-                    </a:solidFill>
-                  </a:tcPr>
-                </a:tc>
-                <a:tc>
-                  <a:txBody>
-                    <a:bodyPr/>
-                    <a:lstStyle/>
-                    <a:p>
-                      <a:pPr algn="ctr" indent="0" marL="0">
-                        <a:buNone/>
-                      </a:pPr>
-                      <a:r>
-                        <a:rPr lang="en-US" sz="2200" dirty="0">
-                          <a:solidFill>
-                            <a:srgbClr val="111111"/>
-                          </a:solidFill>
-                          <a:latin typeface="Calibri" pitchFamily="34" charset="0"/>
-                          <a:ea typeface="Calibri" pitchFamily="34" charset="-122"/>
-                          <a:cs typeface="Calibri" pitchFamily="34" charset="-120"/>
-                        </a:rPr>
                         <a:t>L'intensification</a:t>
-                      </a:r>
-                      <a:endParaRPr lang="en-US" sz="2200" dirty="0">
-                        <a:latin typeface="Calibri" charset="0"/>
-                        <a:ea typeface="Calibri" charset="0"/>
-                        <a:cs typeface="Calibri" charset="0"/>
-                      </a:endParaRPr>
-                    </a:p>
-                  </a:txBody>
-                  <a:tcPr marL="73152" marR="73152" marT="73152" marB="73152" anchor="ctr">
-                    <a:lnL w="12700" cap="flat" cmpd="sng" algn="ctr">
-                      <a:solidFill>
-                        <a:srgbClr val="BBBBBB"/>
-                      </a:solidFill>
-                      <a:prstDash val="solid"/>
-                      <a:round/>
-                      <a:headEnd type="none" w="med" len="med"/>
-                      <a:tailEnd type="none" w="med" len="med"/>
-                    </a:lnL>
-                    <a:lnR w="12700" cap="flat" cmpd="sng" algn="ctr">
-                      <a:solidFill>
-                        <a:srgbClr val="BBBBBB"/>
-                      </a:solidFill>
-                      <a:prstDash val="solid"/>
-                      <a:round/>
-                      <a:headEnd type="none" w="med" len="med"/>
-                      <a:tailEnd type="none" w="med" len="med"/>
-                    </a:lnR>
-                    <a:lnT w="12700" cap="flat" cmpd="sng" algn="ctr">
-                      <a:solidFill>
-                        <a:srgbClr val="BBBBBB"/>
-                      </a:solidFill>
-                      <a:prstDash val="solid"/>
-                      <a:round/>
-                      <a:headEnd type="none" w="med" len="med"/>
-                      <a:tailEnd type="none" w="med" len="med"/>
-                    </a:lnT>
-                    <a:lnB w="12700" cap="flat" cmpd="sng" algn="ctr">
-                      <a:solidFill>
-                        <a:srgbClr val="BBBBBB"/>
-                      </a:solidFill>
-                      <a:prstDash val="solid"/>
-                      <a:round/>
-                      <a:headEnd type="none" w="med" len="med"/>
-                      <a:tailEnd type="none" w="med" len="med"/>
-                    </a:lnB>
-                    <a:solidFill>
-                      <a:srgbClr val="FFFFFF"/>
-                    </a:solidFill>
-                  </a:tcPr>
-                </a:tc>
-              </a:tr>
-              <a:tr h="0">
-                <a:tc>
-                  <a:txBody>
-                    <a:bodyPr/>
-                    <a:lstStyle/>
-                    <a:p>
-                      <a:pPr algn="ctr" indent="0" marL="0">
-                        <a:buNone/>
-                      </a:pPr>
-                      <a:r>
-                        <a:rPr lang="en-US" sz="2200" dirty="0">
-                          <a:solidFill>
-                            <a:srgbClr val="111111"/>
-                          </a:solidFill>
-                          <a:latin typeface="Calibri" pitchFamily="34" charset="0"/>
-                          <a:ea typeface="Calibri" pitchFamily="34" charset="-122"/>
-                          <a:cs typeface="Calibri" pitchFamily="34" charset="-120"/>
-                        </a:rPr>
-                        <a:t>Pessimist</a:t>
-                      </a:r>
-                      <a:endParaRPr lang="en-US" sz="2200" dirty="0">
-                        <a:latin typeface="Calibri" charset="0"/>
-                        <a:ea typeface="Calibri" charset="0"/>
-                        <a:cs typeface="Calibri" charset="0"/>
-                      </a:endParaRPr>
-                    </a:p>
-                  </a:txBody>
-                  <a:tcPr marL="73152" marR="73152" marT="73152" marB="73152" anchor="ctr">
-                    <a:lnL w="12700" cap="flat" cmpd="sng" algn="ctr">
-                      <a:solidFill>
-                        <a:srgbClr val="BBBBBB"/>
-                      </a:solidFill>
-                      <a:prstDash val="solid"/>
-                      <a:round/>
-                      <a:headEnd type="none" w="med" len="med"/>
-                      <a:tailEnd type="none" w="med" len="med"/>
-                    </a:lnL>
-                    <a:lnR w="12700" cap="flat" cmpd="sng" algn="ctr">
-                      <a:solidFill>
-                        <a:srgbClr val="BBBBBB"/>
-                      </a:solidFill>
-                      <a:prstDash val="solid"/>
-                      <a:round/>
-                      <a:headEnd type="none" w="med" len="med"/>
-                      <a:tailEnd type="none" w="med" len="med"/>
-                    </a:lnR>
-                    <a:lnT w="12700" cap="flat" cmpd="sng" algn="ctr">
-                      <a:solidFill>
-                        <a:srgbClr val="BBBBBB"/>
-                      </a:solidFill>
-                      <a:prstDash val="solid"/>
-                      <a:round/>
-                      <a:headEnd type="none" w="med" len="med"/>
-                      <a:tailEnd type="none" w="med" len="med"/>
-                    </a:lnT>
-                    <a:lnB w="12700" cap="flat" cmpd="sng" algn="ctr">
-                      <a:solidFill>
-                        <a:srgbClr val="BBBBBB"/>
-                      </a:solidFill>
-                      <a:prstDash val="solid"/>
-                      <a:round/>
-                      <a:headEnd type="none" w="med" len="med"/>
-                      <a:tailEnd type="none" w="med" len="med"/>
-                    </a:lnB>
-                    <a:solidFill>
-                      <a:srgbClr val="F2F4F8"/>
-                    </a:solidFill>
-                  </a:tcPr>
-                </a:tc>
-                <a:tc>
-                  <a:txBody>
-                    <a:bodyPr/>
-                    <a:lstStyle/>
-                    <a:p>
-                      <a:pPr algn="ctr" indent="0" marL="0">
-                        <a:buNone/>
-                      </a:pPr>
-                      <a:r>
-                        <a:rPr lang="en-US" sz="2200" dirty="0">
-                          <a:solidFill>
-                            <a:srgbClr val="111111"/>
-                          </a:solidFill>
-                          <a:latin typeface="Calibri" pitchFamily="34" charset="0"/>
-                          <a:ea typeface="Calibri" pitchFamily="34" charset="-122"/>
-                          <a:cs typeface="Calibri" pitchFamily="34" charset="-120"/>
-                        </a:rPr>
-                        <a:t>Pessimiste</a:t>
                       </a:r>
                       <a:endParaRPr lang="en-US" sz="2200" dirty="0">
                         <a:latin typeface="Calibri" charset="0"/>
@@ -18788,7 +23101,7 @@
             <a:pPr algn="ctr"/>
             <a:fld id="{F7021451-1387-4CA6-816F-3879F97B5CBC}" type="slidenum">
               <a:rPr b="1" lang="en-US"/>
-              <a:t>50</a:t>
+              <a:t>61</a:t>
             </a:fld>
             <a:endParaRPr lang="en-US"/>
           </a:p>
@@ -18802,9 +23115,9 @@
 </p:sld>
 </file>
 
-<file path=ppt/slides/slide51.xml><?xml version="1.0" encoding="utf-8"?>
+<file path=ppt/slides/slide62.xml><?xml version="1.0" encoding="utf-8"?>
 <p:sld xmlns:a="http://schemas.openxmlformats.org/drawingml/2006/main" xmlns:r="http://schemas.openxmlformats.org/officeDocument/2006/relationships" xmlns:p="http://schemas.openxmlformats.org/presentationml/2006/main">
-  <p:cSld name="Slide 51">
+  <p:cSld name="Slide 62">
     <p:spTree>
       <p:nvGrpSpPr>
         <p:cNvPr id="1" name=""/>
@@ -18899,7 +23212,7 @@
       </p:sp>
       <p:graphicFrame>
         <p:nvGraphicFramePr>
-          <p:cNvPr id="52" name="Table 0"/>
+          <p:cNvPr id="63" name="Table 0"/>
           <p:cNvGraphicFramePr>
             <a:graphicFrameLocks noGrp="1"/>
           </p:cNvGraphicFramePr>
@@ -19285,7 +23598,7 @@
                           <a:ea typeface="Calibri" pitchFamily="34" charset="-122"/>
                           <a:cs typeface="Calibri" pitchFamily="34" charset="-120"/>
                         </a:rPr>
-                        <a:t>Explain Malthus's theory. Explain Boserup's theory. Evaluate both theories with examples.</a:t>
+                        <a:t>Distinguish the pessimistic and optimistic views. Explain Malthus's theory and appraise it. Explain Boserup's theory and appraise it. Compare the two theories. Apply them to present-day issues.</a:t>
                       </a:r>
                       <a:endParaRPr lang="en-US" sz="1600" dirty="0">
                         <a:latin typeface="Calibri" charset="0"/>
@@ -19423,7 +23736,7 @@
                           <a:ea typeface="Calibri" pitchFamily="34" charset="-122"/>
                           <a:cs typeface="Calibri" pitchFamily="34" charset="-120"/>
                         </a:rPr>
-                        <a:t>Learners are able to compare the theories of Malthus and Boserup and apply them today.</a:t>
+                        <a:t>Learners are able to explain, compare and criticise the theories of Malthus and Boserup and apply them to North Cameroon.</a:t>
                       </a:r>
                       <a:endParaRPr lang="en-US" sz="1600" dirty="0">
                         <a:latin typeface="Calibri" charset="0"/>
@@ -19521,7 +23834,7 @@
             <a:pPr algn="ctr"/>
             <a:fld id="{F7021451-1387-4CA6-816F-3879F97B5CBC}" type="slidenum">
               <a:rPr b="1" lang="en-US"/>
-              <a:t>51</a:t>
+              <a:t>62</a:t>
             </a:fld>
             <a:endParaRPr lang="en-US"/>
           </a:p>
@@ -19535,9 +23848,9 @@
 </p:sld>
 </file>
 
-<file path=ppt/slides/slide52.xml><?xml version="1.0" encoding="utf-8"?>
+<file path=ppt/slides/slide63.xml><?xml version="1.0" encoding="utf-8"?>
 <p:sld xmlns:a="http://schemas.openxmlformats.org/drawingml/2006/main" xmlns:r="http://schemas.openxmlformats.org/officeDocument/2006/relationships" xmlns:p="http://schemas.openxmlformats.org/presentationml/2006/main">
-  <p:cSld name="Slide 52">
+  <p:cSld name="Slide 63">
     <p:spTree>
       <p:nvGrpSpPr>
         <p:cNvPr id="1" name=""/>
@@ -19632,7 +23945,7 @@
       </p:sp>
       <p:graphicFrame>
         <p:nvGraphicFramePr>
-          <p:cNvPr id="53" name="Table 0"/>
+          <p:cNvPr id="64" name="Table 0"/>
           <p:cNvGraphicFramePr>
             <a:graphicFrameLocks noGrp="1"/>
           </p:cNvGraphicFramePr>
@@ -19742,7 +24055,7 @@
                           <a:ea typeface="Calibri" pitchFamily="34" charset="-122"/>
                           <a:cs typeface="Calibri" pitchFamily="34" charset="-120"/>
                         </a:rPr>
-                        <a:t>General Views on Population and Resources; Malthus's Theory (1798); Boserup's Theory (1965).</a:t>
+                        <a:t>DEFINITIONS; The Malthusian Theory (Pessimistic View); Boserup's Theory (Optimistic View); Comparison and Application Today.</a:t>
                       </a:r>
                       <a:endParaRPr lang="en-US" sz="1600" dirty="0">
                         <a:latin typeface="Calibri" charset="0"/>
@@ -20018,7 +24331,7 @@
                           <a:ea typeface="Calibri" pitchFamily="34" charset="-122"/>
                           <a:cs typeface="Calibri" pitchFamily="34" charset="-120"/>
                         </a:rPr>
-                        <a:t>Write a debate: "Population growth is a problem for Cameroon." Give two arguments for and two against.</a:t>
+                        <a:t>State the population of Cameroon at the 2005 census.</a:t>
                       </a:r>
                       <a:endParaRPr lang="en-US" sz="1600" dirty="0">
                         <a:latin typeface="Calibri" charset="0"/>
@@ -20392,7 +24705,7 @@
             <a:pPr algn="ctr"/>
             <a:fld id="{F7021451-1387-4CA6-816F-3879F97B5CBC}" type="slidenum">
               <a:rPr b="1" lang="en-US"/>
-              <a:t>52</a:t>
+              <a:t>63</a:t>
             </a:fld>
             <a:endParaRPr lang="en-US"/>
           </a:p>
@@ -20406,9 +24719,9 @@
 </p:sld>
 </file>
 
-<file path=ppt/slides/slide53.xml><?xml version="1.0" encoding="utf-8"?>
+<file path=ppt/slides/slide64.xml><?xml version="1.0" encoding="utf-8"?>
 <p:sld xmlns:a="http://schemas.openxmlformats.org/drawingml/2006/main" xmlns:r="http://schemas.openxmlformats.org/officeDocument/2006/relationships" xmlns:p="http://schemas.openxmlformats.org/presentationml/2006/main">
-  <p:cSld name="Slide 53">
+  <p:cSld name="Slide 64">
     <p:spTree>
       <p:nvGrpSpPr>
         <p:cNvPr id="1" name=""/>
@@ -20585,7 +24898,7 @@
                 <a:ea typeface="Calibri" pitchFamily="34" charset="-122"/>
                 <a:cs typeface="Calibri" pitchFamily="34" charset="-120"/>
               </a:rPr>
-              <a:t>Without the projector (Activity 1): write the two series.</a:t>
+              <a:t>Without the projector (Activity 1): draw the comparison table.</a:t>
             </a:r>
             <a:endParaRPr lang="en-US" sz="2000" dirty="0"/>
           </a:p>
@@ -20606,7 +24919,7 @@
                 <a:ea typeface="Calibri" pitchFamily="34" charset="-122"/>
                 <a:cs typeface="Calibri" pitchFamily="34" charset="-120"/>
               </a:rPr>
-              <a:t>Without the projector (Activity 2): list preventive checks too.</a:t>
+              <a:t>Without the projector (Activity 2): write the two series on the board.</a:t>
             </a:r>
             <a:endParaRPr lang="en-US" sz="2000" dirty="0"/>
           </a:p>
@@ -20627,7 +24940,7 @@
                 <a:ea typeface="Calibri" pitchFamily="34" charset="-122"/>
                 <a:cs typeface="Calibri" pitchFamily="34" charset="-120"/>
               </a:rPr>
-              <a:t>Without the projector (Activity 3): draw the staircase.</a:t>
+              <a:t>Without the projector (Activity 3): discuss food crises in the Sahel.</a:t>
             </a:r>
             <a:endParaRPr lang="en-US" sz="2000" dirty="0"/>
           </a:p>
@@ -20648,7 +24961,7 @@
                 <a:ea typeface="Calibri" pitchFamily="34" charset="-122"/>
                 <a:cs typeface="Calibri" pitchFamily="34" charset="-120"/>
               </a:rPr>
-              <a:t>Without the projector (Activity 4): mention the Mandara terraces.</a:t>
+              <a:t>Without the projector (Activity 4): draw the staircase.</a:t>
             </a:r>
             <a:endParaRPr lang="en-US" sz="2000" dirty="0"/>
           </a:p>
@@ -20669,7 +24982,7 @@
                 <a:ea typeface="Calibri" pitchFamily="34" charset="-122"/>
                 <a:cs typeface="Calibri" pitchFamily="34" charset="-120"/>
               </a:rPr>
-              <a:t>Without the projector (Activity 5): discuss food production today.</a:t>
+              <a:t>Without the projector (Activity 5): describe irrigated rice at Lagdo.</a:t>
             </a:r>
             <a:endParaRPr lang="en-US" sz="2000" dirty="0"/>
           </a:p>
@@ -20717,7 +25030,7 @@
             <a:pPr algn="ctr"/>
             <a:fld id="{F7021451-1387-4CA6-816F-3879F97B5CBC}" type="slidenum">
               <a:rPr b="1" lang="en-US"/>
-              <a:t>53</a:t>
+              <a:t>64</a:t>
             </a:fld>
             <a:endParaRPr lang="en-US"/>
           </a:p>
@@ -20731,9 +25044,9 @@
 </p:sld>
 </file>
 
-<file path=ppt/slides/slide54.xml><?xml version="1.0" encoding="utf-8"?>
+<file path=ppt/slides/slide65.xml><?xml version="1.0" encoding="utf-8"?>
 <p:sld xmlns:a="http://schemas.openxmlformats.org/drawingml/2006/main" xmlns:r="http://schemas.openxmlformats.org/officeDocument/2006/relationships" xmlns:p="http://schemas.openxmlformats.org/presentationml/2006/main">
-  <p:cSld name="Slide 54">
+  <p:cSld name="Slide 65">
     <p:spTree>
       <p:nvGrpSpPr>
         <p:cNvPr id="1" name=""/>
@@ -20889,7 +25202,7 @@
                 <a:ea typeface="Calibri" pitchFamily="34" charset="-122"/>
                 <a:cs typeface="Calibri" pitchFamily="34" charset="-120"/>
               </a:rPr>
-              <a:t>National Geography Syllabus, MINESEC/IGE/IP-SS, 2019 — Module 4 (Population Geography).</a:t>
+              <a:t>Geography Syllabus for Sixth Forms (Lower and Upper Sixth), MINESEC, 2019 — Module 4 (Population Geography).</a:t>
             </a:r>
             <a:endParaRPr lang="en-US" sz="1800" dirty="0"/>
           </a:p>
@@ -20910,7 +25223,7 @@
                 <a:ea typeface="Calibri" pitchFamily="34" charset="-122"/>
                 <a:cs typeface="Calibri" pitchFamily="34" charset="-120"/>
               </a:rPr>
-              <a:t>Photo, Activity 2: “Imagine a world without trees” by aloshbennett, CC BY 2.0, via Flickr (https://www.flickr.com/photos/13203757@N00/3480223314)</a:t>
+              <a:t>Teacher's course notes: Mr KAMDEM E., Population Geography (USA), GBHS Garoua, 2026.</a:t>
             </a:r>
             <a:endParaRPr lang="en-US" sz="1800" dirty="0"/>
           </a:p>
@@ -20931,7 +25244,7 @@
                 <a:ea typeface="Calibri" pitchFamily="34" charset="-122"/>
                 <a:cs typeface="Calibri" pitchFamily="34" charset="-120"/>
               </a:rPr>
-              <a:t>Photo, Activity 4: “Terraced Hillside” by AdamCohn, CC BY-NC-ND 2.0, via Flickr (https://www.flickr.com/photos/96142515@N00/6311042523)</a:t>
+              <a:t>United Nations, World Population Prospects 2024.</a:t>
             </a:r>
             <a:endParaRPr lang="en-US" sz="1800" dirty="0"/>
           </a:p>
@@ -20952,7 +25265,7 @@
                 <a:ea typeface="Calibri" pitchFamily="34" charset="-122"/>
                 <a:cs typeface="Calibri" pitchFamily="34" charset="-120"/>
               </a:rPr>
-              <a:t>Photo, Activity 5: “A woman harvesting rice, Barotse floodplain, Zambia. Photo by Georgina” by WorldFish, CC BY-NC-ND 2.0, via Flickr (https://www.flickr.com/photos/61545321@N06/7848727138)</a:t>
+              <a:t>Photo, Activity 3: “Imagine a world without trees” by aloshbennett, CC BY 2.0, via Flickr (https://www.flickr.com/photos/13203757@N00/3480223314)</a:t>
             </a:r>
             <a:endParaRPr lang="en-US" sz="1800" dirty="0"/>
           </a:p>
@@ -20973,6 +25286,27 @@
                 <a:ea typeface="Calibri" pitchFamily="34" charset="-122"/>
                 <a:cs typeface="Calibri" pitchFamily="34" charset="-120"/>
               </a:rPr>
+              <a:t>Photo, Activity 5: “South Holston Lake, (Virginia-Tennessee border, USA)” by James St. John, CC BY 2.0, via Flickr (https://www.flickr.com/photos/47445767@N05/39221734762)</a:t>
+            </a:r>
+            <a:endParaRPr lang="en-US" sz="1800" dirty="0"/>
+          </a:p>
+          <a:p>
+            <a:pPr algn="l" marL="342900" indent="-342900">
+              <a:spcAft>
+                <a:spcPts val="800"/>
+              </a:spcAft>
+              <a:buSzPct val="100000"/>
+              <a:buChar char="•"/>
+            </a:pPr>
+            <a:r>
+              <a:rPr lang="en-US" sz="1800" dirty="0">
+                <a:solidFill>
+                  <a:srgbClr val="111111"/>
+                </a:solidFill>
+                <a:latin typeface="Calibri" pitchFamily="34" charset="0"/>
+                <a:ea typeface="Calibri" pitchFamily="34" charset="-122"/>
+                <a:cs typeface="Calibri" pitchFamily="34" charset="-120"/>
+              </a:rPr>
               <a:t>Diagrams and animations: drawn for this lesson (Geography Department).</a:t>
             </a:r>
             <a:endParaRPr lang="en-US" sz="1800" dirty="0"/>
@@ -21021,338 +25355,7 @@
             <a:pPr algn="ctr"/>
             <a:fld id="{F7021451-1387-4CA6-816F-3879F97B5CBC}" type="slidenum">
               <a:rPr b="1" lang="en-US"/>
-              <a:t>54</a:t>
-            </a:fld>
-            <a:endParaRPr lang="en-US"/>
-          </a:p>
-        </p:txBody>
-      </p:sp>
-    </p:spTree>
-  </p:cSld>
-  <p:clrMapOvr>
-    <a:masterClrMapping/>
-  </p:clrMapOvr>
-</p:sld>
-</file>
-
-<file path=ppt/slides/slide6.xml><?xml version="1.0" encoding="utf-8"?>
-<p:sld xmlns:a="http://schemas.openxmlformats.org/drawingml/2006/main" xmlns:r="http://schemas.openxmlformats.org/officeDocument/2006/relationships" xmlns:p="http://schemas.openxmlformats.org/presentationml/2006/main">
-  <p:cSld name="Slide 6">
-    <p:spTree>
-      <p:nvGrpSpPr>
-        <p:cNvPr id="1" name=""/>
-        <p:cNvGrpSpPr/>
-        <p:nvPr/>
-      </p:nvGrpSpPr>
-      <p:grpSpPr>
-        <a:xfrm>
-          <a:off x="0" y="0"/>
-          <a:ext cx="0" cy="0"/>
-          <a:chOff x="0" y="0"/>
-          <a:chExt cx="0" cy="0"/>
-        </a:xfrm>
-      </p:grpSpPr>
-      <p:sp>
-        <p:nvSpPr>
-          <p:cNvPr id="2" name="Text 0"/>
-          <p:cNvSpPr/>
-          <p:nvPr/>
-        </p:nvSpPr>
-        <p:spPr>
-          <a:xfrm>
-            <a:off x="457200" y="713232"/>
-            <a:ext cx="11368735" cy="274320"/>
-          </a:xfrm>
-          <a:prstGeom prst="rect">
-            <a:avLst/>
-          </a:prstGeom>
-          <a:noFill/>
-          <a:ln/>
-        </p:spPr>
-        <p:txBody>
-          <a:bodyPr wrap="square" lIns="0" tIns="0" rIns="0" bIns="0" rtlCol="0" anchor="ctr"/>
-          <a:lstStyle/>
-          <a:p>
-            <a:pPr algn="r" indent="0" marL="0">
-              <a:buNone/>
-            </a:pPr>
-            <a:r>
-              <a:rPr lang="en-US" sz="1400" b="1" dirty="0">
-                <a:solidFill>
-                  <a:srgbClr val="1C3F6E"/>
-                </a:solidFill>
-                <a:latin typeface="Calibri" pitchFamily="34" charset="0"/>
-                <a:ea typeface="Calibri" pitchFamily="34" charset="-122"/>
-                <a:cs typeface="Calibri" pitchFamily="34" charset="-120"/>
-              </a:rPr>
-              <a:t>LESSON PLAN</a:t>
-            </a:r>
-            <a:endParaRPr lang="en-US" sz="1400" dirty="0"/>
-          </a:p>
-        </p:txBody>
-      </p:sp>
-      <p:pic>
-        <p:nvPicPr>
-          <p:cNvPr id="3" name="Image 0" descr="/home/claude/f4/img/minesec_sheet.png">    </p:cNvPr>
-          <p:cNvPicPr>
-            <a:picLocks noChangeAspect="1"/>
-          </p:cNvPicPr>
-          <p:nvPr/>
-        </p:nvPicPr>
-        <p:blipFill>
-          <a:blip r:embed="rId1"/>
-          <a:stretch>
-            <a:fillRect/>
-          </a:stretch>
-        </p:blipFill>
-        <p:spPr>
-          <a:xfrm>
-            <a:off x="0" y="658368"/>
-            <a:ext cx="2468880" cy="5833872"/>
-          </a:xfrm>
-          <a:prstGeom prst="rect">
-            <a:avLst/>
-          </a:prstGeom>
-        </p:spPr>
-      </p:pic>
-      <p:sp>
-        <p:nvSpPr>
-          <p:cNvPr id="4" name="Text 1"/>
-          <p:cNvSpPr/>
-          <p:nvPr/>
-        </p:nvSpPr>
-        <p:spPr>
-          <a:xfrm>
-            <a:off x="2697480" y="1005840"/>
-            <a:ext cx="9174175" cy="731520"/>
-          </a:xfrm>
-          <a:prstGeom prst="rect">
-            <a:avLst/>
-          </a:prstGeom>
-          <a:noFill/>
-          <a:ln/>
-        </p:spPr>
-        <p:txBody>
-          <a:bodyPr wrap="square" lIns="0" tIns="0" rIns="0" bIns="0" rtlCol="0" anchor="ctr">
-            <a:normAutofit/>
-          </a:bodyPr>
-          <a:lstStyle/>
-          <a:p>
-            <a:pPr algn="ctr" indent="0" marL="0">
-              <a:buNone/>
-            </a:pPr>
-            <a:r>
-              <a:rPr lang="en-US" sz="3600" b="1" dirty="0">
-                <a:solidFill>
-                  <a:srgbClr val="990011"/>
-                </a:solidFill>
-                <a:latin typeface="Times New Roman" pitchFamily="34" charset="0"/>
-                <a:ea typeface="Times New Roman" pitchFamily="34" charset="-122"/>
-                <a:cs typeface="Times New Roman" pitchFamily="34" charset="-120"/>
-              </a:rPr>
-              <a:t>Lesson Plan</a:t>
-            </a:r>
-            <a:endParaRPr lang="en-US" sz="3600" dirty="0"/>
-          </a:p>
-        </p:txBody>
-      </p:sp>
-      <p:sp>
-        <p:nvSpPr>
-          <p:cNvPr id="5" name="Text 2"/>
-          <p:cNvSpPr/>
-          <p:nvPr/>
-        </p:nvSpPr>
-        <p:spPr>
-          <a:xfrm>
-            <a:off x="2697480" y="1783080"/>
-            <a:ext cx="9174175" cy="4663440"/>
-          </a:xfrm>
-          <a:prstGeom prst="rect">
-            <a:avLst/>
-          </a:prstGeom>
-          <a:noFill/>
-          <a:ln/>
-        </p:spPr>
-        <p:txBody>
-          <a:bodyPr wrap="square" lIns="0" tIns="0" rIns="0" bIns="0" rtlCol="0" anchor="t"/>
-          <a:lstStyle/>
-          <a:p>
-            <a:pPr algn="l" marL="342900" indent="-342900">
-              <a:spcAft>
-                <a:spcPts val="800"/>
-              </a:spcAft>
-              <a:buSzPct val="100000"/>
-              <a:buFont typeface="+mj-lt"/>
-              <a:buAutoNum type="arabicPeriod" startAt="1"/>
-            </a:pPr>
-            <a:r>
-              <a:rPr lang="en-US" sz="4000" dirty="0">
-                <a:solidFill>
-                  <a:srgbClr val="111111"/>
-                </a:solidFill>
-                <a:latin typeface="Times New Roman" pitchFamily="34" charset="0"/>
-                <a:ea typeface="Times New Roman" pitchFamily="34" charset="-122"/>
-                <a:cs typeface="Times New Roman" pitchFamily="34" charset="-120"/>
-              </a:rPr>
-              <a:t>Correction of the homework</a:t>
-            </a:r>
-            <a:endParaRPr lang="en-US" sz="4000" dirty="0"/>
-          </a:p>
-          <a:p>
-            <a:pPr algn="l" marL="342900" indent="-342900">
-              <a:spcAft>
-                <a:spcPts val="800"/>
-              </a:spcAft>
-              <a:buSzPct val="100000"/>
-              <a:buFont typeface="+mj-lt"/>
-              <a:buAutoNum type="arabicPeriod" startAt="1"/>
-            </a:pPr>
-            <a:r>
-              <a:rPr lang="en-US" sz="4000" dirty="0">
-                <a:solidFill>
-                  <a:srgbClr val="111111"/>
-                </a:solidFill>
-                <a:latin typeface="Times New Roman" pitchFamily="34" charset="0"/>
-                <a:ea typeface="Times New Roman" pitchFamily="34" charset="-122"/>
-                <a:cs typeface="Times New Roman" pitchFamily="34" charset="-120"/>
-              </a:rPr>
-              <a:t>Objectives and recall</a:t>
-            </a:r>
-            <a:endParaRPr lang="en-US" sz="4000" dirty="0"/>
-          </a:p>
-          <a:p>
-            <a:pPr algn="l" marL="342900" indent="-342900">
-              <a:spcAft>
-                <a:spcPts val="800"/>
-              </a:spcAft>
-              <a:buSzPct val="100000"/>
-              <a:buFont typeface="+mj-lt"/>
-              <a:buAutoNum type="arabicPeriod" startAt="1"/>
-            </a:pPr>
-            <a:r>
-              <a:rPr lang="en-US" sz="4000" dirty="0">
-                <a:solidFill>
-                  <a:srgbClr val="111111"/>
-                </a:solidFill>
-                <a:latin typeface="Times New Roman" pitchFamily="34" charset="0"/>
-                <a:ea typeface="Times New Roman" pitchFamily="34" charset="-122"/>
-                <a:cs typeface="Times New Roman" pitchFamily="34" charset="-120"/>
-              </a:rPr>
-              <a:t>Real-life situation and action to take</a:t>
-            </a:r>
-            <a:endParaRPr lang="en-US" sz="4000" dirty="0"/>
-          </a:p>
-          <a:p>
-            <a:pPr algn="l" marL="342900" indent="-342900">
-              <a:spcAft>
-                <a:spcPts val="800"/>
-              </a:spcAft>
-              <a:buSzPct val="100000"/>
-              <a:buFont typeface="+mj-lt"/>
-              <a:buAutoNum type="arabicPeriod" startAt="1"/>
-            </a:pPr>
-            <a:r>
-              <a:rPr lang="en-US" sz="4000" dirty="0">
-                <a:solidFill>
-                  <a:srgbClr val="111111"/>
-                </a:solidFill>
-                <a:latin typeface="Times New Roman" pitchFamily="34" charset="0"/>
-                <a:ea typeface="Times New Roman" pitchFamily="34" charset="-122"/>
-                <a:cs typeface="Times New Roman" pitchFamily="34" charset="-120"/>
-              </a:rPr>
-              <a:t>Learning activities</a:t>
-            </a:r>
-            <a:endParaRPr lang="en-US" sz="4000" dirty="0"/>
-          </a:p>
-          <a:p>
-            <a:pPr algn="l" marL="342900" indent="-342900">
-              <a:spcAft>
-                <a:spcPts val="800"/>
-              </a:spcAft>
-              <a:buSzPct val="100000"/>
-              <a:buFont typeface="+mj-lt"/>
-              <a:buAutoNum type="arabicPeriod" startAt="1"/>
-            </a:pPr>
-            <a:r>
-              <a:rPr lang="en-US" sz="4000" dirty="0">
-                <a:solidFill>
-                  <a:srgbClr val="111111"/>
-                </a:solidFill>
-                <a:latin typeface="Times New Roman" pitchFamily="34" charset="0"/>
-                <a:ea typeface="Times New Roman" pitchFamily="34" charset="-122"/>
-                <a:cs typeface="Times New Roman" pitchFamily="34" charset="-120"/>
-              </a:rPr>
-              <a:t>Board summary</a:t>
-            </a:r>
-            <a:endParaRPr lang="en-US" sz="4000" dirty="0"/>
-          </a:p>
-          <a:p>
-            <a:pPr algn="l" marL="342900" indent="-342900">
-              <a:spcAft>
-                <a:spcPts val="800"/>
-              </a:spcAft>
-              <a:buSzPct val="100000"/>
-              <a:buFont typeface="+mj-lt"/>
-              <a:buAutoNum type="arabicPeriod" startAt="1"/>
-            </a:pPr>
-            <a:r>
-              <a:rPr lang="en-US" sz="4000" dirty="0">
-                <a:solidFill>
-                  <a:srgbClr val="111111"/>
-                </a:solidFill>
-                <a:latin typeface="Times New Roman" pitchFamily="34" charset="0"/>
-                <a:ea typeface="Times New Roman" pitchFamily="34" charset="-122"/>
-                <a:cs typeface="Times New Roman" pitchFamily="34" charset="-120"/>
-              </a:rPr>
-              <a:t>Evaluation, remediation and homework</a:t>
-            </a:r>
-            <a:endParaRPr lang="en-US" sz="4000" dirty="0"/>
-          </a:p>
-        </p:txBody>
-      </p:sp>
-      <p:sp>
-        <p:nvSpPr>
-          <p:cNvPr id="25" name="Slide Number Placeholder 0"/>
-          <p:cNvSpPr>
-            <a:spLocks noGrp="1"/>
-          </p:cNvSpPr>
-          <p:nvPr>
-            <p:ph type="sldNum" sz="quarter" idx="4294967295"/>
-          </p:nvPr>
-        </p:nvSpPr>
-        <p:spPr>
-          <a:xfrm>
-            <a:off x="27432" y="91440"/>
-            <a:ext cx="585216" cy="475488"/>
-          </a:xfrm>
-          <a:prstGeom prst="rect">
-            <a:avLst/>
-          </a:prstGeom>
-          <a:extLst>
-            <a:ext uri="{C572A759-6A51-4108-AA02-DFA0A04FC94B}">
-              <ma14:wrappingTextBoxFlag xmlns:ma14="http://schemas.microsoft.com/office/mac/drawingml/2011/main" val="0"/>
-            </a:ext>
-          </a:extLst>
-        </p:spPr>
-        <p:txBody>
-          <a:bodyPr/>
-          <a:lstStyle>
-            <a:lvl1pPr>
-              <a:defRPr sz="2000">
-                <a:solidFill>
-                  <a:srgbClr val="FFFFFF"/>
-                </a:solidFill>
-                <a:latin typeface="Calibri"/>
-                <a:ea typeface="Calibri"/>
-                <a:cs typeface="Calibri"/>
-              </a:defRPr>
-            </a:lvl1pPr>
-          </a:lstStyle>
-          <a:p>
-            <a:pPr algn="ctr"/>
-            <a:fld id="{F7021451-1387-4CA6-816F-3879F97B5CBC}" type="slidenum">
-              <a:rPr b="1" lang="en-US"/>
-              <a:t>6</a:t>
+              <a:t>65</a:t>
             </a:fld>
             <a:endParaRPr lang="en-US"/>
           </a:p>
@@ -21439,7 +25442,7 @@
         <p:spPr>
           <a:xfrm>
             <a:off x="0" y="658368"/>
-            <a:ext cx="5120640" cy="5833872"/>
+            <a:ext cx="1463040" cy="5833872"/>
           </a:xfrm>
           <a:prstGeom prst="rect">
             <a:avLst/>
@@ -21454,8 +25457,8 @@
         </p:nvSpPr>
         <p:spPr>
           <a:xfrm>
-            <a:off x="5349240" y="1005840"/>
-            <a:ext cx="6522415" cy="731520"/>
+            <a:off x="1691640" y="1005840"/>
+            <a:ext cx="10180015" cy="731520"/>
           </a:xfrm>
           <a:prstGeom prst="rect">
             <a:avLst/>
@@ -21495,8 +25498,8 @@
         </p:nvSpPr>
         <p:spPr>
           <a:xfrm>
-            <a:off x="5349240" y="1783080"/>
-            <a:ext cx="6522415" cy="4663440"/>
+            <a:off x="1691640" y="1783080"/>
+            <a:ext cx="10180015" cy="4663440"/>
           </a:xfrm>
           <a:prstGeom prst="rect">
             <a:avLst/>
@@ -21545,7 +25548,7 @@
                 <a:ea typeface="Times New Roman" pitchFamily="34" charset="-122"/>
                 <a:cs typeface="Times New Roman" pitchFamily="34" charset="-120"/>
               </a:rPr>
-              <a:t>Explain Malthus's theory.</a:t>
+              <a:t>Distinguish the pessimistic and optimistic views.</a:t>
             </a:r>
             <a:endParaRPr lang="en-US" sz="4000" dirty="0"/>
           </a:p>
@@ -21567,7 +25570,7 @@
                 <a:ea typeface="Times New Roman" pitchFamily="34" charset="-122"/>
                 <a:cs typeface="Times New Roman" pitchFamily="34" charset="-120"/>
               </a:rPr>
-              <a:t>Explain Boserup's theory.</a:t>
+              <a:t>Explain Malthus's theory and appraise it.</a:t>
             </a:r>
             <a:endParaRPr lang="en-US" sz="4000" dirty="0"/>
           </a:p>
@@ -21589,7 +25592,7 @@
                 <a:ea typeface="Times New Roman" pitchFamily="34" charset="-122"/>
                 <a:cs typeface="Times New Roman" pitchFamily="34" charset="-120"/>
               </a:rPr>
-              <a:t>Evaluate both theories with examples.</a:t>
+              <a:t>Explain Boserup's theory and appraise it.</a:t>
             </a:r>
             <a:endParaRPr lang="en-US" sz="4000" dirty="0"/>
           </a:p>
@@ -21701,7 +25704,7 @@
                 <a:ea typeface="Calibri" pitchFamily="34" charset="-122"/>
                 <a:cs typeface="Calibri" pitchFamily="34" charset="-120"/>
               </a:rPr>
-              <a:t>PREVIOUS KNOWLEDGE</a:t>
+              <a:t>OBJECTIVES</a:t>
             </a:r>
             <a:endParaRPr lang="en-US" sz="1400" dirty="0"/>
           </a:p>
@@ -21766,7 +25769,7 @@
                 <a:ea typeface="Times New Roman" pitchFamily="34" charset="-122"/>
                 <a:cs typeface="Times New Roman" pitchFamily="34" charset="-120"/>
               </a:rPr>
-              <a:t>Previous Knowledge</a:t>
+              <a:t>Objectives (continued)</a:t>
             </a:r>
             <a:endParaRPr lang="en-US" sz="3600" dirty="0"/>
           </a:p>
@@ -21798,7 +25801,8 @@
                 <a:spcPts val="800"/>
               </a:spcAft>
               <a:buSzPct val="100000"/>
-              <a:buChar char="•"/>
+              <a:buFont typeface="+mj-lt"/>
+              <a:buAutoNum type="arabicPeriod" startAt="1"/>
             </a:pPr>
             <a:r>
               <a:rPr lang="en-US" sz="4000" dirty="0">
@@ -21809,7 +25813,7 @@
                 <a:ea typeface="Times New Roman" pitchFamily="34" charset="-122"/>
                 <a:cs typeface="Times New Roman" pitchFamily="34" charset="-120"/>
               </a:rPr>
-              <a:t>Population can overshoot carrying capacity.</a:t>
+              <a:t>Compare the two theories.</a:t>
             </a:r>
             <a:endParaRPr lang="en-US" sz="4000" dirty="0"/>
           </a:p>
@@ -21819,7 +25823,8 @@
                 <a:spcPts val="800"/>
               </a:spcAft>
               <a:buSzPct val="100000"/>
-              <a:buChar char="•"/>
+              <a:buFont typeface="+mj-lt"/>
+              <a:buAutoNum type="arabicPeriod" startAt="1"/>
             </a:pPr>
             <a:r>
               <a:rPr lang="en-US" sz="4000" dirty="0">
@@ -21830,7 +25835,7 @@
                 <a:ea typeface="Times New Roman" pitchFamily="34" charset="-122"/>
                 <a:cs typeface="Times New Roman" pitchFamily="34" charset="-120"/>
               </a:rPr>
-              <a:t>Technology can raise food production.</a:t>
+              <a:t>Apply them to present-day issues.</a:t>
             </a:r>
             <a:endParaRPr lang="en-US" sz="4000" dirty="0"/>
           </a:p>
@@ -21942,7 +25947,7 @@
                 <a:ea typeface="Calibri" pitchFamily="34" charset="-122"/>
                 <a:cs typeface="Calibri" pitchFamily="34" charset="-120"/>
               </a:rPr>
-              <a:t>REAL-LIFE SITUATION</a:t>
+              <a:t>PREVIOUS KNOWLEDGE</a:t>
             </a:r>
             <a:endParaRPr lang="en-US" sz="1400" dirty="0"/>
           </a:p>
@@ -22007,7 +26012,7 @@
                 <a:ea typeface="Times New Roman" pitchFamily="34" charset="-122"/>
                 <a:cs typeface="Times New Roman" pitchFamily="34" charset="-120"/>
               </a:rPr>
-              <a:t>Situation in Real Life</a:t>
+              <a:t>Previous Knowledge</a:t>
             </a:r>
             <a:endParaRPr lang="en-US" sz="3600" dirty="0"/>
           </a:p>
@@ -22034,11 +26039,12 @@
           <a:bodyPr wrap="square" lIns="0" tIns="0" rIns="0" bIns="0" rtlCol="0" anchor="t"/>
           <a:lstStyle/>
           <a:p>
-            <a:pPr algn="l" indent="0" marL="0">
+            <a:pPr algn="l" marL="342900" indent="-342900">
               <a:spcAft>
                 <a:spcPts val="800"/>
               </a:spcAft>
-              <a:buNone/>
+              <a:buSzPct val="100000"/>
+              <a:buChar char="•"/>
             </a:pPr>
             <a:r>
               <a:rPr lang="en-US" sz="4000" dirty="0">
@@ -22049,7 +26055,49 @@
                 <a:ea typeface="Times New Roman" pitchFamily="34" charset="-122"/>
                 <a:cs typeface="Times New Roman" pitchFamily="34" charset="-120"/>
               </a:rPr>
-              <a:t>An economist says that population growth will lead to famine. A farmer in the Mandara Mountains says that when land became scarce, his ancestors built terraces and produced more food.</a:t>
+              <a:t>Overpopulation lowers living standards.</a:t>
+            </a:r>
+            <a:endParaRPr lang="en-US" sz="4000" dirty="0"/>
+          </a:p>
+          <a:p>
+            <a:pPr algn="l" marL="342900" indent="-342900">
+              <a:spcAft>
+                <a:spcPts val="800"/>
+              </a:spcAft>
+              <a:buSzPct val="100000"/>
+              <a:buChar char="•"/>
+            </a:pPr>
+            <a:r>
+              <a:rPr lang="en-US" sz="4000" dirty="0">
+                <a:solidFill>
+                  <a:srgbClr val="111111"/>
+                </a:solidFill>
+                <a:latin typeface="Times New Roman" pitchFamily="34" charset="0"/>
+                <a:ea typeface="Times New Roman" pitchFamily="34" charset="-122"/>
+                <a:cs typeface="Times New Roman" pitchFamily="34" charset="-120"/>
+              </a:rPr>
+              <a:t>Technology raises carrying capacity.</a:t>
+            </a:r>
+            <a:endParaRPr lang="en-US" sz="4000" dirty="0"/>
+          </a:p>
+          <a:p>
+            <a:pPr algn="l" marL="342900" indent="-342900">
+              <a:spcAft>
+                <a:spcPts val="800"/>
+              </a:spcAft>
+              <a:buSzPct val="100000"/>
+              <a:buChar char="•"/>
+            </a:pPr>
+            <a:r>
+              <a:rPr lang="en-US" sz="4000" dirty="0">
+                <a:solidFill>
+                  <a:srgbClr val="111111"/>
+                </a:solidFill>
+                <a:latin typeface="Times New Roman" pitchFamily="34" charset="0"/>
+                <a:ea typeface="Times New Roman" pitchFamily="34" charset="-122"/>
+                <a:cs typeface="Times New Roman" pitchFamily="34" charset="-120"/>
+              </a:rPr>
+              <a:t>The world population passed 8 billion in 2022.</a:t>
             </a:r>
             <a:endParaRPr lang="en-US" sz="4000" dirty="0"/>
           </a:p>
